--- a/docs/spark-bootcamp-overview.pptx
+++ b/docs/spark-bootcamp-overview.pptx
@@ -21,6 +21,7 @@
     <p:sldId id="269" r:id="rId20"/>
     <p:sldId id="270" r:id="rId21"/>
     <p:sldId id="271" r:id="rId22"/>
+    <p:sldId id="272" r:id="rId23"/>
   </p:sldIdLst>
   <p:sldSz cx="12191695" cy="6858000" type="screen4x3"/>
   <p:notesSz cx="6858000" cy="9144000"/>
@@ -3320,7 +3321,7 @@
                 </a:solidFill>
                 <a:latin typeface="Calibri"/>
               </a:rPr>
-              <a:t>A Claude Code plugin. 60 skills, one guided week.</a:t>
+              <a:t>A Claude Code plugin. 62 skills, a pre-work phase and one guided week.</a:t>
             </a:r>
           </a:p>
           <a:p>
@@ -3358,6 +3359,837 @@
 </file>
 
 <file path=ppt/slides/slide10.xml><?xml version="1.0" encoding="utf-8"?>
+<p:sld xmlns:a="http://schemas.openxmlformats.org/drawingml/2006/main" xmlns:p="http://schemas.openxmlformats.org/presentationml/2006/main" xmlns:r="http://schemas.openxmlformats.org/officeDocument/2006/relationships">
+  <p:cSld>
+    <p:spTree>
+      <p:nvGrpSpPr>
+        <p:cNvPr id="1" name=""/>
+        <p:cNvGrpSpPr/>
+        <p:nvPr/>
+      </p:nvGrpSpPr>
+      <p:grpSpPr/>
+      <p:sp>
+        <p:nvSpPr>
+          <p:cNvPr id="2" name="Rectangle 1"/>
+          <p:cNvSpPr/>
+          <p:nvPr/>
+        </p:nvSpPr>
+        <p:spPr>
+          <a:xfrm>
+            <a:off x="0" y="0"/>
+            <a:ext cx="12191695" cy="6858000"/>
+          </a:xfrm>
+          <a:prstGeom prst="rect">
+            <a:avLst/>
+          </a:prstGeom>
+          <a:solidFill>
+            <a:srgbClr val="FFFFFF"/>
+          </a:solidFill>
+          <a:ln>
+            <a:noFill/>
+          </a:ln>
+          <a:effectLst/>
+        </p:spPr>
+        <p:style>
+          <a:lnRef idx="1">
+            <a:schemeClr val="accent1"/>
+          </a:lnRef>
+          <a:fillRef idx="3">
+            <a:schemeClr val="accent1"/>
+          </a:fillRef>
+          <a:effectRef idx="2">
+            <a:schemeClr val="accent1"/>
+          </a:effectRef>
+          <a:fontRef idx="minor">
+            <a:schemeClr val="lt1"/>
+          </a:fontRef>
+        </p:style>
+        <p:txBody>
+          <a:bodyPr rtlCol="0" anchor="ctr"/>
+          <a:lstStyle/>
+          <a:p>
+            <a:pPr algn="ctr"/>
+          </a:p>
+        </p:txBody>
+      </p:sp>
+      <p:sp>
+        <p:nvSpPr>
+          <p:cNvPr id="3" name="Rectangle 2"/>
+          <p:cNvSpPr/>
+          <p:nvPr/>
+        </p:nvSpPr>
+        <p:spPr>
+          <a:xfrm>
+            <a:off x="685800" y="566928"/>
+            <a:ext cx="310896" cy="310896"/>
+          </a:xfrm>
+          <a:prstGeom prst="rect">
+            <a:avLst/>
+          </a:prstGeom>
+          <a:solidFill>
+            <a:srgbClr val="F58A23"/>
+          </a:solidFill>
+          <a:ln>
+            <a:noFill/>
+          </a:ln>
+          <a:effectLst/>
+        </p:spPr>
+        <p:style>
+          <a:lnRef idx="1">
+            <a:schemeClr val="accent1"/>
+          </a:lnRef>
+          <a:fillRef idx="3">
+            <a:schemeClr val="accent1"/>
+          </a:fillRef>
+          <a:effectRef idx="2">
+            <a:schemeClr val="accent1"/>
+          </a:effectRef>
+          <a:fontRef idx="minor">
+            <a:schemeClr val="lt1"/>
+          </a:fontRef>
+        </p:style>
+        <p:txBody>
+          <a:bodyPr rtlCol="0" anchor="ctr"/>
+          <a:lstStyle/>
+          <a:p>
+            <a:pPr algn="ctr"/>
+          </a:p>
+        </p:txBody>
+      </p:sp>
+      <p:sp>
+        <p:nvSpPr>
+          <p:cNvPr id="4" name="TextBox 3"/>
+          <p:cNvSpPr txBox="1"/>
+          <p:nvPr/>
+        </p:nvSpPr>
+        <p:spPr>
+          <a:xfrm>
+            <a:off x="1143000" y="548640"/>
+            <a:ext cx="10362895" cy="274320"/>
+          </a:xfrm>
+          <a:prstGeom prst="rect">
+            <a:avLst/>
+          </a:prstGeom>
+          <a:noFill/>
+        </p:spPr>
+        <p:txBody>
+          <a:bodyPr wrap="square" anchor="t" lIns="0" rIns="0" tIns="0" bIns="0">
+            <a:spAutoFit/>
+          </a:bodyPr>
+          <a:lstStyle/>
+          <a:p>
+            <a:pPr algn="l"/>
+            <a:r>
+              <a:rPr sz="1200" b="1">
+                <a:solidFill>
+                  <a:srgbClr val="F58A23"/>
+                </a:solidFill>
+                <a:latin typeface="Calibri"/>
+              </a:rPr>
+              <a:t>DAY 2  ·  TUESDAY</a:t>
+            </a:r>
+          </a:p>
+        </p:txBody>
+      </p:sp>
+      <p:sp>
+        <p:nvSpPr>
+          <p:cNvPr id="5" name="TextBox 4"/>
+          <p:cNvSpPr txBox="1"/>
+          <p:nvPr/>
+        </p:nvSpPr>
+        <p:spPr>
+          <a:xfrm>
+            <a:off x="1143000" y="841248"/>
+            <a:ext cx="10362895" cy="640080"/>
+          </a:xfrm>
+          <a:prstGeom prst="rect">
+            <a:avLst/>
+          </a:prstGeom>
+          <a:noFill/>
+        </p:spPr>
+        <p:txBody>
+          <a:bodyPr wrap="square" anchor="t" lIns="0" rIns="0" tIns="0" bIns="0">
+            <a:spAutoFit/>
+          </a:bodyPr>
+          <a:lstStyle/>
+          <a:p>
+            <a:pPr algn="l"/>
+            <a:r>
+              <a:rPr sz="2800" b="1">
+                <a:solidFill>
+                  <a:srgbClr val="14202B"/>
+                </a:solidFill>
+                <a:latin typeface="Calibri"/>
+              </a:rPr>
+              <a:t>Market &amp; Proposition</a:t>
+            </a:r>
+          </a:p>
+        </p:txBody>
+      </p:sp>
+      <p:sp>
+        <p:nvSpPr>
+          <p:cNvPr id="6" name="Rectangle 5"/>
+          <p:cNvSpPr/>
+          <p:nvPr/>
+        </p:nvSpPr>
+        <p:spPr>
+          <a:xfrm>
+            <a:off x="1143000" y="1481328"/>
+            <a:ext cx="1097280" cy="38100"/>
+          </a:xfrm>
+          <a:prstGeom prst="rect">
+            <a:avLst/>
+          </a:prstGeom>
+          <a:solidFill>
+            <a:srgbClr val="14202B"/>
+          </a:solidFill>
+          <a:ln>
+            <a:noFill/>
+          </a:ln>
+          <a:effectLst/>
+        </p:spPr>
+        <p:style>
+          <a:lnRef idx="1">
+            <a:schemeClr val="accent1"/>
+          </a:lnRef>
+          <a:fillRef idx="3">
+            <a:schemeClr val="accent1"/>
+          </a:fillRef>
+          <a:effectRef idx="2">
+            <a:schemeClr val="accent1"/>
+          </a:effectRef>
+          <a:fontRef idx="minor">
+            <a:schemeClr val="lt1"/>
+          </a:fontRef>
+        </p:style>
+        <p:txBody>
+          <a:bodyPr rtlCol="0" anchor="ctr"/>
+          <a:lstStyle/>
+          <a:p>
+            <a:pPr algn="ctr"/>
+          </a:p>
+        </p:txBody>
+      </p:sp>
+      <p:sp>
+        <p:nvSpPr>
+          <p:cNvPr id="7" name="TextBox 6"/>
+          <p:cNvSpPr txBox="1"/>
+          <p:nvPr/>
+        </p:nvSpPr>
+        <p:spPr>
+          <a:xfrm>
+            <a:off x="1143000" y="1627632"/>
+            <a:ext cx="10362895" cy="274320"/>
+          </a:xfrm>
+          <a:prstGeom prst="rect">
+            <a:avLst/>
+          </a:prstGeom>
+          <a:noFill/>
+        </p:spPr>
+        <p:txBody>
+          <a:bodyPr wrap="square" anchor="t" lIns="0" rIns="0" tIns="0" bIns="0">
+            <a:spAutoFit/>
+          </a:bodyPr>
+          <a:lstStyle/>
+          <a:p>
+            <a:pPr algn="l"/>
+            <a:r>
+              <a:rPr sz="1250" b="1">
+                <a:solidFill>
+                  <a:srgbClr val="F58A23"/>
+                </a:solidFill>
+                <a:latin typeface="Calibri"/>
+              </a:rPr>
+              <a:t>Outcome: a market map, market sizing, a proposition and USP, a brand, and a hand-out pitch deck.</a:t>
+            </a:r>
+          </a:p>
+        </p:txBody>
+      </p:sp>
+      <p:graphicFrame>
+        <p:nvGraphicFramePr>
+          <p:cNvPr id="8" name="Table 7"/>
+          <p:cNvGraphicFramePr>
+            <a:graphicFrameLocks noGrp="1"/>
+          </p:cNvGraphicFramePr>
+          <p:nvPr/>
+        </p:nvGraphicFramePr>
+        <p:xfrm>
+          <a:off x="1143000" y="1993392"/>
+          <a:ext cx="10362895" cy="3163824"/>
+        </p:xfrm>
+        <a:graphic>
+          <a:graphicData uri="http://schemas.openxmlformats.org/drawingml/2006/table">
+            <a:tbl>
+              <a:tblPr firstRow="0" bandRow="0">
+                <a:tableStyleId>{5C22544A-7EE6-4342-B048-85BDC9FD1C3A}</a:tableStyleId>
+              </a:tblPr>
+              <a:tblGrid>
+                <a:gridCol w="2788920"/>
+                <a:gridCol w="7573975"/>
+              </a:tblGrid>
+              <a:tr h="365760">
+                <a:tc>
+                  <a:txBody>
+                    <a:bodyPr wrap="square"/>
+                    <a:lstStyle/>
+                    <a:p>
+                      <a:pPr algn="l"/>
+                      <a:r>
+                        <a:rPr sz="1200" b="1">
+                          <a:solidFill>
+                            <a:srgbClr val="FFFFFF"/>
+                          </a:solidFill>
+                          <a:latin typeface="Calibri"/>
+                        </a:rPr>
+                        <a:t>Skill</a:t>
+                      </a:r>
+                    </a:p>
+                  </a:txBody>
+                  <a:tcPr marL="88900" marR="88900" marT="38100" marB="38100" anchor="ctr">
+                    <a:solidFill>
+                      <a:srgbClr val="14202B"/>
+                    </a:solidFill>
+                  </a:tcPr>
+                </a:tc>
+                <a:tc>
+                  <a:txBody>
+                    <a:bodyPr wrap="square"/>
+                    <a:lstStyle/>
+                    <a:p>
+                      <a:pPr algn="l"/>
+                      <a:r>
+                        <a:rPr sz="1200" b="1">
+                          <a:solidFill>
+                            <a:srgbClr val="FFFFFF"/>
+                          </a:solidFill>
+                          <a:latin typeface="Calibri"/>
+                        </a:rPr>
+                        <a:t>What it does</a:t>
+                      </a:r>
+                    </a:p>
+                  </a:txBody>
+                  <a:tcPr marL="88900" marR="88900" marT="38100" marB="38100" anchor="ctr">
+                    <a:solidFill>
+                      <a:srgbClr val="14202B"/>
+                    </a:solidFill>
+                  </a:tcPr>
+                </a:tc>
+              </a:tr>
+              <a:tr h="310896">
+                <a:tc>
+                  <a:txBody>
+                    <a:bodyPr wrap="square"/>
+                    <a:lstStyle/>
+                    <a:p>
+                      <a:pPr algn="l"/>
+                      <a:r>
+                        <a:rPr sz="1150" b="1">
+                          <a:solidFill>
+                            <a:srgbClr val="14202B"/>
+                          </a:solidFill>
+                          <a:latin typeface="Consolas"/>
+                        </a:rPr>
+                        <a:t>d2-market-map</a:t>
+                      </a:r>
+                    </a:p>
+                  </a:txBody>
+                  <a:tcPr marL="88900" marR="88900" marT="38100" marB="38100" anchor="ctr">
+                    <a:solidFill>
+                      <a:srgbClr val="F7F9FB"/>
+                    </a:solidFill>
+                  </a:tcPr>
+                </a:tc>
+                <a:tc>
+                  <a:txBody>
+                    <a:bodyPr wrap="square"/>
+                    <a:lstStyle/>
+                    <a:p>
+                      <a:pPr algn="l"/>
+                      <a:r>
+                        <a:rPr sz="1150" b="0">
+                          <a:solidFill>
+                            <a:srgbClr val="14202B"/>
+                          </a:solidFill>
+                          <a:latin typeface="Calibri"/>
+                        </a:rPr>
+                        <a:t>Name the players, the value chain and the substitutes</a:t>
+                      </a:r>
+                    </a:p>
+                  </a:txBody>
+                  <a:tcPr marL="88900" marR="88900" marT="38100" marB="38100" anchor="ctr">
+                    <a:solidFill>
+                      <a:srgbClr val="F7F9FB"/>
+                    </a:solidFill>
+                  </a:tcPr>
+                </a:tc>
+              </a:tr>
+              <a:tr h="310896">
+                <a:tc>
+                  <a:txBody>
+                    <a:bodyPr wrap="square"/>
+                    <a:lstStyle/>
+                    <a:p>
+                      <a:pPr algn="l"/>
+                      <a:r>
+                        <a:rPr sz="1150" b="1">
+                          <a:solidFill>
+                            <a:srgbClr val="14202B"/>
+                          </a:solidFill>
+                          <a:latin typeface="Consolas"/>
+                        </a:rPr>
+                        <a:t>d2-market-sizing</a:t>
+                      </a:r>
+                    </a:p>
+                  </a:txBody>
+                  <a:tcPr marL="88900" marR="88900" marT="38100" marB="38100" anchor="ctr">
+                    <a:solidFill>
+                      <a:srgbClr val="FFFFFF"/>
+                    </a:solidFill>
+                  </a:tcPr>
+                </a:tc>
+                <a:tc>
+                  <a:txBody>
+                    <a:bodyPr wrap="square"/>
+                    <a:lstStyle/>
+                    <a:p>
+                      <a:pPr algn="l"/>
+                      <a:r>
+                        <a:rPr sz="1150" b="0">
+                          <a:solidFill>
+                            <a:srgbClr val="14202B"/>
+                          </a:solidFill>
+                          <a:latin typeface="Calibri"/>
+                        </a:rPr>
+                        <a:t>Size TAM, SAM and SOM two ways and triangulate</a:t>
+                      </a:r>
+                    </a:p>
+                  </a:txBody>
+                  <a:tcPr marL="88900" marR="88900" marT="38100" marB="38100" anchor="ctr">
+                    <a:solidFill>
+                      <a:srgbClr val="FFFFFF"/>
+                    </a:solidFill>
+                  </a:tcPr>
+                </a:tc>
+              </a:tr>
+              <a:tr h="310896">
+                <a:tc>
+                  <a:txBody>
+                    <a:bodyPr wrap="square"/>
+                    <a:lstStyle/>
+                    <a:p>
+                      <a:pPr algn="l"/>
+                      <a:r>
+                        <a:rPr sz="1150" b="1">
+                          <a:solidFill>
+                            <a:srgbClr val="14202B"/>
+                          </a:solidFill>
+                          <a:latin typeface="Consolas"/>
+                        </a:rPr>
+                        <a:t>d2-competitor-scan</a:t>
+                      </a:r>
+                    </a:p>
+                  </a:txBody>
+                  <a:tcPr marL="88900" marR="88900" marT="38100" marB="38100" anchor="ctr">
+                    <a:solidFill>
+                      <a:srgbClr val="F7F9FB"/>
+                    </a:solidFill>
+                  </a:tcPr>
+                </a:tc>
+                <a:tc>
+                  <a:txBody>
+                    <a:bodyPr wrap="square"/>
+                    <a:lstStyle/>
+                    <a:p>
+                      <a:pPr algn="l"/>
+                      <a:r>
+                        <a:rPr sz="1150" b="0">
+                          <a:solidFill>
+                            <a:srgbClr val="14202B"/>
+                          </a:solidFill>
+                          <a:latin typeface="Calibri"/>
+                        </a:rPr>
+                        <a:t>Lay the rivals side by side and name the gap</a:t>
+                      </a:r>
+                    </a:p>
+                  </a:txBody>
+                  <a:tcPr marL="88900" marR="88900" marT="38100" marB="38100" anchor="ctr">
+                    <a:solidFill>
+                      <a:srgbClr val="F7F9FB"/>
+                    </a:solidFill>
+                  </a:tcPr>
+                </a:tc>
+              </a:tr>
+              <a:tr h="310896">
+                <a:tc>
+                  <a:txBody>
+                    <a:bodyPr wrap="square"/>
+                    <a:lstStyle/>
+                    <a:p>
+                      <a:pPr algn="l"/>
+                      <a:r>
+                        <a:rPr sz="1150" b="1">
+                          <a:solidFill>
+                            <a:srgbClr val="14202B"/>
+                          </a:solidFill>
+                          <a:latin typeface="Consolas"/>
+                        </a:rPr>
+                        <a:t>d2-positioning</a:t>
+                      </a:r>
+                    </a:p>
+                  </a:txBody>
+                  <a:tcPr marL="88900" marR="88900" marT="38100" marB="38100" anchor="ctr">
+                    <a:solidFill>
+                      <a:srgbClr val="FFFFFF"/>
+                    </a:solidFill>
+                  </a:tcPr>
+                </a:tc>
+                <a:tc>
+                  <a:txBody>
+                    <a:bodyPr wrap="square"/>
+                    <a:lstStyle/>
+                    <a:p>
+                      <a:pPr algn="l"/>
+                      <a:r>
+                        <a:rPr sz="1150" b="0">
+                          <a:solidFill>
+                            <a:srgbClr val="14202B"/>
+                          </a:solidFill>
+                          <a:latin typeface="Calibri"/>
+                        </a:rPr>
+                        <a:t>Fix where you win and state the one USP</a:t>
+                      </a:r>
+                    </a:p>
+                  </a:txBody>
+                  <a:tcPr marL="88900" marR="88900" marT="38100" marB="38100" anchor="ctr">
+                    <a:solidFill>
+                      <a:srgbClr val="FFFFFF"/>
+                    </a:solidFill>
+                  </a:tcPr>
+                </a:tc>
+              </a:tr>
+              <a:tr h="310896">
+                <a:tc>
+                  <a:txBody>
+                    <a:bodyPr wrap="square"/>
+                    <a:lstStyle/>
+                    <a:p>
+                      <a:pPr algn="l"/>
+                      <a:r>
+                        <a:rPr sz="1150" b="1">
+                          <a:solidFill>
+                            <a:srgbClr val="14202B"/>
+                          </a:solidFill>
+                          <a:latin typeface="Consolas"/>
+                        </a:rPr>
+                        <a:t>d2-proposition</a:t>
+                      </a:r>
+                    </a:p>
+                  </a:txBody>
+                  <a:tcPr marL="88900" marR="88900" marT="38100" marB="38100" anchor="ctr">
+                    <a:solidFill>
+                      <a:srgbClr val="F7F9FB"/>
+                    </a:solidFill>
+                  </a:tcPr>
+                </a:tc>
+                <a:tc>
+                  <a:txBody>
+                    <a:bodyPr wrap="square"/>
+                    <a:lstStyle/>
+                    <a:p>
+                      <a:pPr algn="l"/>
+                      <a:r>
+                        <a:rPr sz="1150" b="0">
+                          <a:solidFill>
+                            <a:srgbClr val="14202B"/>
+                          </a:solidFill>
+                          <a:latin typeface="Calibri"/>
+                        </a:rPr>
+                        <a:t>Turn jobs, pains and gains into one proposition, with a number</a:t>
+                      </a:r>
+                    </a:p>
+                  </a:txBody>
+                  <a:tcPr marL="88900" marR="88900" marT="38100" marB="38100" anchor="ctr">
+                    <a:solidFill>
+                      <a:srgbClr val="F7F9FB"/>
+                    </a:solidFill>
+                  </a:tcPr>
+                </a:tc>
+              </a:tr>
+              <a:tr h="310896">
+                <a:tc>
+                  <a:txBody>
+                    <a:bodyPr wrap="square"/>
+                    <a:lstStyle/>
+                    <a:p>
+                      <a:pPr algn="l"/>
+                      <a:r>
+                        <a:rPr sz="1150" b="1">
+                          <a:solidFill>
+                            <a:srgbClr val="14202B"/>
+                          </a:solidFill>
+                          <a:latin typeface="Consolas"/>
+                        </a:rPr>
+                        <a:t>d2-messaging</a:t>
+                      </a:r>
+                    </a:p>
+                  </a:txBody>
+                  <a:tcPr marL="88900" marR="88900" marT="38100" marB="38100" anchor="ctr">
+                    <a:solidFill>
+                      <a:srgbClr val="FFFFFF"/>
+                    </a:solidFill>
+                  </a:tcPr>
+                </a:tc>
+                <a:tc>
+                  <a:txBody>
+                    <a:bodyPr wrap="square"/>
+                    <a:lstStyle/>
+                    <a:p>
+                      <a:pPr algn="l"/>
+                      <a:r>
+                        <a:rPr sz="1150" b="0">
+                          <a:solidFill>
+                            <a:srgbClr val="14202B"/>
+                          </a:solidFill>
+                          <a:latin typeface="Calibri"/>
+                        </a:rPr>
+                        <a:t>A one-liner, three key messages and a 30-second pitch</a:t>
+                      </a:r>
+                    </a:p>
+                  </a:txBody>
+                  <a:tcPr marL="88900" marR="88900" marT="38100" marB="38100" anchor="ctr">
+                    <a:solidFill>
+                      <a:srgbClr val="FFFFFF"/>
+                    </a:solidFill>
+                  </a:tcPr>
+                </a:tc>
+              </a:tr>
+              <a:tr h="310896">
+                <a:tc>
+                  <a:txBody>
+                    <a:bodyPr wrap="square"/>
+                    <a:lstStyle/>
+                    <a:p>
+                      <a:pPr algn="l"/>
+                      <a:r>
+                        <a:rPr sz="1150" b="1">
+                          <a:solidFill>
+                            <a:srgbClr val="14202B"/>
+                          </a:solidFill>
+                          <a:latin typeface="Consolas"/>
+                        </a:rPr>
+                        <a:t>d2-brand-foundations</a:t>
+                      </a:r>
+                    </a:p>
+                  </a:txBody>
+                  <a:tcPr marL="88900" marR="88900" marT="38100" marB="38100" anchor="ctr">
+                    <a:solidFill>
+                      <a:srgbClr val="F7F9FB"/>
+                    </a:solidFill>
+                  </a:tcPr>
+                </a:tc>
+                <a:tc>
+                  <a:txBody>
+                    <a:bodyPr wrap="square"/>
+                    <a:lstStyle/>
+                    <a:p>
+                      <a:pPr algn="l"/>
+                      <a:r>
+                        <a:rPr sz="1150" b="0">
+                          <a:solidFill>
+                            <a:srgbClr val="14202B"/>
+                          </a:solidFill>
+                          <a:latin typeface="Calibri"/>
+                        </a:rPr>
+                        <a:t>Values, personality, naming and tone of voice</a:t>
+                      </a:r>
+                    </a:p>
+                  </a:txBody>
+                  <a:tcPr marL="88900" marR="88900" marT="38100" marB="38100" anchor="ctr">
+                    <a:solidFill>
+                      <a:srgbClr val="F7F9FB"/>
+                    </a:solidFill>
+                  </a:tcPr>
+                </a:tc>
+              </a:tr>
+              <a:tr h="310896">
+                <a:tc>
+                  <a:txBody>
+                    <a:bodyPr wrap="square"/>
+                    <a:lstStyle/>
+                    <a:p>
+                      <a:pPr algn="l"/>
+                      <a:r>
+                        <a:rPr sz="1150" b="1">
+                          <a:solidFill>
+                            <a:srgbClr val="14202B"/>
+                          </a:solidFill>
+                          <a:latin typeface="Consolas"/>
+                        </a:rPr>
+                        <a:t>d2-visual-identity</a:t>
+                      </a:r>
+                    </a:p>
+                  </a:txBody>
+                  <a:tcPr marL="88900" marR="88900" marT="38100" marB="38100" anchor="ctr">
+                    <a:solidFill>
+                      <a:srgbClr val="FFFFFF"/>
+                    </a:solidFill>
+                  </a:tcPr>
+                </a:tc>
+                <a:tc>
+                  <a:txBody>
+                    <a:bodyPr wrap="square"/>
+                    <a:lstStyle/>
+                    <a:p>
+                      <a:pPr algn="l"/>
+                      <a:r>
+                        <a:rPr sz="1150" b="0">
+                          <a:solidFill>
+                            <a:srgbClr val="14202B"/>
+                          </a:solidFill>
+                          <a:latin typeface="Calibri"/>
+                        </a:rPr>
+                        <a:t>A palette that passes contrast, two fonts and a simple logo</a:t>
+                      </a:r>
+                    </a:p>
+                  </a:txBody>
+                  <a:tcPr marL="88900" marR="88900" marT="38100" marB="38100" anchor="ctr">
+                    <a:solidFill>
+                      <a:srgbClr val="FFFFFF"/>
+                    </a:solidFill>
+                  </a:tcPr>
+                </a:tc>
+              </a:tr>
+              <a:tr h="310896">
+                <a:tc>
+                  <a:txBody>
+                    <a:bodyPr wrap="square"/>
+                    <a:lstStyle/>
+                    <a:p>
+                      <a:pPr algn="l"/>
+                      <a:r>
+                        <a:rPr sz="1150" b="1">
+                          <a:solidFill>
+                            <a:srgbClr val="14202B"/>
+                          </a:solidFill>
+                          <a:latin typeface="Consolas"/>
+                        </a:rPr>
+                        <a:t>d2-pitch-deck</a:t>
+                      </a:r>
+                    </a:p>
+                  </a:txBody>
+                  <a:tcPr marL="88900" marR="88900" marT="38100" marB="38100" anchor="ctr">
+                    <a:solidFill>
+                      <a:srgbClr val="F7F9FB"/>
+                    </a:solidFill>
+                  </a:tcPr>
+                </a:tc>
+                <a:tc>
+                  <a:txBody>
+                    <a:bodyPr wrap="square"/>
+                    <a:lstStyle/>
+                    <a:p>
+                      <a:pPr algn="l"/>
+                      <a:r>
+                        <a:rPr sz="1150" b="0">
+                          <a:solidFill>
+                            <a:srgbClr val="14202B"/>
+                          </a:solidFill>
+                          <a:latin typeface="Calibri"/>
+                        </a:rPr>
+                        <a:t>Assemble the day into a branded, evidence-traced pitch deck</a:t>
+                      </a:r>
+                    </a:p>
+                  </a:txBody>
+                  <a:tcPr marL="88900" marR="88900" marT="38100" marB="38100" anchor="ctr">
+                    <a:solidFill>
+                      <a:srgbClr val="F7F9FB"/>
+                    </a:solidFill>
+                  </a:tcPr>
+                </a:tc>
+              </a:tr>
+            </a:tbl>
+          </a:graphicData>
+        </a:graphic>
+      </p:graphicFrame>
+      <p:sp>
+        <p:nvSpPr>
+          <p:cNvPr id="9" name="TextBox 8"/>
+          <p:cNvSpPr txBox="1"/>
+          <p:nvPr/>
+        </p:nvSpPr>
+        <p:spPr>
+          <a:xfrm>
+            <a:off x="685800" y="6400800"/>
+            <a:ext cx="10820095" cy="274320"/>
+          </a:xfrm>
+          <a:prstGeom prst="rect">
+            <a:avLst/>
+          </a:prstGeom>
+          <a:noFill/>
+        </p:spPr>
+        <p:txBody>
+          <a:bodyPr wrap="square" anchor="t" lIns="0" rIns="0" tIns="0" bIns="0">
+            <a:spAutoFit/>
+          </a:bodyPr>
+          <a:lstStyle/>
+          <a:p>
+            <a:pPr algn="l"/>
+            <a:r>
+              <a:rPr sz="900" b="0">
+                <a:solidFill>
+                  <a:srgbClr val="5A6B7B"/>
+                </a:solidFill>
+                <a:latin typeface="Calibri"/>
+              </a:rPr>
+              <a:t>Spark Bootcamp  ·  a Claude Code plugin by Spark AI Agency</a:t>
+            </a:r>
+          </a:p>
+        </p:txBody>
+      </p:sp>
+      <p:sp>
+        <p:nvSpPr>
+          <p:cNvPr id="10" name="TextBox 9"/>
+          <p:cNvSpPr txBox="1"/>
+          <p:nvPr/>
+        </p:nvSpPr>
+        <p:spPr>
+          <a:xfrm>
+            <a:off x="10957255" y="6400800"/>
+            <a:ext cx="548640" cy="274320"/>
+          </a:xfrm>
+          <a:prstGeom prst="rect">
+            <a:avLst/>
+          </a:prstGeom>
+          <a:noFill/>
+        </p:spPr>
+        <p:txBody>
+          <a:bodyPr wrap="square" anchor="t" lIns="0" rIns="0" tIns="0" bIns="0">
+            <a:spAutoFit/>
+          </a:bodyPr>
+          <a:lstStyle/>
+          <a:p>
+            <a:pPr algn="r"/>
+            <a:r>
+              <a:rPr sz="900" b="0">
+                <a:solidFill>
+                  <a:srgbClr val="5A6B7B"/>
+                </a:solidFill>
+                <a:latin typeface="Calibri"/>
+              </a:rPr>
+              <a:t>10</a:t>
+            </a:r>
+          </a:p>
+        </p:txBody>
+      </p:sp>
+    </p:spTree>
+  </p:cSld>
+  <p:clrMapOvr>
+    <a:masterClrMapping/>
+  </p:clrMapOvr>
+</p:sld>
+</file>
+
+<file path=ppt/slides/slide11.xml><?xml version="1.0" encoding="utf-8"?>
 <p:sld xmlns:a="http://schemas.openxmlformats.org/drawingml/2006/main" xmlns:p="http://schemas.openxmlformats.org/presentationml/2006/main" xmlns:r="http://schemas.openxmlformats.org/officeDocument/2006/relationships">
   <p:cSld>
     <p:spTree>
@@ -4271,7 +5103,7 @@
                 </a:solidFill>
                 <a:latin typeface="Calibri"/>
               </a:rPr>
-              <a:t>10</a:t>
+              <a:t>11</a:t>
             </a:r>
           </a:p>
         </p:txBody>
@@ -4284,7 +5116,7 @@
 </p:sld>
 </file>
 
-<file path=ppt/slides/slide11.xml><?xml version="1.0" encoding="utf-8"?>
+<file path=ppt/slides/slide12.xml><?xml version="1.0" encoding="utf-8"?>
 <p:sld xmlns:a="http://schemas.openxmlformats.org/drawingml/2006/main" xmlns:p="http://schemas.openxmlformats.org/presentationml/2006/main" xmlns:r="http://schemas.openxmlformats.org/officeDocument/2006/relationships">
   <p:cSld>
     <p:spTree>
@@ -5102,7 +5934,7 @@
                 </a:solidFill>
                 <a:latin typeface="Calibri"/>
               </a:rPr>
-              <a:t>11</a:t>
+              <a:t>12</a:t>
             </a:r>
           </a:p>
         </p:txBody>
@@ -5115,7 +5947,7 @@
 </p:sld>
 </file>
 
-<file path=ppt/slides/slide12.xml><?xml version="1.0" encoding="utf-8"?>
+<file path=ppt/slides/slide13.xml><?xml version="1.0" encoding="utf-8"?>
 <p:sld xmlns:a="http://schemas.openxmlformats.org/drawingml/2006/main" xmlns:p="http://schemas.openxmlformats.org/presentationml/2006/main" xmlns:r="http://schemas.openxmlformats.org/officeDocument/2006/relationships">
   <p:cSld>
     <p:spTree>
@@ -5933,919 +6765,6 @@
                 </a:solidFill>
                 <a:latin typeface="Calibri"/>
               </a:rPr>
-              <a:t>12</a:t>
-            </a:r>
-          </a:p>
-        </p:txBody>
-      </p:sp>
-    </p:spTree>
-  </p:cSld>
-  <p:clrMapOvr>
-    <a:masterClrMapping/>
-  </p:clrMapOvr>
-</p:sld>
-</file>
-
-<file path=ppt/slides/slide13.xml><?xml version="1.0" encoding="utf-8"?>
-<p:sld xmlns:a="http://schemas.openxmlformats.org/drawingml/2006/main" xmlns:p="http://schemas.openxmlformats.org/presentationml/2006/main" xmlns:r="http://schemas.openxmlformats.org/officeDocument/2006/relationships">
-  <p:cSld>
-    <p:spTree>
-      <p:nvGrpSpPr>
-        <p:cNvPr id="1" name=""/>
-        <p:cNvGrpSpPr/>
-        <p:nvPr/>
-      </p:nvGrpSpPr>
-      <p:grpSpPr/>
-      <p:sp>
-        <p:nvSpPr>
-          <p:cNvPr id="2" name="Rectangle 1"/>
-          <p:cNvSpPr/>
-          <p:nvPr/>
-        </p:nvSpPr>
-        <p:spPr>
-          <a:xfrm>
-            <a:off x="0" y="0"/>
-            <a:ext cx="12191695" cy="6858000"/>
-          </a:xfrm>
-          <a:prstGeom prst="rect">
-            <a:avLst/>
-          </a:prstGeom>
-          <a:solidFill>
-            <a:srgbClr val="FFFFFF"/>
-          </a:solidFill>
-          <a:ln>
-            <a:noFill/>
-          </a:ln>
-          <a:effectLst/>
-        </p:spPr>
-        <p:style>
-          <a:lnRef idx="1">
-            <a:schemeClr val="accent1"/>
-          </a:lnRef>
-          <a:fillRef idx="3">
-            <a:schemeClr val="accent1"/>
-          </a:fillRef>
-          <a:effectRef idx="2">
-            <a:schemeClr val="accent1"/>
-          </a:effectRef>
-          <a:fontRef idx="minor">
-            <a:schemeClr val="lt1"/>
-          </a:fontRef>
-        </p:style>
-        <p:txBody>
-          <a:bodyPr rtlCol="0" anchor="ctr"/>
-          <a:lstStyle/>
-          <a:p>
-            <a:pPr algn="ctr"/>
-          </a:p>
-        </p:txBody>
-      </p:sp>
-      <p:sp>
-        <p:nvSpPr>
-          <p:cNvPr id="3" name="Rectangle 2"/>
-          <p:cNvSpPr/>
-          <p:nvPr/>
-        </p:nvSpPr>
-        <p:spPr>
-          <a:xfrm>
-            <a:off x="685800" y="566928"/>
-            <a:ext cx="310896" cy="310896"/>
-          </a:xfrm>
-          <a:prstGeom prst="rect">
-            <a:avLst/>
-          </a:prstGeom>
-          <a:solidFill>
-            <a:srgbClr val="F58A23"/>
-          </a:solidFill>
-          <a:ln>
-            <a:noFill/>
-          </a:ln>
-          <a:effectLst/>
-        </p:spPr>
-        <p:style>
-          <a:lnRef idx="1">
-            <a:schemeClr val="accent1"/>
-          </a:lnRef>
-          <a:fillRef idx="3">
-            <a:schemeClr val="accent1"/>
-          </a:fillRef>
-          <a:effectRef idx="2">
-            <a:schemeClr val="accent1"/>
-          </a:effectRef>
-          <a:fontRef idx="minor">
-            <a:schemeClr val="lt1"/>
-          </a:fontRef>
-        </p:style>
-        <p:txBody>
-          <a:bodyPr rtlCol="0" anchor="ctr"/>
-          <a:lstStyle/>
-          <a:p>
-            <a:pPr algn="ctr"/>
-          </a:p>
-        </p:txBody>
-      </p:sp>
-      <p:sp>
-        <p:nvSpPr>
-          <p:cNvPr id="4" name="TextBox 3"/>
-          <p:cNvSpPr txBox="1"/>
-          <p:nvPr/>
-        </p:nvSpPr>
-        <p:spPr>
-          <a:xfrm>
-            <a:off x="1143000" y="548640"/>
-            <a:ext cx="10362895" cy="274320"/>
-          </a:xfrm>
-          <a:prstGeom prst="rect">
-            <a:avLst/>
-          </a:prstGeom>
-          <a:noFill/>
-        </p:spPr>
-        <p:txBody>
-          <a:bodyPr wrap="square" anchor="t" lIns="0" rIns="0" tIns="0" bIns="0">
-            <a:spAutoFit/>
-          </a:bodyPr>
-          <a:lstStyle/>
-          <a:p>
-            <a:pPr algn="l"/>
-            <a:r>
-              <a:rPr sz="1200" b="1">
-                <a:solidFill>
-                  <a:srgbClr val="F58A23"/>
-                </a:solidFill>
-                <a:latin typeface="Calibri"/>
-              </a:rPr>
-              <a:t>ONE PLUGIN, THREE PATHS</a:t>
-            </a:r>
-          </a:p>
-        </p:txBody>
-      </p:sp>
-      <p:sp>
-        <p:nvSpPr>
-          <p:cNvPr id="5" name="TextBox 4"/>
-          <p:cNvSpPr txBox="1"/>
-          <p:nvPr/>
-        </p:nvSpPr>
-        <p:spPr>
-          <a:xfrm>
-            <a:off x="1143000" y="841248"/>
-            <a:ext cx="10362895" cy="640080"/>
-          </a:xfrm>
-          <a:prstGeom prst="rect">
-            <a:avLst/>
-          </a:prstGeom>
-          <a:noFill/>
-        </p:spPr>
-        <p:txBody>
-          <a:bodyPr wrap="square" anchor="t" lIns="0" rIns="0" tIns="0" bIns="0">
-            <a:spAutoFit/>
-          </a:bodyPr>
-          <a:lstStyle/>
-          <a:p>
-            <a:pPr algn="l"/>
-            <a:r>
-              <a:rPr sz="2800" b="1">
-                <a:solidFill>
-                  <a:srgbClr val="14202B"/>
-                </a:solidFill>
-                <a:latin typeface="Calibri"/>
-              </a:rPr>
-              <a:t>The build flexes to what you are making</a:t>
-            </a:r>
-          </a:p>
-        </p:txBody>
-      </p:sp>
-      <p:sp>
-        <p:nvSpPr>
-          <p:cNvPr id="6" name="Rectangle 5"/>
-          <p:cNvSpPr/>
-          <p:nvPr/>
-        </p:nvSpPr>
-        <p:spPr>
-          <a:xfrm>
-            <a:off x="1143000" y="1481328"/>
-            <a:ext cx="1097280" cy="38100"/>
-          </a:xfrm>
-          <a:prstGeom prst="rect">
-            <a:avLst/>
-          </a:prstGeom>
-          <a:solidFill>
-            <a:srgbClr val="14202B"/>
-          </a:solidFill>
-          <a:ln>
-            <a:noFill/>
-          </a:ln>
-          <a:effectLst/>
-        </p:spPr>
-        <p:style>
-          <a:lnRef idx="1">
-            <a:schemeClr val="accent1"/>
-          </a:lnRef>
-          <a:fillRef idx="3">
-            <a:schemeClr val="accent1"/>
-          </a:fillRef>
-          <a:effectRef idx="2">
-            <a:schemeClr val="accent1"/>
-          </a:effectRef>
-          <a:fontRef idx="minor">
-            <a:schemeClr val="lt1"/>
-          </a:fontRef>
-        </p:style>
-        <p:txBody>
-          <a:bodyPr rtlCol="0" anchor="ctr"/>
-          <a:lstStyle/>
-          <a:p>
-            <a:pPr algn="ctr"/>
-          </a:p>
-        </p:txBody>
-      </p:sp>
-      <p:sp>
-        <p:nvSpPr>
-          <p:cNvPr id="7" name="Rectangle 6"/>
-          <p:cNvSpPr/>
-          <p:nvPr/>
-        </p:nvSpPr>
-        <p:spPr>
-          <a:xfrm>
-            <a:off x="1143000" y="1965960"/>
-            <a:ext cx="3271418" cy="2651760"/>
-          </a:xfrm>
-          <a:prstGeom prst="rect">
-            <a:avLst/>
-          </a:prstGeom>
-          <a:solidFill>
-            <a:srgbClr val="F4F6F8"/>
-          </a:solidFill>
-          <a:ln w="12700">
-            <a:solidFill>
-              <a:srgbClr val="DDE3E8"/>
-            </a:solidFill>
-          </a:ln>
-          <a:effectLst/>
-        </p:spPr>
-        <p:style>
-          <a:lnRef idx="1">
-            <a:schemeClr val="accent1"/>
-          </a:lnRef>
-          <a:fillRef idx="3">
-            <a:schemeClr val="accent1"/>
-          </a:fillRef>
-          <a:effectRef idx="2">
-            <a:schemeClr val="accent1"/>
-          </a:effectRef>
-          <a:fontRef idx="minor">
-            <a:schemeClr val="lt1"/>
-          </a:fontRef>
-        </p:style>
-        <p:txBody>
-          <a:bodyPr rtlCol="0" anchor="ctr"/>
-          <a:lstStyle/>
-          <a:p>
-            <a:pPr algn="ctr"/>
-          </a:p>
-        </p:txBody>
-      </p:sp>
-      <p:sp>
-        <p:nvSpPr>
-          <p:cNvPr id="8" name="Rectangle 7"/>
-          <p:cNvSpPr/>
-          <p:nvPr/>
-        </p:nvSpPr>
-        <p:spPr>
-          <a:xfrm>
-            <a:off x="1143000" y="1965960"/>
-            <a:ext cx="3271418" cy="640080"/>
-          </a:xfrm>
-          <a:prstGeom prst="rect">
-            <a:avLst/>
-          </a:prstGeom>
-          <a:solidFill>
-            <a:srgbClr val="14202B"/>
-          </a:solidFill>
-          <a:ln>
-            <a:noFill/>
-          </a:ln>
-          <a:effectLst/>
-        </p:spPr>
-        <p:style>
-          <a:lnRef idx="1">
-            <a:schemeClr val="accent1"/>
-          </a:lnRef>
-          <a:fillRef idx="3">
-            <a:schemeClr val="accent1"/>
-          </a:fillRef>
-          <a:effectRef idx="2">
-            <a:schemeClr val="accent1"/>
-          </a:effectRef>
-          <a:fontRef idx="minor">
-            <a:schemeClr val="lt1"/>
-          </a:fontRef>
-        </p:style>
-        <p:txBody>
-          <a:bodyPr rtlCol="0" anchor="ctr"/>
-          <a:lstStyle/>
-          <a:p>
-            <a:pPr algn="ctr"/>
-          </a:p>
-        </p:txBody>
-      </p:sp>
-      <p:sp>
-        <p:nvSpPr>
-          <p:cNvPr id="9" name="TextBox 8"/>
-          <p:cNvSpPr txBox="1"/>
-          <p:nvPr/>
-        </p:nvSpPr>
-        <p:spPr>
-          <a:xfrm>
-            <a:off x="1143000" y="1965960"/>
-            <a:ext cx="3271418" cy="640080"/>
-          </a:xfrm>
-          <a:prstGeom prst="rect">
-            <a:avLst/>
-          </a:prstGeom>
-          <a:noFill/>
-        </p:spPr>
-        <p:txBody>
-          <a:bodyPr wrap="square" anchor="ctr" lIns="0" rIns="0" tIns="0" bIns="0">
-            <a:spAutoFit/>
-          </a:bodyPr>
-          <a:lstStyle/>
-          <a:p>
-            <a:pPr algn="ctr"/>
-            <a:r>
-              <a:rPr sz="1900" b="1">
-                <a:solidFill>
-                  <a:srgbClr val="FFFFFF"/>
-                </a:solidFill>
-                <a:latin typeface="Calibri"/>
-              </a:rPr>
-              <a:t>Software</a:t>
-            </a:r>
-          </a:p>
-        </p:txBody>
-      </p:sp>
-      <p:sp>
-        <p:nvSpPr>
-          <p:cNvPr id="10" name="TextBox 9"/>
-          <p:cNvSpPr txBox="1"/>
-          <p:nvPr/>
-        </p:nvSpPr>
-        <p:spPr>
-          <a:xfrm>
-            <a:off x="1371600" y="2788920"/>
-            <a:ext cx="2814218" cy="1737360"/>
-          </a:xfrm>
-          <a:prstGeom prst="rect">
-            <a:avLst/>
-          </a:prstGeom>
-          <a:noFill/>
-        </p:spPr>
-        <p:txBody>
-          <a:bodyPr wrap="square" anchor="t" lIns="0" rIns="0" tIns="0" bIns="0">
-            <a:spAutoFit/>
-          </a:bodyPr>
-          <a:lstStyle/>
-          <a:p>
-            <a:pPr algn="l">
-              <a:spcAft>
-                <a:spcPts val="800"/>
-              </a:spcAft>
-            </a:pPr>
-            <a:r>
-              <a:rPr sz="1400" b="0">
-                <a:solidFill>
-                  <a:srgbClr val="14202B"/>
-                </a:solidFill>
-                <a:latin typeface="Calibri"/>
-              </a:rPr>
-              <a:t>A deployed working slice on a public URL.</a:t>
-            </a:r>
-          </a:p>
-          <a:p>
-            <a:pPr algn="l"/>
-            <a:r>
-              <a:rPr sz="1300" b="0">
-                <a:solidFill>
-                  <a:srgbClr val="5A6B7B"/>
-                </a:solidFill>
-                <a:latin typeface="Calibri"/>
-              </a:rPr>
-              <a:t>Default stack: Next.js, Supabase, Vercel.</a:t>
-            </a:r>
-          </a:p>
-        </p:txBody>
-      </p:sp>
-      <p:sp>
-        <p:nvSpPr>
-          <p:cNvPr id="11" name="Rectangle 10"/>
-          <p:cNvSpPr/>
-          <p:nvPr/>
-        </p:nvSpPr>
-        <p:spPr>
-          <a:xfrm>
-            <a:off x="4688738" y="1965960"/>
-            <a:ext cx="3271418" cy="2651760"/>
-          </a:xfrm>
-          <a:prstGeom prst="rect">
-            <a:avLst/>
-          </a:prstGeom>
-          <a:solidFill>
-            <a:srgbClr val="F4F6F8"/>
-          </a:solidFill>
-          <a:ln w="12700">
-            <a:solidFill>
-              <a:srgbClr val="DDE3E8"/>
-            </a:solidFill>
-          </a:ln>
-          <a:effectLst/>
-        </p:spPr>
-        <p:style>
-          <a:lnRef idx="1">
-            <a:schemeClr val="accent1"/>
-          </a:lnRef>
-          <a:fillRef idx="3">
-            <a:schemeClr val="accent1"/>
-          </a:fillRef>
-          <a:effectRef idx="2">
-            <a:schemeClr val="accent1"/>
-          </a:effectRef>
-          <a:fontRef idx="minor">
-            <a:schemeClr val="lt1"/>
-          </a:fontRef>
-        </p:style>
-        <p:txBody>
-          <a:bodyPr rtlCol="0" anchor="ctr"/>
-          <a:lstStyle/>
-          <a:p>
-            <a:pPr algn="ctr"/>
-          </a:p>
-        </p:txBody>
-      </p:sp>
-      <p:sp>
-        <p:nvSpPr>
-          <p:cNvPr id="12" name="Rectangle 11"/>
-          <p:cNvSpPr/>
-          <p:nvPr/>
-        </p:nvSpPr>
-        <p:spPr>
-          <a:xfrm>
-            <a:off x="4688738" y="1965960"/>
-            <a:ext cx="3271418" cy="640080"/>
-          </a:xfrm>
-          <a:prstGeom prst="rect">
-            <a:avLst/>
-          </a:prstGeom>
-          <a:solidFill>
-            <a:srgbClr val="14202B"/>
-          </a:solidFill>
-          <a:ln>
-            <a:noFill/>
-          </a:ln>
-          <a:effectLst/>
-        </p:spPr>
-        <p:style>
-          <a:lnRef idx="1">
-            <a:schemeClr val="accent1"/>
-          </a:lnRef>
-          <a:fillRef idx="3">
-            <a:schemeClr val="accent1"/>
-          </a:fillRef>
-          <a:effectRef idx="2">
-            <a:schemeClr val="accent1"/>
-          </a:effectRef>
-          <a:fontRef idx="minor">
-            <a:schemeClr val="lt1"/>
-          </a:fontRef>
-        </p:style>
-        <p:txBody>
-          <a:bodyPr rtlCol="0" anchor="ctr"/>
-          <a:lstStyle/>
-          <a:p>
-            <a:pPr algn="ctr"/>
-          </a:p>
-        </p:txBody>
-      </p:sp>
-      <p:sp>
-        <p:nvSpPr>
-          <p:cNvPr id="13" name="TextBox 12"/>
-          <p:cNvSpPr txBox="1"/>
-          <p:nvPr/>
-        </p:nvSpPr>
-        <p:spPr>
-          <a:xfrm>
-            <a:off x="4688738" y="1965960"/>
-            <a:ext cx="3271418" cy="640080"/>
-          </a:xfrm>
-          <a:prstGeom prst="rect">
-            <a:avLst/>
-          </a:prstGeom>
-          <a:noFill/>
-        </p:spPr>
-        <p:txBody>
-          <a:bodyPr wrap="square" anchor="ctr" lIns="0" rIns="0" tIns="0" bIns="0">
-            <a:spAutoFit/>
-          </a:bodyPr>
-          <a:lstStyle/>
-          <a:p>
-            <a:pPr algn="ctr"/>
-            <a:r>
-              <a:rPr sz="1900" b="1">
-                <a:solidFill>
-                  <a:srgbClr val="FFFFFF"/>
-                </a:solidFill>
-                <a:latin typeface="Calibri"/>
-              </a:rPr>
-              <a:t>Hardware</a:t>
-            </a:r>
-          </a:p>
-        </p:txBody>
-      </p:sp>
-      <p:sp>
-        <p:nvSpPr>
-          <p:cNvPr id="14" name="TextBox 13"/>
-          <p:cNvSpPr txBox="1"/>
-          <p:nvPr/>
-        </p:nvSpPr>
-        <p:spPr>
-          <a:xfrm>
-            <a:off x="4917338" y="2788920"/>
-            <a:ext cx="2814218" cy="1737360"/>
-          </a:xfrm>
-          <a:prstGeom prst="rect">
-            <a:avLst/>
-          </a:prstGeom>
-          <a:noFill/>
-        </p:spPr>
-        <p:txBody>
-          <a:bodyPr wrap="square" anchor="t" lIns="0" rIns="0" tIns="0" bIns="0">
-            <a:spAutoFit/>
-          </a:bodyPr>
-          <a:lstStyle/>
-          <a:p>
-            <a:pPr algn="l">
-              <a:spcAft>
-                <a:spcPts val="800"/>
-              </a:spcAft>
-            </a:pPr>
-            <a:r>
-              <a:rPr sz="1400" b="0">
-                <a:solidFill>
-                  <a:srgbClr val="14202B"/>
-                </a:solidFill>
-                <a:latin typeface="Calibri"/>
-              </a:rPr>
-              <a:t>A prototype (CAD render or mock) plus a pre-order or waitlist page.</a:t>
-            </a:r>
-          </a:p>
-          <a:p>
-            <a:pPr algn="l"/>
-            <a:r>
-              <a:rPr sz="1300" b="0">
-                <a:solidFill>
-                  <a:srgbClr val="5A6B7B"/>
-                </a:solidFill>
-                <a:latin typeface="Calibri"/>
-              </a:rPr>
-              <a:t>Takes real payment intent.</a:t>
-            </a:r>
-          </a:p>
-        </p:txBody>
-      </p:sp>
-      <p:sp>
-        <p:nvSpPr>
-          <p:cNvPr id="15" name="Rectangle 14"/>
-          <p:cNvSpPr/>
-          <p:nvPr/>
-        </p:nvSpPr>
-        <p:spPr>
-          <a:xfrm>
-            <a:off x="8234476" y="1965960"/>
-            <a:ext cx="3271418" cy="2651760"/>
-          </a:xfrm>
-          <a:prstGeom prst="rect">
-            <a:avLst/>
-          </a:prstGeom>
-          <a:solidFill>
-            <a:srgbClr val="F4F6F8"/>
-          </a:solidFill>
-          <a:ln w="12700">
-            <a:solidFill>
-              <a:srgbClr val="DDE3E8"/>
-            </a:solidFill>
-          </a:ln>
-          <a:effectLst/>
-        </p:spPr>
-        <p:style>
-          <a:lnRef idx="1">
-            <a:schemeClr val="accent1"/>
-          </a:lnRef>
-          <a:fillRef idx="3">
-            <a:schemeClr val="accent1"/>
-          </a:fillRef>
-          <a:effectRef idx="2">
-            <a:schemeClr val="accent1"/>
-          </a:effectRef>
-          <a:fontRef idx="minor">
-            <a:schemeClr val="lt1"/>
-          </a:fontRef>
-        </p:style>
-        <p:txBody>
-          <a:bodyPr rtlCol="0" anchor="ctr"/>
-          <a:lstStyle/>
-          <a:p>
-            <a:pPr algn="ctr"/>
-          </a:p>
-        </p:txBody>
-      </p:sp>
-      <p:sp>
-        <p:nvSpPr>
-          <p:cNvPr id="16" name="Rectangle 15"/>
-          <p:cNvSpPr/>
-          <p:nvPr/>
-        </p:nvSpPr>
-        <p:spPr>
-          <a:xfrm>
-            <a:off x="8234476" y="1965960"/>
-            <a:ext cx="3271418" cy="640080"/>
-          </a:xfrm>
-          <a:prstGeom prst="rect">
-            <a:avLst/>
-          </a:prstGeom>
-          <a:solidFill>
-            <a:srgbClr val="14202B"/>
-          </a:solidFill>
-          <a:ln>
-            <a:noFill/>
-          </a:ln>
-          <a:effectLst/>
-        </p:spPr>
-        <p:style>
-          <a:lnRef idx="1">
-            <a:schemeClr val="accent1"/>
-          </a:lnRef>
-          <a:fillRef idx="3">
-            <a:schemeClr val="accent1"/>
-          </a:fillRef>
-          <a:effectRef idx="2">
-            <a:schemeClr val="accent1"/>
-          </a:effectRef>
-          <a:fontRef idx="minor">
-            <a:schemeClr val="lt1"/>
-          </a:fontRef>
-        </p:style>
-        <p:txBody>
-          <a:bodyPr rtlCol="0" anchor="ctr"/>
-          <a:lstStyle/>
-          <a:p>
-            <a:pPr algn="ctr"/>
-          </a:p>
-        </p:txBody>
-      </p:sp>
-      <p:sp>
-        <p:nvSpPr>
-          <p:cNvPr id="17" name="TextBox 16"/>
-          <p:cNvSpPr txBox="1"/>
-          <p:nvPr/>
-        </p:nvSpPr>
-        <p:spPr>
-          <a:xfrm>
-            <a:off x="8234476" y="1965960"/>
-            <a:ext cx="3271418" cy="640080"/>
-          </a:xfrm>
-          <a:prstGeom prst="rect">
-            <a:avLst/>
-          </a:prstGeom>
-          <a:noFill/>
-        </p:spPr>
-        <p:txBody>
-          <a:bodyPr wrap="square" anchor="ctr" lIns="0" rIns="0" tIns="0" bIns="0">
-            <a:spAutoFit/>
-          </a:bodyPr>
-          <a:lstStyle/>
-          <a:p>
-            <a:pPr algn="ctr"/>
-            <a:r>
-              <a:rPr sz="1900" b="1">
-                <a:solidFill>
-                  <a:srgbClr val="FFFFFF"/>
-                </a:solidFill>
-                <a:latin typeface="Calibri"/>
-              </a:rPr>
-              <a:t>Services</a:t>
-            </a:r>
-          </a:p>
-        </p:txBody>
-      </p:sp>
-      <p:sp>
-        <p:nvSpPr>
-          <p:cNvPr id="18" name="TextBox 17"/>
-          <p:cNvSpPr txBox="1"/>
-          <p:nvPr/>
-        </p:nvSpPr>
-        <p:spPr>
-          <a:xfrm>
-            <a:off x="8463076" y="2788920"/>
-            <a:ext cx="2814218" cy="1737360"/>
-          </a:xfrm>
-          <a:prstGeom prst="rect">
-            <a:avLst/>
-          </a:prstGeom>
-          <a:noFill/>
-        </p:spPr>
-        <p:txBody>
-          <a:bodyPr wrap="square" anchor="t" lIns="0" rIns="0" tIns="0" bIns="0">
-            <a:spAutoFit/>
-          </a:bodyPr>
-          <a:lstStyle/>
-          <a:p>
-            <a:pPr algn="l">
-              <a:spcAft>
-                <a:spcPts val="800"/>
-              </a:spcAft>
-            </a:pPr>
-            <a:r>
-              <a:rPr sz="1400" b="0">
-                <a:solidFill>
-                  <a:srgbClr val="14202B"/>
-                </a:solidFill>
-                <a:latin typeface="Calibri"/>
-              </a:rPr>
-              <a:t>A productised package with one sample deliverable.</a:t>
-            </a:r>
-          </a:p>
-          <a:p>
-            <a:pPr algn="l"/>
-            <a:r>
-              <a:rPr sz="1300" b="0">
-                <a:solidFill>
-                  <a:srgbClr val="5A6B7B"/>
-                </a:solidFill>
-                <a:latin typeface="Calibri"/>
-              </a:rPr>
-              <a:t>Plus a bookable intake page.</a:t>
-            </a:r>
-          </a:p>
-        </p:txBody>
-      </p:sp>
-      <p:sp>
-        <p:nvSpPr>
-          <p:cNvPr id="19" name="Rectangle 18"/>
-          <p:cNvSpPr/>
-          <p:nvPr/>
-        </p:nvSpPr>
-        <p:spPr>
-          <a:xfrm>
-            <a:off x="1143000" y="5029200"/>
-            <a:ext cx="10362895" cy="868680"/>
-          </a:xfrm>
-          <a:prstGeom prst="rect">
-            <a:avLst/>
-          </a:prstGeom>
-          <a:solidFill>
-            <a:srgbClr val="14202B"/>
-          </a:solidFill>
-          <a:ln>
-            <a:noFill/>
-          </a:ln>
-          <a:effectLst/>
-        </p:spPr>
-        <p:style>
-          <a:lnRef idx="1">
-            <a:schemeClr val="accent1"/>
-          </a:lnRef>
-          <a:fillRef idx="3">
-            <a:schemeClr val="accent1"/>
-          </a:fillRef>
-          <a:effectRef idx="2">
-            <a:schemeClr val="accent1"/>
-          </a:effectRef>
-          <a:fontRef idx="minor">
-            <a:schemeClr val="lt1"/>
-          </a:fontRef>
-        </p:style>
-        <p:txBody>
-          <a:bodyPr rtlCol="0" anchor="ctr"/>
-          <a:lstStyle/>
-          <a:p>
-            <a:pPr algn="ctr"/>
-          </a:p>
-        </p:txBody>
-      </p:sp>
-      <p:sp>
-        <p:nvSpPr>
-          <p:cNvPr id="20" name="TextBox 19"/>
-          <p:cNvSpPr txBox="1"/>
-          <p:nvPr/>
-        </p:nvSpPr>
-        <p:spPr>
-          <a:xfrm>
-            <a:off x="1463040" y="5029200"/>
-            <a:ext cx="9722815" cy="868680"/>
-          </a:xfrm>
-          <a:prstGeom prst="rect">
-            <a:avLst/>
-          </a:prstGeom>
-          <a:noFill/>
-        </p:spPr>
-        <p:txBody>
-          <a:bodyPr wrap="square" anchor="ctr" lIns="0" rIns="0" tIns="0" bIns="0">
-            <a:spAutoFit/>
-          </a:bodyPr>
-          <a:lstStyle/>
-          <a:p>
-            <a:pPr algn="l">
-              <a:spcAft>
-                <a:spcPts val="300"/>
-              </a:spcAft>
-            </a:pPr>
-            <a:r>
-              <a:rPr sz="1300" b="1">
-                <a:solidFill>
-                  <a:srgbClr val="F58A23"/>
-                </a:solidFill>
-                <a:latin typeface="Calibri"/>
-              </a:rPr>
-              <a:t>The shared spine across all three:</a:t>
-            </a:r>
-          </a:p>
-          <a:p>
-            <a:pPr algn="l"/>
-            <a:r>
-              <a:rPr sz="1400" b="0">
-                <a:solidFill>
-                  <a:srgbClr val="FFFFFF"/>
-                </a:solidFill>
-                <a:latin typeface="Calibri"/>
-              </a:rPr>
-              <a:t>a live page a real prospect can act on. Skills that build or ship branch from one variance matrix, so the journey stays the same shape whatever you are making.</a:t>
-            </a:r>
-          </a:p>
-        </p:txBody>
-      </p:sp>
-      <p:sp>
-        <p:nvSpPr>
-          <p:cNvPr id="21" name="TextBox 20"/>
-          <p:cNvSpPr txBox="1"/>
-          <p:nvPr/>
-        </p:nvSpPr>
-        <p:spPr>
-          <a:xfrm>
-            <a:off x="685800" y="6400800"/>
-            <a:ext cx="10820095" cy="274320"/>
-          </a:xfrm>
-          <a:prstGeom prst="rect">
-            <a:avLst/>
-          </a:prstGeom>
-          <a:noFill/>
-        </p:spPr>
-        <p:txBody>
-          <a:bodyPr wrap="square" anchor="t" lIns="0" rIns="0" tIns="0" bIns="0">
-            <a:spAutoFit/>
-          </a:bodyPr>
-          <a:lstStyle/>
-          <a:p>
-            <a:pPr algn="l"/>
-            <a:r>
-              <a:rPr sz="900" b="0">
-                <a:solidFill>
-                  <a:srgbClr val="5A6B7B"/>
-                </a:solidFill>
-                <a:latin typeface="Calibri"/>
-              </a:rPr>
-              <a:t>Spark Bootcamp  ·  a Claude Code plugin by Spark AI Agency</a:t>
-            </a:r>
-          </a:p>
-        </p:txBody>
-      </p:sp>
-      <p:sp>
-        <p:nvSpPr>
-          <p:cNvPr id="22" name="TextBox 21"/>
-          <p:cNvSpPr txBox="1"/>
-          <p:nvPr/>
-        </p:nvSpPr>
-        <p:spPr>
-          <a:xfrm>
-            <a:off x="10957255" y="6400800"/>
-            <a:ext cx="548640" cy="274320"/>
-          </a:xfrm>
-          <a:prstGeom prst="rect">
-            <a:avLst/>
-          </a:prstGeom>
-          <a:noFill/>
-        </p:spPr>
-        <p:txBody>
-          <a:bodyPr wrap="square" anchor="t" lIns="0" rIns="0" tIns="0" bIns="0">
-            <a:spAutoFit/>
-          </a:bodyPr>
-          <a:lstStyle/>
-          <a:p>
-            <a:pPr algn="r"/>
-            <a:r>
-              <a:rPr sz="900" b="0">
-                <a:solidFill>
-                  <a:srgbClr val="5A6B7B"/>
-                </a:solidFill>
-                <a:latin typeface="Calibri"/>
-              </a:rPr>
               <a:t>13</a:t>
             </a:r>
           </a:p>
@@ -6987,7 +6906,7 @@
                 </a:solidFill>
                 <a:latin typeface="Calibri"/>
               </a:rPr>
-              <a:t>BY DESIGN</a:t>
+              <a:t>ONE PLUGIN, THREE PATHS</a:t>
             </a:r>
           </a:p>
         </p:txBody>
@@ -7022,7 +6941,7 @@
                 </a:solidFill>
                 <a:latin typeface="Calibri"/>
               </a:rPr>
-              <a:t>Efficient to run, auditable to trust</a:t>
+              <a:t>The build flexes to what you are making</a:t>
             </a:r>
           </a:p>
         </p:txBody>
@@ -7079,8 +6998,8 @@
         </p:nvSpPr>
         <p:spPr>
           <a:xfrm>
-            <a:off x="1143000" y="1920240"/>
-            <a:ext cx="4998567" cy="3931920"/>
+            <a:off x="1143000" y="1965960"/>
+            <a:ext cx="3271418" cy="2651760"/>
           </a:xfrm>
           <a:prstGeom prst="rect">
             <a:avLst/>
@@ -7125,14 +7044,14 @@
         </p:nvSpPr>
         <p:spPr>
           <a:xfrm>
-            <a:off x="1143000" y="1920240"/>
-            <a:ext cx="4998567" cy="50800"/>
+            <a:off x="1143000" y="1965960"/>
+            <a:ext cx="3271418" cy="640080"/>
           </a:xfrm>
           <a:prstGeom prst="rect">
             <a:avLst/>
           </a:prstGeom>
           <a:solidFill>
-            <a:srgbClr val="F58A23"/>
+            <a:srgbClr val="14202B"/>
           </a:solidFill>
           <a:ln>
             <a:noFill/>
@@ -7169,8 +7088,43 @@
         </p:nvSpPr>
         <p:spPr>
           <a:xfrm>
-            <a:off x="1417320" y="2194560"/>
-            <a:ext cx="4449927" cy="3474720"/>
+            <a:off x="1143000" y="1965960"/>
+            <a:ext cx="3271418" cy="640080"/>
+          </a:xfrm>
+          <a:prstGeom prst="rect">
+            <a:avLst/>
+          </a:prstGeom>
+          <a:noFill/>
+        </p:spPr>
+        <p:txBody>
+          <a:bodyPr wrap="square" anchor="ctr" lIns="0" rIns="0" tIns="0" bIns="0">
+            <a:spAutoFit/>
+          </a:bodyPr>
+          <a:lstStyle/>
+          <a:p>
+            <a:pPr algn="ctr"/>
+            <a:r>
+              <a:rPr sz="1900" b="1">
+                <a:solidFill>
+                  <a:srgbClr val="FFFFFF"/>
+                </a:solidFill>
+                <a:latin typeface="Calibri"/>
+              </a:rPr>
+              <a:t>Software</a:t>
+            </a:r>
+          </a:p>
+        </p:txBody>
+      </p:sp>
+      <p:sp>
+        <p:nvSpPr>
+          <p:cNvPr id="10" name="TextBox 9"/>
+          <p:cNvSpPr txBox="1"/>
+          <p:nvPr/>
+        </p:nvSpPr>
+        <p:spPr>
+          <a:xfrm>
+            <a:off x="1371600" y="2788920"/>
+            <a:ext cx="2814218" cy="1737360"/>
           </a:xfrm>
           <a:prstGeom prst="rect">
             <a:avLst/>
@@ -7182,22 +7136,6 @@
             <a:spAutoFit/>
           </a:bodyPr>
           <a:lstStyle/>
-          <a:p>
-            <a:pPr algn="l">
-              <a:spcAft>
-                <a:spcPts val="1000"/>
-              </a:spcAft>
-            </a:pPr>
-            <a:r>
-              <a:rPr sz="1700" b="1">
-                <a:solidFill>
-                  <a:srgbClr val="14202B"/>
-                </a:solidFill>
-                <a:latin typeface="Calibri"/>
-              </a:rPr>
-              <a:t>Built for a usage limit</a:t>
-            </a:r>
-          </a:p>
           <a:p>
             <a:pPr algn="l">
               <a:spcAft>
@@ -7205,75 +7143,39 @@
               </a:spcAft>
             </a:pPr>
             <a:r>
-              <a:rPr sz="1350" b="0">
+              <a:rPr sz="1400" b="0">
                 <a:solidFill>
                   <a:srgbClr val="14202B"/>
                 </a:solidFill>
                 <a:latin typeface="Calibri"/>
               </a:rPr>
-              <a:t>•  Fresh session each day: state lives on disk, coach rebuilds it.</a:t>
-            </a:r>
-          </a:p>
-          <a:p>
-            <a:pPr algn="l">
-              <a:spcAft>
-                <a:spcPts val="800"/>
-              </a:spcAft>
-            </a:pPr>
-            <a:r>
-              <a:rPr sz="1350" b="0">
-                <a:solidFill>
-                  <a:srgbClr val="14202B"/>
+              <a:t>A deployed working slice on a public URL.</a:t>
+            </a:r>
+          </a:p>
+          <a:p>
+            <a:pPr algn="l"/>
+            <a:r>
+              <a:rPr sz="1300" b="0">
+                <a:solidFill>
+                  <a:srgbClr val="5A6B7B"/>
                 </a:solidFill>
                 <a:latin typeface="Calibri"/>
               </a:rPr>
-              <a:t>•  Every skill logs once and reads compact state, not whole files.</a:t>
-            </a:r>
-          </a:p>
-          <a:p>
-            <a:pPr algn="l">
-              <a:spcAft>
-                <a:spcPts val="800"/>
-              </a:spcAft>
-            </a:pPr>
-            <a:r>
-              <a:rPr sz="1350" b="0">
-                <a:solidFill>
-                  <a:srgbClr val="14202B"/>
-                </a:solidFill>
-                <a:latin typeface="Calibri"/>
-              </a:rPr>
-              <a:t>•  Scripts do the mechanical work in the background, not in tokens.</a:t>
-            </a:r>
-          </a:p>
-          <a:p>
-            <a:pPr algn="l">
-              <a:spcAft>
-                <a:spcPts val="800"/>
-              </a:spcAft>
-            </a:pPr>
-            <a:r>
-              <a:rPr sz="1350" b="0">
-                <a:solidFill>
-                  <a:srgbClr val="14202B"/>
-                </a:solidFill>
-                <a:latin typeface="Calibri"/>
-              </a:rPr>
-              <a:t>•  Lean skills: bodies and triggers cut by a quarter to a half.</a:t>
-            </a:r>
-          </a:p>
-        </p:txBody>
-      </p:sp>
-      <p:sp>
-        <p:nvSpPr>
-          <p:cNvPr id="10" name="Rectangle 9"/>
+              <a:t>Default stack: Next.js, Supabase, Vercel.</a:t>
+            </a:r>
+          </a:p>
+        </p:txBody>
+      </p:sp>
+      <p:sp>
+        <p:nvSpPr>
+          <p:cNvPr id="11" name="Rectangle 10"/>
           <p:cNvSpPr/>
           <p:nvPr/>
         </p:nvSpPr>
         <p:spPr>
           <a:xfrm>
-            <a:off x="6507327" y="1920240"/>
-            <a:ext cx="4998567" cy="3931920"/>
+            <a:off x="4688738" y="1965960"/>
+            <a:ext cx="3271418" cy="2651760"/>
           </a:xfrm>
           <a:prstGeom prst="rect">
             <a:avLst/>
@@ -7312,20 +7214,20 @@
       </p:sp>
       <p:sp>
         <p:nvSpPr>
-          <p:cNvPr id="11" name="Rectangle 10"/>
+          <p:cNvPr id="12" name="Rectangle 11"/>
           <p:cNvSpPr/>
           <p:nvPr/>
         </p:nvSpPr>
         <p:spPr>
           <a:xfrm>
-            <a:off x="6507327" y="1920240"/>
-            <a:ext cx="4998567" cy="50800"/>
+            <a:off x="4688738" y="1965960"/>
+            <a:ext cx="3271418" cy="640080"/>
           </a:xfrm>
           <a:prstGeom prst="rect">
             <a:avLst/>
           </a:prstGeom>
           <a:solidFill>
-            <a:srgbClr val="F58A23"/>
+            <a:srgbClr val="14202B"/>
           </a:solidFill>
           <a:ln>
             <a:noFill/>
@@ -7356,14 +7258,49 @@
       </p:sp>
       <p:sp>
         <p:nvSpPr>
-          <p:cNvPr id="12" name="TextBox 11"/>
+          <p:cNvPr id="13" name="TextBox 12"/>
           <p:cNvSpPr txBox="1"/>
           <p:nvPr/>
         </p:nvSpPr>
         <p:spPr>
           <a:xfrm>
-            <a:off x="6781647" y="2194560"/>
-            <a:ext cx="4449927" cy="3474720"/>
+            <a:off x="4688738" y="1965960"/>
+            <a:ext cx="3271418" cy="640080"/>
+          </a:xfrm>
+          <a:prstGeom prst="rect">
+            <a:avLst/>
+          </a:prstGeom>
+          <a:noFill/>
+        </p:spPr>
+        <p:txBody>
+          <a:bodyPr wrap="square" anchor="ctr" lIns="0" rIns="0" tIns="0" bIns="0">
+            <a:spAutoFit/>
+          </a:bodyPr>
+          <a:lstStyle/>
+          <a:p>
+            <a:pPr algn="ctr"/>
+            <a:r>
+              <a:rPr sz="1900" b="1">
+                <a:solidFill>
+                  <a:srgbClr val="FFFFFF"/>
+                </a:solidFill>
+                <a:latin typeface="Calibri"/>
+              </a:rPr>
+              <a:t>Hardware</a:t>
+            </a:r>
+          </a:p>
+        </p:txBody>
+      </p:sp>
+      <p:sp>
+        <p:nvSpPr>
+          <p:cNvPr id="14" name="TextBox 13"/>
+          <p:cNvSpPr txBox="1"/>
+          <p:nvPr/>
+        </p:nvSpPr>
+        <p:spPr>
+          <a:xfrm>
+            <a:off x="4917338" y="2788920"/>
+            <a:ext cx="2814218" cy="1737360"/>
           </a:xfrm>
           <a:prstGeom prst="rect">
             <a:avLst/>
@@ -7375,22 +7312,6 @@
             <a:spAutoFit/>
           </a:bodyPr>
           <a:lstStyle/>
-          <a:p>
-            <a:pPr algn="l">
-              <a:spcAft>
-                <a:spcPts val="1000"/>
-              </a:spcAft>
-            </a:pPr>
-            <a:r>
-              <a:rPr sz="1700" b="1">
-                <a:solidFill>
-                  <a:srgbClr val="14202B"/>
-                </a:solidFill>
-                <a:latin typeface="Calibri"/>
-              </a:rPr>
-              <a:t>Auditable by default</a:t>
-            </a:r>
-          </a:p>
           <a:p>
             <a:pPr algn="l">
               <a:spcAft>
@@ -7398,15 +7319,175 @@
               </a:spcAft>
             </a:pPr>
             <a:r>
-              <a:rPr sz="1350" b="0">
+              <a:rPr sz="1400" b="0">
                 <a:solidFill>
                   <a:srgbClr val="14202B"/>
                 </a:solidFill>
                 <a:latin typeface="Calibri"/>
               </a:rPr>
-              <a:t>•  Every artefact is logged to a changelog with its numeric result.</a:t>
-            </a:r>
-          </a:p>
+              <a:t>A prototype (CAD render or mock) plus a pre-order or waitlist page.</a:t>
+            </a:r>
+          </a:p>
+          <a:p>
+            <a:pPr algn="l"/>
+            <a:r>
+              <a:rPr sz="1300" b="0">
+                <a:solidFill>
+                  <a:srgbClr val="5A6B7B"/>
+                </a:solidFill>
+                <a:latin typeface="Calibri"/>
+              </a:rPr>
+              <a:t>Takes real payment intent.</a:t>
+            </a:r>
+          </a:p>
+        </p:txBody>
+      </p:sp>
+      <p:sp>
+        <p:nvSpPr>
+          <p:cNvPr id="15" name="Rectangle 14"/>
+          <p:cNvSpPr/>
+          <p:nvPr/>
+        </p:nvSpPr>
+        <p:spPr>
+          <a:xfrm>
+            <a:off x="8234476" y="1965960"/>
+            <a:ext cx="3271418" cy="2651760"/>
+          </a:xfrm>
+          <a:prstGeom prst="rect">
+            <a:avLst/>
+          </a:prstGeom>
+          <a:solidFill>
+            <a:srgbClr val="F4F6F8"/>
+          </a:solidFill>
+          <a:ln w="12700">
+            <a:solidFill>
+              <a:srgbClr val="DDE3E8"/>
+            </a:solidFill>
+          </a:ln>
+          <a:effectLst/>
+        </p:spPr>
+        <p:style>
+          <a:lnRef idx="1">
+            <a:schemeClr val="accent1"/>
+          </a:lnRef>
+          <a:fillRef idx="3">
+            <a:schemeClr val="accent1"/>
+          </a:fillRef>
+          <a:effectRef idx="2">
+            <a:schemeClr val="accent1"/>
+          </a:effectRef>
+          <a:fontRef idx="minor">
+            <a:schemeClr val="lt1"/>
+          </a:fontRef>
+        </p:style>
+        <p:txBody>
+          <a:bodyPr rtlCol="0" anchor="ctr"/>
+          <a:lstStyle/>
+          <a:p>
+            <a:pPr algn="ctr"/>
+          </a:p>
+        </p:txBody>
+      </p:sp>
+      <p:sp>
+        <p:nvSpPr>
+          <p:cNvPr id="16" name="Rectangle 15"/>
+          <p:cNvSpPr/>
+          <p:nvPr/>
+        </p:nvSpPr>
+        <p:spPr>
+          <a:xfrm>
+            <a:off x="8234476" y="1965960"/>
+            <a:ext cx="3271418" cy="640080"/>
+          </a:xfrm>
+          <a:prstGeom prst="rect">
+            <a:avLst/>
+          </a:prstGeom>
+          <a:solidFill>
+            <a:srgbClr val="14202B"/>
+          </a:solidFill>
+          <a:ln>
+            <a:noFill/>
+          </a:ln>
+          <a:effectLst/>
+        </p:spPr>
+        <p:style>
+          <a:lnRef idx="1">
+            <a:schemeClr val="accent1"/>
+          </a:lnRef>
+          <a:fillRef idx="3">
+            <a:schemeClr val="accent1"/>
+          </a:fillRef>
+          <a:effectRef idx="2">
+            <a:schemeClr val="accent1"/>
+          </a:effectRef>
+          <a:fontRef idx="minor">
+            <a:schemeClr val="lt1"/>
+          </a:fontRef>
+        </p:style>
+        <p:txBody>
+          <a:bodyPr rtlCol="0" anchor="ctr"/>
+          <a:lstStyle/>
+          <a:p>
+            <a:pPr algn="ctr"/>
+          </a:p>
+        </p:txBody>
+      </p:sp>
+      <p:sp>
+        <p:nvSpPr>
+          <p:cNvPr id="17" name="TextBox 16"/>
+          <p:cNvSpPr txBox="1"/>
+          <p:nvPr/>
+        </p:nvSpPr>
+        <p:spPr>
+          <a:xfrm>
+            <a:off x="8234476" y="1965960"/>
+            <a:ext cx="3271418" cy="640080"/>
+          </a:xfrm>
+          <a:prstGeom prst="rect">
+            <a:avLst/>
+          </a:prstGeom>
+          <a:noFill/>
+        </p:spPr>
+        <p:txBody>
+          <a:bodyPr wrap="square" anchor="ctr" lIns="0" rIns="0" tIns="0" bIns="0">
+            <a:spAutoFit/>
+          </a:bodyPr>
+          <a:lstStyle/>
+          <a:p>
+            <a:pPr algn="ctr"/>
+            <a:r>
+              <a:rPr sz="1900" b="1">
+                <a:solidFill>
+                  <a:srgbClr val="FFFFFF"/>
+                </a:solidFill>
+                <a:latin typeface="Calibri"/>
+              </a:rPr>
+              <a:t>Services</a:t>
+            </a:r>
+          </a:p>
+        </p:txBody>
+      </p:sp>
+      <p:sp>
+        <p:nvSpPr>
+          <p:cNvPr id="18" name="TextBox 17"/>
+          <p:cNvSpPr txBox="1"/>
+          <p:nvPr/>
+        </p:nvSpPr>
+        <p:spPr>
+          <a:xfrm>
+            <a:off x="8463076" y="2788920"/>
+            <a:ext cx="2814218" cy="1737360"/>
+          </a:xfrm>
+          <a:prstGeom prst="rect">
+            <a:avLst/>
+          </a:prstGeom>
+          <a:noFill/>
+        </p:spPr>
+        <p:txBody>
+          <a:bodyPr wrap="square" anchor="t" lIns="0" rIns="0" tIns="0" bIns="0">
+            <a:spAutoFit/>
+          </a:bodyPr>
+          <a:lstStyle/>
           <a:p>
             <a:pPr algn="l">
               <a:spcAft>
@@ -7414,52 +7495,127 @@
               </a:spcAft>
             </a:pPr>
             <a:r>
-              <a:rPr sz="1350" b="0">
+              <a:rPr sz="1400" b="0">
                 <a:solidFill>
                   <a:srgbClr val="14202B"/>
                 </a:solidFill>
                 <a:latin typeface="Calibri"/>
               </a:rPr>
-              <a:t>•  Decisions and their reasons are recorded as you go.</a:t>
-            </a:r>
-          </a:p>
+              <a:t>A productised package with one sample deliverable.</a:t>
+            </a:r>
+          </a:p>
+          <a:p>
+            <a:pPr algn="l"/>
+            <a:r>
+              <a:rPr sz="1300" b="0">
+                <a:solidFill>
+                  <a:srgbClr val="5A6B7B"/>
+                </a:solidFill>
+                <a:latin typeface="Calibri"/>
+              </a:rPr>
+              <a:t>Plus a bookable intake page.</a:t>
+            </a:r>
+          </a:p>
+        </p:txBody>
+      </p:sp>
+      <p:sp>
+        <p:nvSpPr>
+          <p:cNvPr id="19" name="Rectangle 18"/>
+          <p:cNvSpPr/>
+          <p:nvPr/>
+        </p:nvSpPr>
+        <p:spPr>
+          <a:xfrm>
+            <a:off x="1143000" y="5029200"/>
+            <a:ext cx="10362895" cy="868680"/>
+          </a:xfrm>
+          <a:prstGeom prst="rect">
+            <a:avLst/>
+          </a:prstGeom>
+          <a:solidFill>
+            <a:srgbClr val="14202B"/>
+          </a:solidFill>
+          <a:ln>
+            <a:noFill/>
+          </a:ln>
+          <a:effectLst/>
+        </p:spPr>
+        <p:style>
+          <a:lnRef idx="1">
+            <a:schemeClr val="accent1"/>
+          </a:lnRef>
+          <a:fillRef idx="3">
+            <a:schemeClr val="accent1"/>
+          </a:fillRef>
+          <a:effectRef idx="2">
+            <a:schemeClr val="accent1"/>
+          </a:effectRef>
+          <a:fontRef idx="minor">
+            <a:schemeClr val="lt1"/>
+          </a:fontRef>
+        </p:style>
+        <p:txBody>
+          <a:bodyPr rtlCol="0" anchor="ctr"/>
+          <a:lstStyle/>
+          <a:p>
+            <a:pPr algn="ctr"/>
+          </a:p>
+        </p:txBody>
+      </p:sp>
+      <p:sp>
+        <p:nvSpPr>
+          <p:cNvPr id="20" name="TextBox 19"/>
+          <p:cNvSpPr txBox="1"/>
+          <p:nvPr/>
+        </p:nvSpPr>
+        <p:spPr>
+          <a:xfrm>
+            <a:off x="1463040" y="5029200"/>
+            <a:ext cx="9722815" cy="868680"/>
+          </a:xfrm>
+          <a:prstGeom prst="rect">
+            <a:avLst/>
+          </a:prstGeom>
+          <a:noFill/>
+        </p:spPr>
+        <p:txBody>
+          <a:bodyPr wrap="square" anchor="ctr" lIns="0" rIns="0" tIns="0" bIns="0">
+            <a:spAutoFit/>
+          </a:bodyPr>
+          <a:lstStyle/>
           <a:p>
             <a:pPr algn="l">
               <a:spcAft>
-                <a:spcPts val="800"/>
+                <a:spcPts val="300"/>
               </a:spcAft>
             </a:pPr>
             <a:r>
-              <a:rPr sz="1350" b="0">
-                <a:solidFill>
-                  <a:srgbClr val="14202B"/>
+              <a:rPr sz="1300" b="1">
+                <a:solidFill>
+                  <a:srgbClr val="F58A23"/>
                 </a:solidFill>
                 <a:latin typeface="Calibri"/>
               </a:rPr>
-              <a:t>•  audit-pack compiles it all into one regulator or investor pack.</a:t>
-            </a:r>
-          </a:p>
-          <a:p>
-            <a:pPr algn="l">
-              <a:spcAft>
-                <a:spcPts val="800"/>
-              </a:spcAft>
-            </a:pPr>
-            <a:r>
-              <a:rPr sz="1350" b="0">
-                <a:solidFill>
-                  <a:srgbClr val="14202B"/>
+              <a:t>The shared spine across all three:</a:t>
+            </a:r>
+          </a:p>
+          <a:p>
+            <a:pPr algn="l"/>
+            <a:r>
+              <a:rPr sz="1400" b="0">
+                <a:solidFill>
+                  <a:srgbClr val="FFFFFF"/>
                 </a:solidFill>
                 <a:latin typeface="Calibri"/>
               </a:rPr>
-              <a:t>•  Human sign-off before any outreach is sent or money is spent.</a:t>
-            </a:r>
-          </a:p>
-        </p:txBody>
-      </p:sp>
-      <p:sp>
-        <p:nvSpPr>
-          <p:cNvPr id="13" name="TextBox 12"/>
+              <a:t>a live page a real prospect can act on. Skills that build or ship branch from one variance matrix, so the journey stays the same shape whatever you are making.</a:t>
+            </a:r>
+          </a:p>
+        </p:txBody>
+      </p:sp>
+      <p:sp>
+        <p:nvSpPr>
+          <p:cNvPr id="21" name="TextBox 20"/>
           <p:cNvSpPr txBox="1"/>
           <p:nvPr/>
         </p:nvSpPr>
@@ -7494,7 +7650,7 @@
       </p:sp>
       <p:sp>
         <p:nvSpPr>
-          <p:cNvPr id="14" name="TextBox 13"/>
+          <p:cNvPr id="22" name="TextBox 21"/>
           <p:cNvSpPr txBox="1"/>
           <p:nvPr/>
         </p:nvSpPr>
@@ -7663,7 +7819,7 @@
                 </a:solidFill>
                 <a:latin typeface="Calibri"/>
               </a:rPr>
-              <a:t>BY FRIDAY</a:t>
+              <a:t>BY DESIGN</a:t>
             </a:r>
           </a:p>
         </p:txBody>
@@ -7698,7 +7854,7 @@
                 </a:solidFill>
                 <a:latin typeface="Calibri"/>
               </a:rPr>
-              <a:t>What the founder walks away with</a:t>
+              <a:t>Efficient to run, auditable to trust</a:t>
             </a:r>
           </a:p>
         </p:txBody>
@@ -7749,14 +7905,104 @@
       </p:sp>
       <p:sp>
         <p:nvSpPr>
-          <p:cNvPr id="7" name="TextBox 6"/>
+          <p:cNvPr id="7" name="Rectangle 6"/>
+          <p:cNvSpPr/>
+          <p:nvPr/>
+        </p:nvSpPr>
+        <p:spPr>
+          <a:xfrm>
+            <a:off x="1143000" y="1920240"/>
+            <a:ext cx="4998567" cy="3931920"/>
+          </a:xfrm>
+          <a:prstGeom prst="rect">
+            <a:avLst/>
+          </a:prstGeom>
+          <a:solidFill>
+            <a:srgbClr val="F4F6F8"/>
+          </a:solidFill>
+          <a:ln w="12700">
+            <a:solidFill>
+              <a:srgbClr val="DDE3E8"/>
+            </a:solidFill>
+          </a:ln>
+          <a:effectLst/>
+        </p:spPr>
+        <p:style>
+          <a:lnRef idx="1">
+            <a:schemeClr val="accent1"/>
+          </a:lnRef>
+          <a:fillRef idx="3">
+            <a:schemeClr val="accent1"/>
+          </a:fillRef>
+          <a:effectRef idx="2">
+            <a:schemeClr val="accent1"/>
+          </a:effectRef>
+          <a:fontRef idx="minor">
+            <a:schemeClr val="lt1"/>
+          </a:fontRef>
+        </p:style>
+        <p:txBody>
+          <a:bodyPr rtlCol="0" anchor="ctr"/>
+          <a:lstStyle/>
+          <a:p>
+            <a:pPr algn="ctr"/>
+          </a:p>
+        </p:txBody>
+      </p:sp>
+      <p:sp>
+        <p:nvSpPr>
+          <p:cNvPr id="8" name="Rectangle 7"/>
+          <p:cNvSpPr/>
+          <p:nvPr/>
+        </p:nvSpPr>
+        <p:spPr>
+          <a:xfrm>
+            <a:off x="1143000" y="1920240"/>
+            <a:ext cx="4998567" cy="50800"/>
+          </a:xfrm>
+          <a:prstGeom prst="rect">
+            <a:avLst/>
+          </a:prstGeom>
+          <a:solidFill>
+            <a:srgbClr val="F58A23"/>
+          </a:solidFill>
+          <a:ln>
+            <a:noFill/>
+          </a:ln>
+          <a:effectLst/>
+        </p:spPr>
+        <p:style>
+          <a:lnRef idx="1">
+            <a:schemeClr val="accent1"/>
+          </a:lnRef>
+          <a:fillRef idx="3">
+            <a:schemeClr val="accent1"/>
+          </a:fillRef>
+          <a:effectRef idx="2">
+            <a:schemeClr val="accent1"/>
+          </a:effectRef>
+          <a:fontRef idx="minor">
+            <a:schemeClr val="lt1"/>
+          </a:fontRef>
+        </p:style>
+        <p:txBody>
+          <a:bodyPr rtlCol="0" anchor="ctr"/>
+          <a:lstStyle/>
+          <a:p>
+            <a:pPr algn="ctr"/>
+          </a:p>
+        </p:txBody>
+      </p:sp>
+      <p:sp>
+        <p:nvSpPr>
+          <p:cNvPr id="9" name="TextBox 8"/>
           <p:cNvSpPr txBox="1"/>
           <p:nvPr/>
         </p:nvSpPr>
         <p:spPr>
           <a:xfrm>
-            <a:off x="1143000" y="2103120"/>
-            <a:ext cx="5044287" cy="3657600"/>
+            <a:off x="1417320" y="2194560"/>
+            <a:ext cx="4449927" cy="3474720"/>
           </a:xfrm>
           <a:prstGeom prst="rect">
             <a:avLst/>
@@ -7771,79 +8017,185 @@
           <a:p>
             <a:pPr algn="l">
               <a:spcAft>
-                <a:spcPts val="1200"/>
+                <a:spcPts val="1000"/>
               </a:spcAft>
             </a:pPr>
             <a:r>
-              <a:rPr sz="1500" b="0">
+              <a:rPr sz="1700" b="1">
                 <a:solidFill>
                   <a:srgbClr val="14202B"/>
                 </a:solidFill>
                 <a:latin typeface="Calibri"/>
               </a:rPr>
-              <a:t>✓   A validated problem, backed by 8 to 12 real interviews</a:t>
+              <a:t>Built for a usage limit</a:t>
             </a:r>
           </a:p>
           <a:p>
             <a:pPr algn="l">
               <a:spcAft>
-                <a:spcPts val="1200"/>
+                <a:spcPts val="800"/>
               </a:spcAft>
             </a:pPr>
             <a:r>
-              <a:rPr sz="1500" b="0">
+              <a:rPr sz="1350" b="0">
                 <a:solidFill>
                   <a:srgbClr val="14202B"/>
                 </a:solidFill>
                 <a:latin typeface="Calibri"/>
               </a:rPr>
-              <a:t>✓   A market map, market sizing and a hand-out pitch deck</a:t>
+              <a:t>•  Fresh session each day: state lives on disk, coach rebuilds it.</a:t>
             </a:r>
           </a:p>
           <a:p>
             <a:pPr algn="l">
               <a:spcAft>
-                <a:spcPts val="1200"/>
+                <a:spcPts val="800"/>
               </a:spcAft>
             </a:pPr>
             <a:r>
-              <a:rPr sz="1500" b="0">
+              <a:rPr sz="1350" b="0">
                 <a:solidFill>
                   <a:srgbClr val="14202B"/>
                 </a:solidFill>
                 <a:latin typeface="Calibri"/>
               </a:rPr>
-              <a:t>✓   A brand: name, palette, logo and tone of voice</a:t>
+              <a:t>•  Every skill logs once and reads compact state, not whole files.</a:t>
             </a:r>
           </a:p>
           <a:p>
             <a:pPr algn="l">
               <a:spcAft>
-                <a:spcPts val="1200"/>
+                <a:spcPts val="800"/>
               </a:spcAft>
             </a:pPr>
             <a:r>
-              <a:rPr sz="1500" b="0">
+              <a:rPr sz="1350" b="0">
                 <a:solidFill>
                   <a:srgbClr val="14202B"/>
                 </a:solidFill>
                 <a:latin typeface="Calibri"/>
               </a:rPr>
-              <a:t>✓   A working MVP, live for a real prospect to act on</a:t>
-            </a:r>
-          </a:p>
-        </p:txBody>
-      </p:sp>
-      <p:sp>
-        <p:nvSpPr>
-          <p:cNvPr id="8" name="TextBox 7"/>
+              <a:t>•  Scripts do the mechanical work in the background, not in tokens.</a:t>
+            </a:r>
+          </a:p>
+          <a:p>
+            <a:pPr algn="l">
+              <a:spcAft>
+                <a:spcPts val="800"/>
+              </a:spcAft>
+            </a:pPr>
+            <a:r>
+              <a:rPr sz="1350" b="0">
+                <a:solidFill>
+                  <a:srgbClr val="14202B"/>
+                </a:solidFill>
+                <a:latin typeface="Calibri"/>
+              </a:rPr>
+              <a:t>•  Lean skills: bodies and triggers cut by a quarter to a half.</a:t>
+            </a:r>
+          </a:p>
+        </p:txBody>
+      </p:sp>
+      <p:sp>
+        <p:nvSpPr>
+          <p:cNvPr id="10" name="Rectangle 9"/>
+          <p:cNvSpPr/>
+          <p:nvPr/>
+        </p:nvSpPr>
+        <p:spPr>
+          <a:xfrm>
+            <a:off x="6507327" y="1920240"/>
+            <a:ext cx="4998567" cy="3931920"/>
+          </a:xfrm>
+          <a:prstGeom prst="rect">
+            <a:avLst/>
+          </a:prstGeom>
+          <a:solidFill>
+            <a:srgbClr val="F4F6F8"/>
+          </a:solidFill>
+          <a:ln w="12700">
+            <a:solidFill>
+              <a:srgbClr val="DDE3E8"/>
+            </a:solidFill>
+          </a:ln>
+          <a:effectLst/>
+        </p:spPr>
+        <p:style>
+          <a:lnRef idx="1">
+            <a:schemeClr val="accent1"/>
+          </a:lnRef>
+          <a:fillRef idx="3">
+            <a:schemeClr val="accent1"/>
+          </a:fillRef>
+          <a:effectRef idx="2">
+            <a:schemeClr val="accent1"/>
+          </a:effectRef>
+          <a:fontRef idx="minor">
+            <a:schemeClr val="lt1"/>
+          </a:fontRef>
+        </p:style>
+        <p:txBody>
+          <a:bodyPr rtlCol="0" anchor="ctr"/>
+          <a:lstStyle/>
+          <a:p>
+            <a:pPr algn="ctr"/>
+          </a:p>
+        </p:txBody>
+      </p:sp>
+      <p:sp>
+        <p:nvSpPr>
+          <p:cNvPr id="11" name="Rectangle 10"/>
+          <p:cNvSpPr/>
+          <p:nvPr/>
+        </p:nvSpPr>
+        <p:spPr>
+          <a:xfrm>
+            <a:off x="6507327" y="1920240"/>
+            <a:ext cx="4998567" cy="50800"/>
+          </a:xfrm>
+          <a:prstGeom prst="rect">
+            <a:avLst/>
+          </a:prstGeom>
+          <a:solidFill>
+            <a:srgbClr val="F58A23"/>
+          </a:solidFill>
+          <a:ln>
+            <a:noFill/>
+          </a:ln>
+          <a:effectLst/>
+        </p:spPr>
+        <p:style>
+          <a:lnRef idx="1">
+            <a:schemeClr val="accent1"/>
+          </a:lnRef>
+          <a:fillRef idx="3">
+            <a:schemeClr val="accent1"/>
+          </a:fillRef>
+          <a:effectRef idx="2">
+            <a:schemeClr val="accent1"/>
+          </a:effectRef>
+          <a:fontRef idx="minor">
+            <a:schemeClr val="lt1"/>
+          </a:fontRef>
+        </p:style>
+        <p:txBody>
+          <a:bodyPr rtlCol="0" anchor="ctr"/>
+          <a:lstStyle/>
+          <a:p>
+            <a:pPr algn="ctr"/>
+          </a:p>
+        </p:txBody>
+      </p:sp>
+      <p:sp>
+        <p:nvSpPr>
+          <p:cNvPr id="12" name="TextBox 11"/>
           <p:cNvSpPr txBox="1"/>
           <p:nvPr/>
         </p:nvSpPr>
         <p:spPr>
           <a:xfrm>
-            <a:off x="6553047" y="2103120"/>
-            <a:ext cx="5044287" cy="3657600"/>
+            <a:off x="6781647" y="2194560"/>
+            <a:ext cx="4449927" cy="3474720"/>
           </a:xfrm>
           <a:prstGeom prst="rect">
             <a:avLst/>
@@ -7858,72 +8210,88 @@
           <a:p>
             <a:pPr algn="l">
               <a:spcAft>
-                <a:spcPts val="1200"/>
+                <a:spcPts val="1000"/>
               </a:spcAft>
             </a:pPr>
             <a:r>
-              <a:rPr sz="1500" b="0">
+              <a:rPr sz="1700" b="1">
                 <a:solidFill>
                   <a:srgbClr val="14202B"/>
                 </a:solidFill>
                 <a:latin typeface="Calibri"/>
               </a:rPr>
-              <a:t>✓   A landing site, a sales deck and a go-to-market plan</a:t>
+              <a:t>Auditable by default</a:t>
             </a:r>
           </a:p>
           <a:p>
             <a:pPr algn="l">
               <a:spcAft>
-                <a:spcPts val="1200"/>
+                <a:spcPts val="800"/>
               </a:spcAft>
             </a:pPr>
             <a:r>
-              <a:rPr sz="1500" b="0">
+              <a:rPr sz="1350" b="0">
                 <a:solidFill>
                   <a:srgbClr val="14202B"/>
                 </a:solidFill>
                 <a:latin typeface="Calibri"/>
               </a:rPr>
-              <a:t>✓   Client onboarding and intake processes, ready to use</a:t>
+              <a:t>•  Every artefact is logged to a changelog with its numeric result.</a:t>
             </a:r>
           </a:p>
           <a:p>
             <a:pPr algn="l">
               <a:spcAft>
-                <a:spcPts val="1200"/>
+                <a:spcPts val="800"/>
               </a:spcAft>
             </a:pPr>
             <a:r>
-              <a:rPr sz="1500" b="0">
+              <a:rPr sz="1350" b="0">
                 <a:solidFill>
                   <a:srgbClr val="14202B"/>
                 </a:solidFill>
                 <a:latin typeface="Calibri"/>
               </a:rPr>
-              <a:t>✓   One paying customer, recorded with a date and an amount</a:t>
+              <a:t>•  Decisions and their reasons are recorded as you go.</a:t>
             </a:r>
           </a:p>
           <a:p>
             <a:pPr algn="l">
               <a:spcAft>
-                <a:spcPts val="1200"/>
+                <a:spcPts val="800"/>
               </a:spcAft>
             </a:pPr>
             <a:r>
-              <a:rPr sz="1500" b="0">
+              <a:rPr sz="1350" b="0">
                 <a:solidFill>
                   <a:srgbClr val="14202B"/>
                 </a:solidFill>
                 <a:latin typeface="Calibri"/>
               </a:rPr>
-              <a:t>✓   A full audit pack of everything built, and why</a:t>
-            </a:r>
-          </a:p>
-        </p:txBody>
-      </p:sp>
-      <p:sp>
-        <p:nvSpPr>
-          <p:cNvPr id="9" name="TextBox 8"/>
+              <a:t>•  audit-pack compiles it all into one regulator or investor pack.</a:t>
+            </a:r>
+          </a:p>
+          <a:p>
+            <a:pPr algn="l">
+              <a:spcAft>
+                <a:spcPts val="800"/>
+              </a:spcAft>
+            </a:pPr>
+            <a:r>
+              <a:rPr sz="1350" b="0">
+                <a:solidFill>
+                  <a:srgbClr val="14202B"/>
+                </a:solidFill>
+                <a:latin typeface="Calibri"/>
+              </a:rPr>
+              <a:t>•  Human sign-off before any outreach is sent or money is spent.</a:t>
+            </a:r>
+          </a:p>
+        </p:txBody>
+      </p:sp>
+      <p:sp>
+        <p:nvSpPr>
+          <p:cNvPr id="13" name="TextBox 12"/>
           <p:cNvSpPr txBox="1"/>
           <p:nvPr/>
         </p:nvSpPr>
@@ -7958,7 +8326,7 @@
       </p:sp>
       <p:sp>
         <p:nvSpPr>
-          <p:cNvPr id="10" name="TextBox 9"/>
+          <p:cNvPr id="14" name="TextBox 13"/>
           <p:cNvSpPr txBox="1"/>
           <p:nvPr/>
         </p:nvSpPr>
@@ -8024,6 +8392,470 @@
             <a:avLst/>
           </a:prstGeom>
           <a:solidFill>
+            <a:srgbClr val="FFFFFF"/>
+          </a:solidFill>
+          <a:ln>
+            <a:noFill/>
+          </a:ln>
+          <a:effectLst/>
+        </p:spPr>
+        <p:style>
+          <a:lnRef idx="1">
+            <a:schemeClr val="accent1"/>
+          </a:lnRef>
+          <a:fillRef idx="3">
+            <a:schemeClr val="accent1"/>
+          </a:fillRef>
+          <a:effectRef idx="2">
+            <a:schemeClr val="accent1"/>
+          </a:effectRef>
+          <a:fontRef idx="minor">
+            <a:schemeClr val="lt1"/>
+          </a:fontRef>
+        </p:style>
+        <p:txBody>
+          <a:bodyPr rtlCol="0" anchor="ctr"/>
+          <a:lstStyle/>
+          <a:p>
+            <a:pPr algn="ctr"/>
+          </a:p>
+        </p:txBody>
+      </p:sp>
+      <p:sp>
+        <p:nvSpPr>
+          <p:cNvPr id="3" name="Rectangle 2"/>
+          <p:cNvSpPr/>
+          <p:nvPr/>
+        </p:nvSpPr>
+        <p:spPr>
+          <a:xfrm>
+            <a:off x="685800" y="566928"/>
+            <a:ext cx="310896" cy="310896"/>
+          </a:xfrm>
+          <a:prstGeom prst="rect">
+            <a:avLst/>
+          </a:prstGeom>
+          <a:solidFill>
+            <a:srgbClr val="F58A23"/>
+          </a:solidFill>
+          <a:ln>
+            <a:noFill/>
+          </a:ln>
+          <a:effectLst/>
+        </p:spPr>
+        <p:style>
+          <a:lnRef idx="1">
+            <a:schemeClr val="accent1"/>
+          </a:lnRef>
+          <a:fillRef idx="3">
+            <a:schemeClr val="accent1"/>
+          </a:fillRef>
+          <a:effectRef idx="2">
+            <a:schemeClr val="accent1"/>
+          </a:effectRef>
+          <a:fontRef idx="minor">
+            <a:schemeClr val="lt1"/>
+          </a:fontRef>
+        </p:style>
+        <p:txBody>
+          <a:bodyPr rtlCol="0" anchor="ctr"/>
+          <a:lstStyle/>
+          <a:p>
+            <a:pPr algn="ctr"/>
+          </a:p>
+        </p:txBody>
+      </p:sp>
+      <p:sp>
+        <p:nvSpPr>
+          <p:cNvPr id="4" name="TextBox 3"/>
+          <p:cNvSpPr txBox="1"/>
+          <p:nvPr/>
+        </p:nvSpPr>
+        <p:spPr>
+          <a:xfrm>
+            <a:off x="1143000" y="548640"/>
+            <a:ext cx="10362895" cy="274320"/>
+          </a:xfrm>
+          <a:prstGeom prst="rect">
+            <a:avLst/>
+          </a:prstGeom>
+          <a:noFill/>
+        </p:spPr>
+        <p:txBody>
+          <a:bodyPr wrap="square" anchor="t" lIns="0" rIns="0" tIns="0" bIns="0">
+            <a:spAutoFit/>
+          </a:bodyPr>
+          <a:lstStyle/>
+          <a:p>
+            <a:pPr algn="l"/>
+            <a:r>
+              <a:rPr sz="1200" b="1">
+                <a:solidFill>
+                  <a:srgbClr val="F58A23"/>
+                </a:solidFill>
+                <a:latin typeface="Calibri"/>
+              </a:rPr>
+              <a:t>BY FRIDAY</a:t>
+            </a:r>
+          </a:p>
+        </p:txBody>
+      </p:sp>
+      <p:sp>
+        <p:nvSpPr>
+          <p:cNvPr id="5" name="TextBox 4"/>
+          <p:cNvSpPr txBox="1"/>
+          <p:nvPr/>
+        </p:nvSpPr>
+        <p:spPr>
+          <a:xfrm>
+            <a:off x="1143000" y="841248"/>
+            <a:ext cx="10362895" cy="640080"/>
+          </a:xfrm>
+          <a:prstGeom prst="rect">
+            <a:avLst/>
+          </a:prstGeom>
+          <a:noFill/>
+        </p:spPr>
+        <p:txBody>
+          <a:bodyPr wrap="square" anchor="t" lIns="0" rIns="0" tIns="0" bIns="0">
+            <a:spAutoFit/>
+          </a:bodyPr>
+          <a:lstStyle/>
+          <a:p>
+            <a:pPr algn="l"/>
+            <a:r>
+              <a:rPr sz="2800" b="1">
+                <a:solidFill>
+                  <a:srgbClr val="14202B"/>
+                </a:solidFill>
+                <a:latin typeface="Calibri"/>
+              </a:rPr>
+              <a:t>What the founder walks away with</a:t>
+            </a:r>
+          </a:p>
+        </p:txBody>
+      </p:sp>
+      <p:sp>
+        <p:nvSpPr>
+          <p:cNvPr id="6" name="Rectangle 5"/>
+          <p:cNvSpPr/>
+          <p:nvPr/>
+        </p:nvSpPr>
+        <p:spPr>
+          <a:xfrm>
+            <a:off x="1143000" y="1481328"/>
+            <a:ext cx="1097280" cy="38100"/>
+          </a:xfrm>
+          <a:prstGeom prst="rect">
+            <a:avLst/>
+          </a:prstGeom>
+          <a:solidFill>
+            <a:srgbClr val="14202B"/>
+          </a:solidFill>
+          <a:ln>
+            <a:noFill/>
+          </a:ln>
+          <a:effectLst/>
+        </p:spPr>
+        <p:style>
+          <a:lnRef idx="1">
+            <a:schemeClr val="accent1"/>
+          </a:lnRef>
+          <a:fillRef idx="3">
+            <a:schemeClr val="accent1"/>
+          </a:fillRef>
+          <a:effectRef idx="2">
+            <a:schemeClr val="accent1"/>
+          </a:effectRef>
+          <a:fontRef idx="minor">
+            <a:schemeClr val="lt1"/>
+          </a:fontRef>
+        </p:style>
+        <p:txBody>
+          <a:bodyPr rtlCol="0" anchor="ctr"/>
+          <a:lstStyle/>
+          <a:p>
+            <a:pPr algn="ctr"/>
+          </a:p>
+        </p:txBody>
+      </p:sp>
+      <p:sp>
+        <p:nvSpPr>
+          <p:cNvPr id="7" name="TextBox 6"/>
+          <p:cNvSpPr txBox="1"/>
+          <p:nvPr/>
+        </p:nvSpPr>
+        <p:spPr>
+          <a:xfrm>
+            <a:off x="1143000" y="2103120"/>
+            <a:ext cx="5044287" cy="3657600"/>
+          </a:xfrm>
+          <a:prstGeom prst="rect">
+            <a:avLst/>
+          </a:prstGeom>
+          <a:noFill/>
+        </p:spPr>
+        <p:txBody>
+          <a:bodyPr wrap="square" anchor="t" lIns="0" rIns="0" tIns="0" bIns="0">
+            <a:spAutoFit/>
+          </a:bodyPr>
+          <a:lstStyle/>
+          <a:p>
+            <a:pPr algn="l">
+              <a:spcAft>
+                <a:spcPts val="1200"/>
+              </a:spcAft>
+            </a:pPr>
+            <a:r>
+              <a:rPr sz="1500" b="0">
+                <a:solidFill>
+                  <a:srgbClr val="14202B"/>
+                </a:solidFill>
+                <a:latin typeface="Calibri"/>
+              </a:rPr>
+              <a:t>✓   A validated problem, backed by 8 to 12 real interviews</a:t>
+            </a:r>
+          </a:p>
+          <a:p>
+            <a:pPr algn="l">
+              <a:spcAft>
+                <a:spcPts val="1200"/>
+              </a:spcAft>
+            </a:pPr>
+            <a:r>
+              <a:rPr sz="1500" b="0">
+                <a:solidFill>
+                  <a:srgbClr val="14202B"/>
+                </a:solidFill>
+                <a:latin typeface="Calibri"/>
+              </a:rPr>
+              <a:t>✓   A market map, market sizing and a hand-out pitch deck</a:t>
+            </a:r>
+          </a:p>
+          <a:p>
+            <a:pPr algn="l">
+              <a:spcAft>
+                <a:spcPts val="1200"/>
+              </a:spcAft>
+            </a:pPr>
+            <a:r>
+              <a:rPr sz="1500" b="0">
+                <a:solidFill>
+                  <a:srgbClr val="14202B"/>
+                </a:solidFill>
+                <a:latin typeface="Calibri"/>
+              </a:rPr>
+              <a:t>✓   A brand: name, palette, logo and tone of voice</a:t>
+            </a:r>
+          </a:p>
+          <a:p>
+            <a:pPr algn="l">
+              <a:spcAft>
+                <a:spcPts val="1200"/>
+              </a:spcAft>
+            </a:pPr>
+            <a:r>
+              <a:rPr sz="1500" b="0">
+                <a:solidFill>
+                  <a:srgbClr val="14202B"/>
+                </a:solidFill>
+                <a:latin typeface="Calibri"/>
+              </a:rPr>
+              <a:t>✓   A working MVP, live for a real prospect to act on</a:t>
+            </a:r>
+          </a:p>
+        </p:txBody>
+      </p:sp>
+      <p:sp>
+        <p:nvSpPr>
+          <p:cNvPr id="8" name="TextBox 7"/>
+          <p:cNvSpPr txBox="1"/>
+          <p:nvPr/>
+        </p:nvSpPr>
+        <p:spPr>
+          <a:xfrm>
+            <a:off x="6553047" y="2103120"/>
+            <a:ext cx="5044287" cy="3657600"/>
+          </a:xfrm>
+          <a:prstGeom prst="rect">
+            <a:avLst/>
+          </a:prstGeom>
+          <a:noFill/>
+        </p:spPr>
+        <p:txBody>
+          <a:bodyPr wrap="square" anchor="t" lIns="0" rIns="0" tIns="0" bIns="0">
+            <a:spAutoFit/>
+          </a:bodyPr>
+          <a:lstStyle/>
+          <a:p>
+            <a:pPr algn="l">
+              <a:spcAft>
+                <a:spcPts val="1200"/>
+              </a:spcAft>
+            </a:pPr>
+            <a:r>
+              <a:rPr sz="1500" b="0">
+                <a:solidFill>
+                  <a:srgbClr val="14202B"/>
+                </a:solidFill>
+                <a:latin typeface="Calibri"/>
+              </a:rPr>
+              <a:t>✓   A landing site, a sales deck and a go-to-market plan</a:t>
+            </a:r>
+          </a:p>
+          <a:p>
+            <a:pPr algn="l">
+              <a:spcAft>
+                <a:spcPts val="1200"/>
+              </a:spcAft>
+            </a:pPr>
+            <a:r>
+              <a:rPr sz="1500" b="0">
+                <a:solidFill>
+                  <a:srgbClr val="14202B"/>
+                </a:solidFill>
+                <a:latin typeface="Calibri"/>
+              </a:rPr>
+              <a:t>✓   Client onboarding and intake processes, ready to use</a:t>
+            </a:r>
+          </a:p>
+          <a:p>
+            <a:pPr algn="l">
+              <a:spcAft>
+                <a:spcPts val="1200"/>
+              </a:spcAft>
+            </a:pPr>
+            <a:r>
+              <a:rPr sz="1500" b="0">
+                <a:solidFill>
+                  <a:srgbClr val="14202B"/>
+                </a:solidFill>
+                <a:latin typeface="Calibri"/>
+              </a:rPr>
+              <a:t>✓   One paying customer, recorded with a date and an amount</a:t>
+            </a:r>
+          </a:p>
+          <a:p>
+            <a:pPr algn="l">
+              <a:spcAft>
+                <a:spcPts val="1200"/>
+              </a:spcAft>
+            </a:pPr>
+            <a:r>
+              <a:rPr sz="1500" b="0">
+                <a:solidFill>
+                  <a:srgbClr val="14202B"/>
+                </a:solidFill>
+                <a:latin typeface="Calibri"/>
+              </a:rPr>
+              <a:t>✓   A full audit pack of everything built, and why</a:t>
+            </a:r>
+          </a:p>
+        </p:txBody>
+      </p:sp>
+      <p:sp>
+        <p:nvSpPr>
+          <p:cNvPr id="9" name="TextBox 8"/>
+          <p:cNvSpPr txBox="1"/>
+          <p:nvPr/>
+        </p:nvSpPr>
+        <p:spPr>
+          <a:xfrm>
+            <a:off x="685800" y="6400800"/>
+            <a:ext cx="10820095" cy="274320"/>
+          </a:xfrm>
+          <a:prstGeom prst="rect">
+            <a:avLst/>
+          </a:prstGeom>
+          <a:noFill/>
+        </p:spPr>
+        <p:txBody>
+          <a:bodyPr wrap="square" anchor="t" lIns="0" rIns="0" tIns="0" bIns="0">
+            <a:spAutoFit/>
+          </a:bodyPr>
+          <a:lstStyle/>
+          <a:p>
+            <a:pPr algn="l"/>
+            <a:r>
+              <a:rPr sz="900" b="0">
+                <a:solidFill>
+                  <a:srgbClr val="5A6B7B"/>
+                </a:solidFill>
+                <a:latin typeface="Calibri"/>
+              </a:rPr>
+              <a:t>Spark Bootcamp  ·  a Claude Code plugin by Spark AI Agency</a:t>
+            </a:r>
+          </a:p>
+        </p:txBody>
+      </p:sp>
+      <p:sp>
+        <p:nvSpPr>
+          <p:cNvPr id="10" name="TextBox 9"/>
+          <p:cNvSpPr txBox="1"/>
+          <p:nvPr/>
+        </p:nvSpPr>
+        <p:spPr>
+          <a:xfrm>
+            <a:off x="10957255" y="6400800"/>
+            <a:ext cx="548640" cy="274320"/>
+          </a:xfrm>
+          <a:prstGeom prst="rect">
+            <a:avLst/>
+          </a:prstGeom>
+          <a:noFill/>
+        </p:spPr>
+        <p:txBody>
+          <a:bodyPr wrap="square" anchor="t" lIns="0" rIns="0" tIns="0" bIns="0">
+            <a:spAutoFit/>
+          </a:bodyPr>
+          <a:lstStyle/>
+          <a:p>
+            <a:pPr algn="r"/>
+            <a:r>
+              <a:rPr sz="900" b="0">
+                <a:solidFill>
+                  <a:srgbClr val="5A6B7B"/>
+                </a:solidFill>
+                <a:latin typeface="Calibri"/>
+              </a:rPr>
+              <a:t>16</a:t>
+            </a:r>
+          </a:p>
+        </p:txBody>
+      </p:sp>
+    </p:spTree>
+  </p:cSld>
+  <p:clrMapOvr>
+    <a:masterClrMapping/>
+  </p:clrMapOvr>
+</p:sld>
+</file>
+
+<file path=ppt/slides/slide17.xml><?xml version="1.0" encoding="utf-8"?>
+<p:sld xmlns:a="http://schemas.openxmlformats.org/drawingml/2006/main" xmlns:p="http://schemas.openxmlformats.org/presentationml/2006/main" xmlns:r="http://schemas.openxmlformats.org/officeDocument/2006/relationships">
+  <p:cSld>
+    <p:spTree>
+      <p:nvGrpSpPr>
+        <p:cNvPr id="1" name=""/>
+        <p:cNvGrpSpPr/>
+        <p:nvPr/>
+      </p:nvGrpSpPr>
+      <p:grpSpPr/>
+      <p:sp>
+        <p:nvSpPr>
+          <p:cNvPr id="2" name="Rectangle 1"/>
+          <p:cNvSpPr/>
+          <p:nvPr/>
+        </p:nvSpPr>
+        <p:spPr>
+          <a:xfrm>
+            <a:off x="0" y="0"/>
+            <a:ext cx="12191695" cy="6858000"/>
+          </a:xfrm>
+          <a:prstGeom prst="rect">
+            <a:avLst/>
+          </a:prstGeom>
+          <a:solidFill>
             <a:srgbClr val="14202B"/>
           </a:solidFill>
           <a:ln>
@@ -8453,7 +9285,7 @@
                 </a:solidFill>
                 <a:latin typeface="Calibri"/>
               </a:rPr>
-              <a:t>You install it, type one command a day, and it hand-holds you through the whole journey: validating the problem with real interviews, mapping the market, building a brand and a pitch deck, defining and building an MVP, testing it, and closing your first sale.</a:t>
+              <a:t>You install it 2 to 4 weeks early, type one command a day, and it hand-holds you through the whole journey: booking interviews weeks ahead, developing the idea, validating the problem with real conversations, mapping the market, building a brand and a pitch deck, defining and building an MVP, testing it, and closing your first sale.</a:t>
             </a:r>
           </a:p>
           <a:p>
@@ -8592,7 +9424,7 @@
                 </a:solidFill>
                 <a:latin typeface="Calibri"/>
               </a:rPr>
-              <a:t>60</a:t>
+              <a:t>62</a:t>
             </a:r>
           </a:p>
           <a:p>
@@ -9232,7 +10064,7 @@
                 </a:solidFill>
                 <a:latin typeface="Calibri"/>
               </a:rPr>
-              <a:t>THE WEEK</a:t>
+              <a:t>THE JOURNEY</a:t>
             </a:r>
           </a:p>
         </p:txBody>
@@ -9267,7 +10099,7 @@
                 </a:solidFill>
                 <a:latin typeface="Calibri"/>
               </a:rPr>
-              <a:t>Five days, five numeric outcomes</a:t>
+              <a:t>A pre-work phase, then five days of numeric outcomes</a:t>
             </a:r>
           </a:p>
         </p:txBody>
@@ -9324,8 +10156,8 @@
         </p:nvSpPr>
         <p:spPr>
           <a:xfrm>
-            <a:off x="1143000" y="1874519"/>
-            <a:ext cx="10362895" cy="841248"/>
+            <a:off x="1143000" y="1828800"/>
+            <a:ext cx="10362895" cy="694944"/>
           </a:xfrm>
           <a:prstGeom prst="rect">
             <a:avLst/>
@@ -9370,8 +10202,8 @@
         </p:nvSpPr>
         <p:spPr>
           <a:xfrm>
-            <a:off x="1143000" y="1874519"/>
-            <a:ext cx="1051560" cy="841248"/>
+            <a:off x="1143000" y="1828800"/>
+            <a:ext cx="1051560" cy="694944"/>
           </a:xfrm>
           <a:prstGeom prst="rect">
             <a:avLst/>
@@ -9414,8 +10246,8 @@
         </p:nvSpPr>
         <p:spPr>
           <a:xfrm>
-            <a:off x="1143000" y="1874519"/>
-            <a:ext cx="1051560" cy="841248"/>
+            <a:off x="1143000" y="1828800"/>
+            <a:ext cx="1051560" cy="694944"/>
           </a:xfrm>
           <a:prstGeom prst="rect">
             <a:avLst/>
@@ -9436,7 +10268,7 @@
                 </a:solidFill>
                 <a:latin typeface="Calibri"/>
               </a:rPr>
-              <a:t>Mon</a:t>
+              <a:t>Pre</a:t>
             </a:r>
           </a:p>
         </p:txBody>
@@ -9449,8 +10281,8 @@
         </p:nvSpPr>
         <p:spPr>
           <a:xfrm>
-            <a:off x="2377440" y="1874519"/>
-            <a:ext cx="2651760" cy="841248"/>
+            <a:off x="2377440" y="1828800"/>
+            <a:ext cx="2651760" cy="694944"/>
           </a:xfrm>
           <a:prstGeom prst="rect">
             <a:avLst/>
@@ -9471,7 +10303,7 @@
                 </a:solidFill>
                 <a:latin typeface="Calibri"/>
               </a:rPr>
-              <a:t>Discovery</a:t>
+              <a:t>Interviews booked</a:t>
             </a:r>
           </a:p>
         </p:txBody>
@@ -9484,8 +10316,8 @@
         </p:nvSpPr>
         <p:spPr>
           <a:xfrm>
-            <a:off x="5166360" y="1874519"/>
-            <a:ext cx="5882335" cy="841248"/>
+            <a:off x="5166360" y="1828800"/>
+            <a:ext cx="5882335" cy="694944"/>
           </a:xfrm>
           <a:prstGeom prst="rect">
             <a:avLst/>
@@ -9506,7 +10338,7 @@
                 </a:solidFill>
                 <a:latin typeface="Calibri"/>
               </a:rPr>
-              <a:t>8 to 12 interviews synthesised, one validated problem, one named segment</a:t>
+              <a:t>2 to 4 weeks out: idea captured, 20+ invitations sent, 8 to 12 interviews booked for the Monday</a:t>
             </a:r>
           </a:p>
         </p:txBody>
@@ -9519,8 +10351,8 @@
         </p:nvSpPr>
         <p:spPr>
           <a:xfrm>
-            <a:off x="1143000" y="2770631"/>
-            <a:ext cx="10362895" cy="841248"/>
+            <a:off x="1143000" y="2578608"/>
+            <a:ext cx="10362895" cy="694944"/>
           </a:xfrm>
           <a:prstGeom prst="rect">
             <a:avLst/>
@@ -9565,8 +10397,8 @@
         </p:nvSpPr>
         <p:spPr>
           <a:xfrm>
-            <a:off x="1143000" y="2770631"/>
-            <a:ext cx="1051560" cy="841248"/>
+            <a:off x="1143000" y="2578608"/>
+            <a:ext cx="1051560" cy="694944"/>
           </a:xfrm>
           <a:prstGeom prst="rect">
             <a:avLst/>
@@ -9609,8 +10441,8 @@
         </p:nvSpPr>
         <p:spPr>
           <a:xfrm>
-            <a:off x="1143000" y="2770631"/>
-            <a:ext cx="1051560" cy="841248"/>
+            <a:off x="1143000" y="2578608"/>
+            <a:ext cx="1051560" cy="694944"/>
           </a:xfrm>
           <a:prstGeom prst="rect">
             <a:avLst/>
@@ -9631,7 +10463,7 @@
                 </a:solidFill>
                 <a:latin typeface="Calibri"/>
               </a:rPr>
-              <a:t>Tue</a:t>
+              <a:t>Mon</a:t>
             </a:r>
           </a:p>
         </p:txBody>
@@ -9644,8 +10476,8 @@
         </p:nvSpPr>
         <p:spPr>
           <a:xfrm>
-            <a:off x="2377440" y="2770631"/>
-            <a:ext cx="2651760" cy="841248"/>
+            <a:off x="2377440" y="2578608"/>
+            <a:ext cx="2651760" cy="694944"/>
           </a:xfrm>
           <a:prstGeom prst="rect">
             <a:avLst/>
@@ -9666,7 +10498,7 @@
                 </a:solidFill>
                 <a:latin typeface="Calibri"/>
               </a:rPr>
-              <a:t>Market &amp; Proposition</a:t>
+              <a:t>Idea &amp; Discovery</a:t>
             </a:r>
           </a:p>
         </p:txBody>
@@ -9679,8 +10511,8 @@
         </p:nvSpPr>
         <p:spPr>
           <a:xfrm>
-            <a:off x="5166360" y="2770631"/>
-            <a:ext cx="5882335" cy="841248"/>
+            <a:off x="5166360" y="2578608"/>
+            <a:ext cx="5882335" cy="694944"/>
           </a:xfrm>
           <a:prstGeom prst="rect">
             <a:avLst/>
@@ -9701,7 +10533,7 @@
                 </a:solidFill>
                 <a:latin typeface="Calibri"/>
               </a:rPr>
-              <a:t>A market map, TAM/SAM/SOM, a proposition and USP, a brand, a hand-out pitch deck</a:t>
+              <a:t>The idea developed in a deep morning conversation, booked interviews held and synthesised</a:t>
             </a:r>
           </a:p>
         </p:txBody>
@@ -9714,8 +10546,8 @@
         </p:nvSpPr>
         <p:spPr>
           <a:xfrm>
-            <a:off x="1143000" y="3666743"/>
-            <a:ext cx="10362895" cy="841248"/>
+            <a:off x="1143000" y="3328416"/>
+            <a:ext cx="10362895" cy="694944"/>
           </a:xfrm>
           <a:prstGeom prst="rect">
             <a:avLst/>
@@ -9760,8 +10592,8 @@
         </p:nvSpPr>
         <p:spPr>
           <a:xfrm>
-            <a:off x="1143000" y="3666743"/>
-            <a:ext cx="1051560" cy="841248"/>
+            <a:off x="1143000" y="3328416"/>
+            <a:ext cx="1051560" cy="694944"/>
           </a:xfrm>
           <a:prstGeom prst="rect">
             <a:avLst/>
@@ -9804,8 +10636,8 @@
         </p:nvSpPr>
         <p:spPr>
           <a:xfrm>
-            <a:off x="1143000" y="3666743"/>
-            <a:ext cx="1051560" cy="841248"/>
+            <a:off x="1143000" y="3328416"/>
+            <a:ext cx="1051560" cy="694944"/>
           </a:xfrm>
           <a:prstGeom prst="rect">
             <a:avLst/>
@@ -9826,7 +10658,7 @@
                 </a:solidFill>
                 <a:latin typeface="Calibri"/>
               </a:rPr>
-              <a:t>Wed</a:t>
+              <a:t>Tue</a:t>
             </a:r>
           </a:p>
         </p:txBody>
@@ -9839,8 +10671,8 @@
         </p:nvSpPr>
         <p:spPr>
           <a:xfrm>
-            <a:off x="2377440" y="3666743"/>
-            <a:ext cx="2651760" cy="841248"/>
+            <a:off x="2377440" y="3328416"/>
+            <a:ext cx="2651760" cy="694944"/>
           </a:xfrm>
           <a:prstGeom prst="rect">
             <a:avLst/>
@@ -9861,7 +10693,7 @@
                 </a:solidFill>
                 <a:latin typeface="Calibri"/>
               </a:rPr>
-              <a:t>Product &amp; Build</a:t>
+              <a:t>Market &amp; Proposition</a:t>
             </a:r>
           </a:p>
         </p:txBody>
@@ -9874,8 +10706,8 @@
         </p:nvSpPr>
         <p:spPr>
           <a:xfrm>
-            <a:off x="5166360" y="3666743"/>
-            <a:ext cx="5882335" cy="841248"/>
+            <a:off x="5166360" y="3328416"/>
+            <a:ext cx="5882335" cy="694944"/>
           </a:xfrm>
           <a:prstGeom prst="rect">
             <a:avLst/>
@@ -9896,7 +10728,7 @@
                 </a:solidFill>
                 <a:latin typeface="Calibri"/>
               </a:rPr>
-              <a:t>A working MVP live for a real prospect to act on, tracked in GitHub</a:t>
+              <a:t>A market map, TAM/SAM/SOM, a proposition and USP, a brand, a hand-out pitch deck</a:t>
             </a:r>
           </a:p>
         </p:txBody>
@@ -9909,8 +10741,8 @@
         </p:nvSpPr>
         <p:spPr>
           <a:xfrm>
-            <a:off x="1143000" y="4562855"/>
-            <a:ext cx="10362895" cy="841248"/>
+            <a:off x="1143000" y="4078224"/>
+            <a:ext cx="10362895" cy="694944"/>
           </a:xfrm>
           <a:prstGeom prst="rect">
             <a:avLst/>
@@ -9955,8 +10787,8 @@
         </p:nvSpPr>
         <p:spPr>
           <a:xfrm>
-            <a:off x="1143000" y="4562855"/>
-            <a:ext cx="1051560" cy="841248"/>
+            <a:off x="1143000" y="4078224"/>
+            <a:ext cx="1051560" cy="694944"/>
           </a:xfrm>
           <a:prstGeom prst="rect">
             <a:avLst/>
@@ -9999,8 +10831,8 @@
         </p:nvSpPr>
         <p:spPr>
           <a:xfrm>
-            <a:off x="1143000" y="4562855"/>
-            <a:ext cx="1051560" cy="841248"/>
+            <a:off x="1143000" y="4078224"/>
+            <a:ext cx="1051560" cy="694944"/>
           </a:xfrm>
           <a:prstGeom prst="rect">
             <a:avLst/>
@@ -10021,7 +10853,7 @@
                 </a:solidFill>
                 <a:latin typeface="Calibri"/>
               </a:rPr>
-              <a:t>Thu</a:t>
+              <a:t>Wed</a:t>
             </a:r>
           </a:p>
         </p:txBody>
@@ -10034,8 +10866,8 @@
         </p:nvSpPr>
         <p:spPr>
           <a:xfrm>
-            <a:off x="2377440" y="4562855"/>
-            <a:ext cx="2651760" cy="841248"/>
+            <a:off x="2377440" y="4078224"/>
+            <a:ext cx="2651760" cy="694944"/>
           </a:xfrm>
           <a:prstGeom prst="rect">
             <a:avLst/>
@@ -10056,7 +10888,7 @@
                 </a:solidFill>
                 <a:latin typeface="Calibri"/>
               </a:rPr>
-              <a:t>Test &amp; Go-to-Market</a:t>
+              <a:t>Product &amp; Build</a:t>
             </a:r>
           </a:p>
         </p:txBody>
@@ -10069,8 +10901,8 @@
         </p:nvSpPr>
         <p:spPr>
           <a:xfrm>
-            <a:off x="5166360" y="4562855"/>
-            <a:ext cx="5882335" cy="841248"/>
+            <a:off x="5166360" y="4078224"/>
+            <a:ext cx="5882335" cy="694944"/>
           </a:xfrm>
           <a:prstGeom prst="rect">
             <a:avLst/>
@@ -10091,7 +10923,7 @@
                 </a:solidFill>
                 <a:latin typeface="Calibri"/>
               </a:rPr>
-              <a:t>5 usability tests, a sales deck, client processes, a funnel, a booked Friday meeting</a:t>
+              <a:t>A working MVP live for a real prospect to act on, tracked in GitHub</a:t>
             </a:r>
           </a:p>
         </p:txBody>
@@ -10104,8 +10936,8 @@
         </p:nvSpPr>
         <p:spPr>
           <a:xfrm>
-            <a:off x="1143000" y="5458967"/>
-            <a:ext cx="10362895" cy="841248"/>
+            <a:off x="1143000" y="4828032"/>
+            <a:ext cx="10362895" cy="694944"/>
           </a:xfrm>
           <a:prstGeom prst="rect">
             <a:avLst/>
@@ -10150,8 +10982,8 @@
         </p:nvSpPr>
         <p:spPr>
           <a:xfrm>
-            <a:off x="1143000" y="5458967"/>
-            <a:ext cx="1051560" cy="841248"/>
+            <a:off x="1143000" y="4828032"/>
+            <a:ext cx="1051560" cy="694944"/>
           </a:xfrm>
           <a:prstGeom prst="rect">
             <a:avLst/>
@@ -10194,8 +11026,8 @@
         </p:nvSpPr>
         <p:spPr>
           <a:xfrm>
-            <a:off x="1143000" y="5458967"/>
-            <a:ext cx="1051560" cy="841248"/>
+            <a:off x="1143000" y="4828032"/>
+            <a:ext cx="1051560" cy="694944"/>
           </a:xfrm>
           <a:prstGeom prst="rect">
             <a:avLst/>
@@ -10216,7 +11048,7 @@
                 </a:solidFill>
                 <a:latin typeface="Calibri"/>
               </a:rPr>
-              <a:t>Fri</a:t>
+              <a:t>Thu</a:t>
             </a:r>
           </a:p>
         </p:txBody>
@@ -10229,8 +11061,8 @@
         </p:nvSpPr>
         <p:spPr>
           <a:xfrm>
-            <a:off x="2377440" y="5458967"/>
-            <a:ext cx="2651760" cy="841248"/>
+            <a:off x="2377440" y="4828032"/>
+            <a:ext cx="2651760" cy="694944"/>
           </a:xfrm>
           <a:prstGeom prst="rect">
             <a:avLst/>
@@ -10251,7 +11083,7 @@
                 </a:solidFill>
                 <a:latin typeface="Calibri"/>
               </a:rPr>
-              <a:t>Tweaks &amp; First Sale</a:t>
+              <a:t>Test &amp; Go-to-Market</a:t>
             </a:r>
           </a:p>
         </p:txBody>
@@ -10264,8 +11096,8 @@
         </p:nvSpPr>
         <p:spPr>
           <a:xfrm>
-            <a:off x="5166360" y="5458967"/>
-            <a:ext cx="5882335" cy="841248"/>
+            <a:off x="5166360" y="4828032"/>
+            <a:ext cx="5882335" cy="694944"/>
           </a:xfrm>
           <a:prstGeom prst="rect">
             <a:avLst/>
@@ -10286,6 +11118,201 @@
                 </a:solidFill>
                 <a:latin typeface="Calibri"/>
               </a:rPr>
+              <a:t>5 usability tests, a sales deck, client processes, a funnel, a booked Friday meeting</a:t>
+            </a:r>
+          </a:p>
+        </p:txBody>
+      </p:sp>
+      <p:sp>
+        <p:nvSpPr>
+          <p:cNvPr id="32" name="Rectangle 31"/>
+          <p:cNvSpPr/>
+          <p:nvPr/>
+        </p:nvSpPr>
+        <p:spPr>
+          <a:xfrm>
+            <a:off x="1143000" y="5577840"/>
+            <a:ext cx="10362895" cy="694944"/>
+          </a:xfrm>
+          <a:prstGeom prst="rect">
+            <a:avLst/>
+          </a:prstGeom>
+          <a:solidFill>
+            <a:srgbClr val="FFFFFF"/>
+          </a:solidFill>
+          <a:ln w="12700">
+            <a:solidFill>
+              <a:srgbClr val="DDE3E8"/>
+            </a:solidFill>
+          </a:ln>
+          <a:effectLst/>
+        </p:spPr>
+        <p:style>
+          <a:lnRef idx="1">
+            <a:schemeClr val="accent1"/>
+          </a:lnRef>
+          <a:fillRef idx="3">
+            <a:schemeClr val="accent1"/>
+          </a:fillRef>
+          <a:effectRef idx="2">
+            <a:schemeClr val="accent1"/>
+          </a:effectRef>
+          <a:fontRef idx="minor">
+            <a:schemeClr val="lt1"/>
+          </a:fontRef>
+        </p:style>
+        <p:txBody>
+          <a:bodyPr rtlCol="0" anchor="ctr"/>
+          <a:lstStyle/>
+          <a:p>
+            <a:pPr algn="ctr"/>
+          </a:p>
+        </p:txBody>
+      </p:sp>
+      <p:sp>
+        <p:nvSpPr>
+          <p:cNvPr id="33" name="Rectangle 32"/>
+          <p:cNvSpPr/>
+          <p:nvPr/>
+        </p:nvSpPr>
+        <p:spPr>
+          <a:xfrm>
+            <a:off x="1143000" y="5577840"/>
+            <a:ext cx="1051560" cy="694944"/>
+          </a:xfrm>
+          <a:prstGeom prst="rect">
+            <a:avLst/>
+          </a:prstGeom>
+          <a:solidFill>
+            <a:srgbClr val="14202B"/>
+          </a:solidFill>
+          <a:ln>
+            <a:noFill/>
+          </a:ln>
+          <a:effectLst/>
+        </p:spPr>
+        <p:style>
+          <a:lnRef idx="1">
+            <a:schemeClr val="accent1"/>
+          </a:lnRef>
+          <a:fillRef idx="3">
+            <a:schemeClr val="accent1"/>
+          </a:fillRef>
+          <a:effectRef idx="2">
+            <a:schemeClr val="accent1"/>
+          </a:effectRef>
+          <a:fontRef idx="minor">
+            <a:schemeClr val="lt1"/>
+          </a:fontRef>
+        </p:style>
+        <p:txBody>
+          <a:bodyPr rtlCol="0" anchor="ctr"/>
+          <a:lstStyle/>
+          <a:p>
+            <a:pPr algn="ctr"/>
+          </a:p>
+        </p:txBody>
+      </p:sp>
+      <p:sp>
+        <p:nvSpPr>
+          <p:cNvPr id="34" name="TextBox 33"/>
+          <p:cNvSpPr txBox="1"/>
+          <p:nvPr/>
+        </p:nvSpPr>
+        <p:spPr>
+          <a:xfrm>
+            <a:off x="1143000" y="5577840"/>
+            <a:ext cx="1051560" cy="694944"/>
+          </a:xfrm>
+          <a:prstGeom prst="rect">
+            <a:avLst/>
+          </a:prstGeom>
+          <a:noFill/>
+        </p:spPr>
+        <p:txBody>
+          <a:bodyPr wrap="square" anchor="ctr" lIns="0" rIns="0" tIns="0" bIns="0">
+            <a:spAutoFit/>
+          </a:bodyPr>
+          <a:lstStyle/>
+          <a:p>
+            <a:pPr algn="ctr"/>
+            <a:r>
+              <a:rPr sz="1800" b="1">
+                <a:solidFill>
+                  <a:srgbClr val="FFFFFF"/>
+                </a:solidFill>
+                <a:latin typeface="Calibri"/>
+              </a:rPr>
+              <a:t>Fri</a:t>
+            </a:r>
+          </a:p>
+        </p:txBody>
+      </p:sp>
+      <p:sp>
+        <p:nvSpPr>
+          <p:cNvPr id="35" name="TextBox 34"/>
+          <p:cNvSpPr txBox="1"/>
+          <p:nvPr/>
+        </p:nvSpPr>
+        <p:spPr>
+          <a:xfrm>
+            <a:off x="2377440" y="5577840"/>
+            <a:ext cx="2651760" cy="694944"/>
+          </a:xfrm>
+          <a:prstGeom prst="rect">
+            <a:avLst/>
+          </a:prstGeom>
+          <a:noFill/>
+        </p:spPr>
+        <p:txBody>
+          <a:bodyPr wrap="square" anchor="ctr" lIns="0" rIns="0" tIns="0" bIns="0">
+            <a:spAutoFit/>
+          </a:bodyPr>
+          <a:lstStyle/>
+          <a:p>
+            <a:pPr algn="l"/>
+            <a:r>
+              <a:rPr sz="1500" b="1">
+                <a:solidFill>
+                  <a:srgbClr val="14202B"/>
+                </a:solidFill>
+                <a:latin typeface="Calibri"/>
+              </a:rPr>
+              <a:t>Tweaks &amp; First Sale</a:t>
+            </a:r>
+          </a:p>
+        </p:txBody>
+      </p:sp>
+      <p:sp>
+        <p:nvSpPr>
+          <p:cNvPr id="36" name="TextBox 35"/>
+          <p:cNvSpPr txBox="1"/>
+          <p:nvPr/>
+        </p:nvSpPr>
+        <p:spPr>
+          <a:xfrm>
+            <a:off x="5166360" y="5577840"/>
+            <a:ext cx="5882335" cy="694944"/>
+          </a:xfrm>
+          <a:prstGeom prst="rect">
+            <a:avLst/>
+          </a:prstGeom>
+          <a:noFill/>
+        </p:spPr>
+        <p:txBody>
+          <a:bodyPr wrap="square" anchor="ctr" lIns="0" rIns="0" tIns="0" bIns="0">
+            <a:spAutoFit/>
+          </a:bodyPr>
+          <a:lstStyle/>
+          <a:p>
+            <a:pPr algn="l"/>
+            <a:r>
+              <a:rPr sz="1250" b="0">
+                <a:solidFill>
+                  <a:srgbClr val="5A6B7B"/>
+                </a:solidFill>
+                <a:latin typeface="Calibri"/>
+              </a:rPr>
               <a:t>Final fixes, pricing, and one committed yes with a date and an amount</a:t>
             </a:r>
           </a:p>
@@ -10293,7 +11320,7 @@
       </p:sp>
       <p:sp>
         <p:nvSpPr>
-          <p:cNvPr id="32" name="TextBox 31"/>
+          <p:cNvPr id="37" name="TextBox 36"/>
           <p:cNvSpPr txBox="1"/>
           <p:nvPr/>
         </p:nvSpPr>
@@ -10328,7 +11355,7 @@
       </p:sp>
       <p:sp>
         <p:nvSpPr>
-          <p:cNvPr id="33" name="TextBox 32"/>
+          <p:cNvPr id="38" name="TextBox 37"/>
           <p:cNvSpPr txBox="1"/>
           <p:nvPr/>
         </p:nvSpPr>
@@ -10828,7 +11855,7 @@
                 </a:solidFill>
                 <a:latin typeface="Consolas"/>
               </a:rPr>
-              <a:t>/spark-bootcamp:doctor    # checks your machine, lays out your project, lists the pre-work</a:t>
+              <a:t>/spark-bootcamp:doctor    # 2 to 4 weeks early: machine check, project layout, the pre-work list</a:t>
             </a:r>
           </a:p>
           <a:p>
@@ -10844,7 +11871,7 @@
                 </a:solidFill>
                 <a:latin typeface="Consolas"/>
               </a:rPr>
-              <a:t>/spark-bootcamp:start     # captures your idea, path and numeric target for the week</a:t>
+              <a:t>/spark-bootcamp:start     # your idea, path, bootcamp Monday and numeric target</a:t>
             </a:r>
           </a:p>
         </p:txBody>
@@ -11416,7 +12443,7 @@
                 </a:solidFill>
                 <a:latin typeface="Calibri"/>
               </a:rPr>
-              <a:t>The five days</a:t>
+              <a:t>Pre-work + the five days</a:t>
             </a:r>
           </a:p>
           <a:p>
@@ -11432,7 +12459,7 @@
                 </a:solidFill>
                 <a:latin typeface="Calibri"/>
               </a:rPr>
-              <a:t>Day 1 Discovery  ·  Day 2 Market &amp; Proposition  ·  Day 3 Product &amp; Build  ·  Day 4 Test &amp; GTM  ·  Day 5 First Sale</a:t>
+              <a:t>Pre-work books the interviews  ·  Day 1 Idea &amp; Discovery  ·  Day 2 Market  ·  Day 3 Build  ·  Day 4 Test &amp; GTM  ·  Day 5 First Sale</a:t>
             </a:r>
           </a:p>
           <a:p>
@@ -11444,7 +12471,7 @@
                 </a:solidFill>
                 <a:latin typeface="Calibri"/>
               </a:rPr>
-              <a:t>42 skills that do the daily work, each producing one concrete artefact</a:t>
+              <a:t>46 skills that do the phase work, each producing one concrete artefact</a:t>
             </a:r>
           </a:p>
         </p:txBody>
@@ -13500,7 +14527,7 @@
                 </a:solidFill>
                 <a:latin typeface="Calibri"/>
               </a:rPr>
-              <a:t>DAY 1  ·  MONDAY</a:t>
+              <a:t>PRE-WORK  ·  2 TO 4 WEEKS OUT</a:t>
             </a:r>
           </a:p>
         </p:txBody>
@@ -13535,7 +14562,7 @@
                 </a:solidFill>
                 <a:latin typeface="Calibri"/>
               </a:rPr>
-              <a:t>Discovery</a:t>
+              <a:t>Book the interviews</a:t>
             </a:r>
           </a:p>
         </p:txBody>
@@ -13614,7 +14641,7 @@
                 </a:solidFill>
                 <a:latin typeface="Calibri"/>
               </a:rPr>
-              <a:t>Outcome: 8 to 12 interviews synthesised, one validated problem, one named segment.</a:t>
+              <a:t>Outcome: 8 to 12 interviews in the Monday diary before the week begins.</a:t>
             </a:r>
           </a:p>
         </p:txBody>
@@ -13629,7 +14656,598 @@
         </p:nvGraphicFramePr>
         <p:xfrm>
           <a:off x="1143000" y="1993392"/>
-          <a:ext cx="10362895" cy="2231136"/>
+          <a:ext cx="10362895" cy="1609344"/>
+        </p:xfrm>
+        <a:graphic>
+          <a:graphicData uri="http://schemas.openxmlformats.org/drawingml/2006/table">
+            <a:tbl>
+              <a:tblPr firstRow="0" bandRow="0">
+                <a:tableStyleId>{5C22544A-7EE6-4342-B048-85BDC9FD1C3A}</a:tableStyleId>
+              </a:tblPr>
+              <a:tblGrid>
+                <a:gridCol w="2788920"/>
+                <a:gridCol w="7573975"/>
+              </a:tblGrid>
+              <a:tr h="365760">
+                <a:tc>
+                  <a:txBody>
+                    <a:bodyPr wrap="square"/>
+                    <a:lstStyle/>
+                    <a:p>
+                      <a:pPr algn="l"/>
+                      <a:r>
+                        <a:rPr sz="1200" b="1">
+                          <a:solidFill>
+                            <a:srgbClr val="FFFFFF"/>
+                          </a:solidFill>
+                          <a:latin typeface="Calibri"/>
+                        </a:rPr>
+                        <a:t>Skill</a:t>
+                      </a:r>
+                    </a:p>
+                  </a:txBody>
+                  <a:tcPr marL="88900" marR="88900" marT="38100" marB="38100" anchor="ctr">
+                    <a:solidFill>
+                      <a:srgbClr val="14202B"/>
+                    </a:solidFill>
+                  </a:tcPr>
+                </a:tc>
+                <a:tc>
+                  <a:txBody>
+                    <a:bodyPr wrap="square"/>
+                    <a:lstStyle/>
+                    <a:p>
+                      <a:pPr algn="l"/>
+                      <a:r>
+                        <a:rPr sz="1200" b="1">
+                          <a:solidFill>
+                            <a:srgbClr val="FFFFFF"/>
+                          </a:solidFill>
+                          <a:latin typeface="Calibri"/>
+                        </a:rPr>
+                        <a:t>What it does</a:t>
+                      </a:r>
+                    </a:p>
+                  </a:txBody>
+                  <a:tcPr marL="88900" marR="88900" marT="38100" marB="38100" anchor="ctr">
+                    <a:solidFill>
+                      <a:srgbClr val="14202B"/>
+                    </a:solidFill>
+                  </a:tcPr>
+                </a:tc>
+              </a:tr>
+              <a:tr h="310896">
+                <a:tc>
+                  <a:txBody>
+                    <a:bodyPr wrap="square"/>
+                    <a:lstStyle/>
+                    <a:p>
+                      <a:pPr algn="l"/>
+                      <a:r>
+                        <a:rPr sz="1300" b="1">
+                          <a:solidFill>
+                            <a:srgbClr val="14202B"/>
+                          </a:solidFill>
+                          <a:latin typeface="Consolas"/>
+                        </a:rPr>
+                        <a:t>p0-interview-triage</a:t>
+                      </a:r>
+                    </a:p>
+                  </a:txBody>
+                  <a:tcPr marL="88900" marR="88900" marT="38100" marB="38100" anchor="ctr">
+                    <a:solidFill>
+                      <a:srgbClr val="F7F9FB"/>
+                    </a:solidFill>
+                  </a:tcPr>
+                </a:tc>
+                <a:tc>
+                  <a:txBody>
+                    <a:bodyPr wrap="square"/>
+                    <a:lstStyle/>
+                    <a:p>
+                      <a:pPr algn="l"/>
+                      <a:r>
+                        <a:rPr sz="1300" b="0">
+                          <a:solidFill>
+                            <a:srgbClr val="14202B"/>
+                          </a:solidFill>
+                          <a:latin typeface="Calibri"/>
+                        </a:rPr>
+                        <a:t>A conversation that decides who to interview: one segment, the role, 8 to 12</a:t>
+                      </a:r>
+                    </a:p>
+                  </a:txBody>
+                  <a:tcPr marL="88900" marR="88900" marT="38100" marB="38100" anchor="ctr">
+                    <a:solidFill>
+                      <a:srgbClr val="F7F9FB"/>
+                    </a:solidFill>
+                  </a:tcPr>
+                </a:tc>
+              </a:tr>
+              <a:tr h="310896">
+                <a:tc>
+                  <a:txBody>
+                    <a:bodyPr wrap="square"/>
+                    <a:lstStyle/>
+                    <a:p>
+                      <a:pPr algn="l"/>
+                      <a:r>
+                        <a:rPr sz="1300" b="1">
+                          <a:solidFill>
+                            <a:srgbClr val="14202B"/>
+                          </a:solidFill>
+                          <a:latin typeface="Consolas"/>
+                        </a:rPr>
+                        <a:t>p0-invite-list</a:t>
+                      </a:r>
+                    </a:p>
+                  </a:txBody>
+                  <a:tcPr marL="88900" marR="88900" marT="38100" marB="38100" anchor="ctr">
+                    <a:solidFill>
+                      <a:srgbClr val="FFFFFF"/>
+                    </a:solidFill>
+                  </a:tcPr>
+                </a:tc>
+                <a:tc>
+                  <a:txBody>
+                    <a:bodyPr wrap="square"/>
+                    <a:lstStyle/>
+                    <a:p>
+                      <a:pPr algn="l"/>
+                      <a:r>
+                        <a:rPr sz="1300" b="0">
+                          <a:solidFill>
+                            <a:srgbClr val="14202B"/>
+                          </a:solidFill>
+                          <a:latin typeface="Calibri"/>
+                        </a:rPr>
+                        <a:t>20+ named, reachable people, each with a channel and warmth rating</a:t>
+                      </a:r>
+                    </a:p>
+                  </a:txBody>
+                  <a:tcPr marL="88900" marR="88900" marT="38100" marB="38100" anchor="ctr">
+                    <a:solidFill>
+                      <a:srgbClr val="FFFFFF"/>
+                    </a:solidFill>
+                  </a:tcPr>
+                </a:tc>
+              </a:tr>
+              <a:tr h="310896">
+                <a:tc>
+                  <a:txBody>
+                    <a:bodyPr wrap="square"/>
+                    <a:lstStyle/>
+                    <a:p>
+                      <a:pPr algn="l"/>
+                      <a:r>
+                        <a:rPr sz="1300" b="1">
+                          <a:solidFill>
+                            <a:srgbClr val="14202B"/>
+                          </a:solidFill>
+                          <a:latin typeface="Consolas"/>
+                        </a:rPr>
+                        <a:t>p0-invitations</a:t>
+                      </a:r>
+                    </a:p>
+                  </a:txBody>
+                  <a:tcPr marL="88900" marR="88900" marT="38100" marB="38100" anchor="ctr">
+                    <a:solidFill>
+                      <a:srgbClr val="F7F9FB"/>
+                    </a:solidFill>
+                  </a:tcPr>
+                </a:tc>
+                <a:tc>
+                  <a:txBody>
+                    <a:bodyPr wrap="square"/>
+                    <a:lstStyle/>
+                    <a:p>
+                      <a:pPr algn="l"/>
+                      <a:r>
+                        <a:rPr sz="1300" b="0">
+                          <a:solidFill>
+                            <a:srgbClr val="14202B"/>
+                          </a:solidFill>
+                          <a:latin typeface="Calibri"/>
+                        </a:rPr>
+                        <a:t>Email, WhatsApp or LinkedIn invitations to a real slot on the bootcamp Monday</a:t>
+                      </a:r>
+                    </a:p>
+                  </a:txBody>
+                  <a:tcPr marL="88900" marR="88900" marT="38100" marB="38100" anchor="ctr">
+                    <a:solidFill>
+                      <a:srgbClr val="F7F9FB"/>
+                    </a:solidFill>
+                  </a:tcPr>
+                </a:tc>
+              </a:tr>
+              <a:tr h="310896">
+                <a:tc>
+                  <a:txBody>
+                    <a:bodyPr wrap="square"/>
+                    <a:lstStyle/>
+                    <a:p>
+                      <a:pPr algn="l"/>
+                      <a:r>
+                        <a:rPr sz="1300" b="1">
+                          <a:solidFill>
+                            <a:srgbClr val="14202B"/>
+                          </a:solidFill>
+                          <a:latin typeface="Consolas"/>
+                        </a:rPr>
+                        <a:t>p0-schedule</a:t>
+                      </a:r>
+                    </a:p>
+                  </a:txBody>
+                  <a:tcPr marL="88900" marR="88900" marT="38100" marB="38100" anchor="ctr">
+                    <a:solidFill>
+                      <a:srgbClr val="FFFFFF"/>
+                    </a:solidFill>
+                  </a:tcPr>
+                </a:tc>
+                <a:tc>
+                  <a:txBody>
+                    <a:bodyPr wrap="square"/>
+                    <a:lstStyle/>
+                    <a:p>
+                      <a:pPr algn="l"/>
+                      <a:r>
+                        <a:rPr sz="1300" b="0">
+                          <a:solidFill>
+                            <a:srgbClr val="14202B"/>
+                          </a:solidFill>
+                          <a:latin typeface="Calibri"/>
+                        </a:rPr>
+                        <a:t>Tracks replies, chases silence, closes pre-work at 8+ booked</a:t>
+                      </a:r>
+                    </a:p>
+                  </a:txBody>
+                  <a:tcPr marL="88900" marR="88900" marT="38100" marB="38100" anchor="ctr">
+                    <a:solidFill>
+                      <a:srgbClr val="FFFFFF"/>
+                    </a:solidFill>
+                  </a:tcPr>
+                </a:tc>
+              </a:tr>
+            </a:tbl>
+          </a:graphicData>
+        </a:graphic>
+      </p:graphicFrame>
+      <p:sp>
+        <p:nvSpPr>
+          <p:cNvPr id="9" name="TextBox 8"/>
+          <p:cNvSpPr txBox="1"/>
+          <p:nvPr/>
+        </p:nvSpPr>
+        <p:spPr>
+          <a:xfrm>
+            <a:off x="685800" y="6400800"/>
+            <a:ext cx="10820095" cy="274320"/>
+          </a:xfrm>
+          <a:prstGeom prst="rect">
+            <a:avLst/>
+          </a:prstGeom>
+          <a:noFill/>
+        </p:spPr>
+        <p:txBody>
+          <a:bodyPr wrap="square" anchor="t" lIns="0" rIns="0" tIns="0" bIns="0">
+            <a:spAutoFit/>
+          </a:bodyPr>
+          <a:lstStyle/>
+          <a:p>
+            <a:pPr algn="l"/>
+            <a:r>
+              <a:rPr sz="900" b="0">
+                <a:solidFill>
+                  <a:srgbClr val="5A6B7B"/>
+                </a:solidFill>
+                <a:latin typeface="Calibri"/>
+              </a:rPr>
+              <a:t>Spark Bootcamp  ·  a Claude Code plugin by Spark AI Agency</a:t>
+            </a:r>
+          </a:p>
+        </p:txBody>
+      </p:sp>
+      <p:sp>
+        <p:nvSpPr>
+          <p:cNvPr id="10" name="TextBox 9"/>
+          <p:cNvSpPr txBox="1"/>
+          <p:nvPr/>
+        </p:nvSpPr>
+        <p:spPr>
+          <a:xfrm>
+            <a:off x="10957255" y="6400800"/>
+            <a:ext cx="548640" cy="274320"/>
+          </a:xfrm>
+          <a:prstGeom prst="rect">
+            <a:avLst/>
+          </a:prstGeom>
+          <a:noFill/>
+        </p:spPr>
+        <p:txBody>
+          <a:bodyPr wrap="square" anchor="t" lIns="0" rIns="0" tIns="0" bIns="0">
+            <a:spAutoFit/>
+          </a:bodyPr>
+          <a:lstStyle/>
+          <a:p>
+            <a:pPr algn="r"/>
+            <a:r>
+              <a:rPr sz="900" b="0">
+                <a:solidFill>
+                  <a:srgbClr val="5A6B7B"/>
+                </a:solidFill>
+                <a:latin typeface="Calibri"/>
+              </a:rPr>
+              <a:t>8</a:t>
+            </a:r>
+          </a:p>
+        </p:txBody>
+      </p:sp>
+    </p:spTree>
+  </p:cSld>
+  <p:clrMapOvr>
+    <a:masterClrMapping/>
+  </p:clrMapOvr>
+</p:sld>
+</file>
+
+<file path=ppt/slides/slide9.xml><?xml version="1.0" encoding="utf-8"?>
+<p:sld xmlns:a="http://schemas.openxmlformats.org/drawingml/2006/main" xmlns:p="http://schemas.openxmlformats.org/presentationml/2006/main" xmlns:r="http://schemas.openxmlformats.org/officeDocument/2006/relationships">
+  <p:cSld>
+    <p:spTree>
+      <p:nvGrpSpPr>
+        <p:cNvPr id="1" name=""/>
+        <p:cNvGrpSpPr/>
+        <p:nvPr/>
+      </p:nvGrpSpPr>
+      <p:grpSpPr/>
+      <p:sp>
+        <p:nvSpPr>
+          <p:cNvPr id="2" name="Rectangle 1"/>
+          <p:cNvSpPr/>
+          <p:nvPr/>
+        </p:nvSpPr>
+        <p:spPr>
+          <a:xfrm>
+            <a:off x="0" y="0"/>
+            <a:ext cx="12191695" cy="6858000"/>
+          </a:xfrm>
+          <a:prstGeom prst="rect">
+            <a:avLst/>
+          </a:prstGeom>
+          <a:solidFill>
+            <a:srgbClr val="FFFFFF"/>
+          </a:solidFill>
+          <a:ln>
+            <a:noFill/>
+          </a:ln>
+          <a:effectLst/>
+        </p:spPr>
+        <p:style>
+          <a:lnRef idx="1">
+            <a:schemeClr val="accent1"/>
+          </a:lnRef>
+          <a:fillRef idx="3">
+            <a:schemeClr val="accent1"/>
+          </a:fillRef>
+          <a:effectRef idx="2">
+            <a:schemeClr val="accent1"/>
+          </a:effectRef>
+          <a:fontRef idx="minor">
+            <a:schemeClr val="lt1"/>
+          </a:fontRef>
+        </p:style>
+        <p:txBody>
+          <a:bodyPr rtlCol="0" anchor="ctr"/>
+          <a:lstStyle/>
+          <a:p>
+            <a:pPr algn="ctr"/>
+          </a:p>
+        </p:txBody>
+      </p:sp>
+      <p:sp>
+        <p:nvSpPr>
+          <p:cNvPr id="3" name="Rectangle 2"/>
+          <p:cNvSpPr/>
+          <p:nvPr/>
+        </p:nvSpPr>
+        <p:spPr>
+          <a:xfrm>
+            <a:off x="685800" y="566928"/>
+            <a:ext cx="310896" cy="310896"/>
+          </a:xfrm>
+          <a:prstGeom prst="rect">
+            <a:avLst/>
+          </a:prstGeom>
+          <a:solidFill>
+            <a:srgbClr val="F58A23"/>
+          </a:solidFill>
+          <a:ln>
+            <a:noFill/>
+          </a:ln>
+          <a:effectLst/>
+        </p:spPr>
+        <p:style>
+          <a:lnRef idx="1">
+            <a:schemeClr val="accent1"/>
+          </a:lnRef>
+          <a:fillRef idx="3">
+            <a:schemeClr val="accent1"/>
+          </a:fillRef>
+          <a:effectRef idx="2">
+            <a:schemeClr val="accent1"/>
+          </a:effectRef>
+          <a:fontRef idx="minor">
+            <a:schemeClr val="lt1"/>
+          </a:fontRef>
+        </p:style>
+        <p:txBody>
+          <a:bodyPr rtlCol="0" anchor="ctr"/>
+          <a:lstStyle/>
+          <a:p>
+            <a:pPr algn="ctr"/>
+          </a:p>
+        </p:txBody>
+      </p:sp>
+      <p:sp>
+        <p:nvSpPr>
+          <p:cNvPr id="4" name="TextBox 3"/>
+          <p:cNvSpPr txBox="1"/>
+          <p:nvPr/>
+        </p:nvSpPr>
+        <p:spPr>
+          <a:xfrm>
+            <a:off x="1143000" y="548640"/>
+            <a:ext cx="10362895" cy="274320"/>
+          </a:xfrm>
+          <a:prstGeom prst="rect">
+            <a:avLst/>
+          </a:prstGeom>
+          <a:noFill/>
+        </p:spPr>
+        <p:txBody>
+          <a:bodyPr wrap="square" anchor="t" lIns="0" rIns="0" tIns="0" bIns="0">
+            <a:spAutoFit/>
+          </a:bodyPr>
+          <a:lstStyle/>
+          <a:p>
+            <a:pPr algn="l"/>
+            <a:r>
+              <a:rPr sz="1200" b="1">
+                <a:solidFill>
+                  <a:srgbClr val="F58A23"/>
+                </a:solidFill>
+                <a:latin typeface="Calibri"/>
+              </a:rPr>
+              <a:t>DAY 1  ·  MONDAY</a:t>
+            </a:r>
+          </a:p>
+        </p:txBody>
+      </p:sp>
+      <p:sp>
+        <p:nvSpPr>
+          <p:cNvPr id="5" name="TextBox 4"/>
+          <p:cNvSpPr txBox="1"/>
+          <p:nvPr/>
+        </p:nvSpPr>
+        <p:spPr>
+          <a:xfrm>
+            <a:off x="1143000" y="841248"/>
+            <a:ext cx="10362895" cy="640080"/>
+          </a:xfrm>
+          <a:prstGeom prst="rect">
+            <a:avLst/>
+          </a:prstGeom>
+          <a:noFill/>
+        </p:spPr>
+        <p:txBody>
+          <a:bodyPr wrap="square" anchor="t" lIns="0" rIns="0" tIns="0" bIns="0">
+            <a:spAutoFit/>
+          </a:bodyPr>
+          <a:lstStyle/>
+          <a:p>
+            <a:pPr algn="l"/>
+            <a:r>
+              <a:rPr sz="2800" b="1">
+                <a:solidFill>
+                  <a:srgbClr val="14202B"/>
+                </a:solidFill>
+                <a:latin typeface="Calibri"/>
+              </a:rPr>
+              <a:t>Idea &amp; Discovery</a:t>
+            </a:r>
+          </a:p>
+        </p:txBody>
+      </p:sp>
+      <p:sp>
+        <p:nvSpPr>
+          <p:cNvPr id="6" name="Rectangle 5"/>
+          <p:cNvSpPr/>
+          <p:nvPr/>
+        </p:nvSpPr>
+        <p:spPr>
+          <a:xfrm>
+            <a:off x="1143000" y="1481328"/>
+            <a:ext cx="1097280" cy="38100"/>
+          </a:xfrm>
+          <a:prstGeom prst="rect">
+            <a:avLst/>
+          </a:prstGeom>
+          <a:solidFill>
+            <a:srgbClr val="14202B"/>
+          </a:solidFill>
+          <a:ln>
+            <a:noFill/>
+          </a:ln>
+          <a:effectLst/>
+        </p:spPr>
+        <p:style>
+          <a:lnRef idx="1">
+            <a:schemeClr val="accent1"/>
+          </a:lnRef>
+          <a:fillRef idx="3">
+            <a:schemeClr val="accent1"/>
+          </a:fillRef>
+          <a:effectRef idx="2">
+            <a:schemeClr val="accent1"/>
+          </a:effectRef>
+          <a:fontRef idx="minor">
+            <a:schemeClr val="lt1"/>
+          </a:fontRef>
+        </p:style>
+        <p:txBody>
+          <a:bodyPr rtlCol="0" anchor="ctr"/>
+          <a:lstStyle/>
+          <a:p>
+            <a:pPr algn="ctr"/>
+          </a:p>
+        </p:txBody>
+      </p:sp>
+      <p:sp>
+        <p:nvSpPr>
+          <p:cNvPr id="7" name="TextBox 6"/>
+          <p:cNvSpPr txBox="1"/>
+          <p:nvPr/>
+        </p:nvSpPr>
+        <p:spPr>
+          <a:xfrm>
+            <a:off x="1143000" y="1627632"/>
+            <a:ext cx="10362895" cy="274320"/>
+          </a:xfrm>
+          <a:prstGeom prst="rect">
+            <a:avLst/>
+          </a:prstGeom>
+          <a:noFill/>
+        </p:spPr>
+        <p:txBody>
+          <a:bodyPr wrap="square" anchor="t" lIns="0" rIns="0" tIns="0" bIns="0">
+            <a:spAutoFit/>
+          </a:bodyPr>
+          <a:lstStyle/>
+          <a:p>
+            <a:pPr algn="l"/>
+            <a:r>
+              <a:rPr sz="1250" b="1">
+                <a:solidFill>
+                  <a:srgbClr val="F58A23"/>
+                </a:solidFill>
+                <a:latin typeface="Calibri"/>
+              </a:rPr>
+              <a:t>Outcome: the idea developed, booked interviews held and synthesised, one validated problem.</a:t>
+            </a:r>
+          </a:p>
+        </p:txBody>
+      </p:sp>
+      <p:graphicFrame>
+        <p:nvGraphicFramePr>
+          <p:cNvPr id="8" name="Table 7"/>
+          <p:cNvGraphicFramePr>
+            <a:graphicFrameLocks noGrp="1"/>
+          </p:cNvGraphicFramePr>
+          <p:nvPr/>
+        </p:nvGraphicFramePr>
+        <p:xfrm>
+          <a:off x="1143000" y="1993392"/>
+          <a:ext cx="10362895" cy="1609344"/>
         </p:xfrm>
         <a:graphic>
           <a:graphicData uri="http://schemas.openxmlformats.org/drawingml/2006/table">
@@ -13726,7 +15344,7 @@
                           </a:solidFill>
                           <a:latin typeface="Calibri"/>
                         </a:rPr>
-                        <a:t>Sharpen a raw idea into a testable problem and name the riskiest assumption</a:t>
+                        <a:t>A deep partner conversation that develops the idea and names the riskiest assumption</a:t>
                       </a:r>
                     </a:p>
                   </a:txBody>
@@ -13751,7 +15369,7 @@
                           </a:solidFill>
                           <a:latin typeface="Consolas"/>
                         </a:rPr>
-                        <a:t>d1-define-interviewees</a:t>
+                        <a:t>d1-interview-plan</a:t>
                       </a:r>
                     </a:p>
                   </a:txBody>
@@ -13774,103 +15392,7 @@
                           </a:solidFill>
                           <a:latin typeface="Calibri"/>
                         </a:rPr>
-                        <a:t>Decide the segment, the role and how many people to interview</a:t>
-                      </a:r>
-                    </a:p>
-                  </a:txBody>
-                  <a:tcPr marL="88900" marR="88900" marT="38100" marB="38100" anchor="ctr">
-                    <a:solidFill>
-                      <a:srgbClr val="FFFFFF"/>
-                    </a:solidFill>
-                  </a:tcPr>
-                </a:tc>
-              </a:tr>
-              <a:tr h="310896">
-                <a:tc>
-                  <a:txBody>
-                    <a:bodyPr wrap="square"/>
-                    <a:lstStyle/>
-                    <a:p>
-                      <a:pPr algn="l"/>
-                      <a:r>
-                        <a:rPr sz="1300" b="1">
-                          <a:solidFill>
-                            <a:srgbClr val="14202B"/>
-                          </a:solidFill>
-                          <a:latin typeface="Consolas"/>
-                        </a:rPr>
-                        <a:t>d1-build-list</a:t>
-                      </a:r>
-                    </a:p>
-                  </a:txBody>
-                  <a:tcPr marL="88900" marR="88900" marT="38100" marB="38100" anchor="ctr">
-                    <a:solidFill>
-                      <a:srgbClr val="F7F9FB"/>
-                    </a:solidFill>
-                  </a:tcPr>
-                </a:tc>
-                <a:tc>
-                  <a:txBody>
-                    <a:bodyPr wrap="square"/>
-                    <a:lstStyle/>
-                    <a:p>
-                      <a:pPr algn="l"/>
-                      <a:r>
-                        <a:rPr sz="1300" b="0">
-                          <a:solidFill>
-                            <a:srgbClr val="14202B"/>
-                          </a:solidFill>
-                          <a:latin typeface="Calibri"/>
-                        </a:rPr>
-                        <a:t>Turn the target into 20+ named, reachable people</a:t>
-                      </a:r>
-                    </a:p>
-                  </a:txBody>
-                  <a:tcPr marL="88900" marR="88900" marT="38100" marB="38100" anchor="ctr">
-                    <a:solidFill>
-                      <a:srgbClr val="F7F9FB"/>
-                    </a:solidFill>
-                  </a:tcPr>
-                </a:tc>
-              </a:tr>
-              <a:tr h="310896">
-                <a:tc>
-                  <a:txBody>
-                    <a:bodyPr wrap="square"/>
-                    <a:lstStyle/>
-                    <a:p>
-                      <a:pPr algn="l"/>
-                      <a:r>
-                        <a:rPr sz="1300" b="1">
-                          <a:solidFill>
-                            <a:srgbClr val="14202B"/>
-                          </a:solidFill>
-                          <a:latin typeface="Consolas"/>
-                        </a:rPr>
-                        <a:t>d1-write-outreach</a:t>
-                      </a:r>
-                    </a:p>
-                  </a:txBody>
-                  <a:tcPr marL="88900" marR="88900" marT="38100" marB="38100" anchor="ctr">
-                    <a:solidFill>
-                      <a:srgbClr val="FFFFFF"/>
-                    </a:solidFill>
-                  </a:tcPr>
-                </a:tc>
-                <a:tc>
-                  <a:txBody>
-                    <a:bodyPr wrap="square"/>
-                    <a:lstStyle/>
-                    <a:p>
-                      <a:pPr algn="l"/>
-                      <a:r>
-                        <a:rPr sz="1300" b="0">
-                          <a:solidFill>
-                            <a:srgbClr val="14202B"/>
-                          </a:solidFill>
-                          <a:latin typeface="Calibri"/>
-                        </a:rPr>
-                        <a:t>Messages that book interviews by asking for help, not selling</a:t>
+                        <a:t>Turn the booked schedule into a run plan: one focus per conversation</a:t>
                       </a:r>
                     </a:p>
                   </a:txBody>
@@ -13918,7 +15440,7 @@
                           </a:solidFill>
                           <a:latin typeface="Calibri"/>
                         </a:rPr>
-                        <a:t>A Mom Test-proof interview script and a how-to-run guide</a:t>
+                        <a:t>Co-write a Mom Test-proof interview script in the founder's own voice</a:t>
                       </a:r>
                     </a:p>
                   </a:txBody>
@@ -13973,837 +15495,6 @@
                   <a:tcPr marL="88900" marR="88900" marT="38100" marB="38100" anchor="ctr">
                     <a:solidFill>
                       <a:srgbClr val="FFFFFF"/>
-                    </a:solidFill>
-                  </a:tcPr>
-                </a:tc>
-              </a:tr>
-            </a:tbl>
-          </a:graphicData>
-        </a:graphic>
-      </p:graphicFrame>
-      <p:sp>
-        <p:nvSpPr>
-          <p:cNvPr id="9" name="TextBox 8"/>
-          <p:cNvSpPr txBox="1"/>
-          <p:nvPr/>
-        </p:nvSpPr>
-        <p:spPr>
-          <a:xfrm>
-            <a:off x="685800" y="6400800"/>
-            <a:ext cx="10820095" cy="274320"/>
-          </a:xfrm>
-          <a:prstGeom prst="rect">
-            <a:avLst/>
-          </a:prstGeom>
-          <a:noFill/>
-        </p:spPr>
-        <p:txBody>
-          <a:bodyPr wrap="square" anchor="t" lIns="0" rIns="0" tIns="0" bIns="0">
-            <a:spAutoFit/>
-          </a:bodyPr>
-          <a:lstStyle/>
-          <a:p>
-            <a:pPr algn="l"/>
-            <a:r>
-              <a:rPr sz="900" b="0">
-                <a:solidFill>
-                  <a:srgbClr val="5A6B7B"/>
-                </a:solidFill>
-                <a:latin typeface="Calibri"/>
-              </a:rPr>
-              <a:t>Spark Bootcamp  ·  a Claude Code plugin by Spark AI Agency</a:t>
-            </a:r>
-          </a:p>
-        </p:txBody>
-      </p:sp>
-      <p:sp>
-        <p:nvSpPr>
-          <p:cNvPr id="10" name="TextBox 9"/>
-          <p:cNvSpPr txBox="1"/>
-          <p:nvPr/>
-        </p:nvSpPr>
-        <p:spPr>
-          <a:xfrm>
-            <a:off x="10957255" y="6400800"/>
-            <a:ext cx="548640" cy="274320"/>
-          </a:xfrm>
-          <a:prstGeom prst="rect">
-            <a:avLst/>
-          </a:prstGeom>
-          <a:noFill/>
-        </p:spPr>
-        <p:txBody>
-          <a:bodyPr wrap="square" anchor="t" lIns="0" rIns="0" tIns="0" bIns="0">
-            <a:spAutoFit/>
-          </a:bodyPr>
-          <a:lstStyle/>
-          <a:p>
-            <a:pPr algn="r"/>
-            <a:r>
-              <a:rPr sz="900" b="0">
-                <a:solidFill>
-                  <a:srgbClr val="5A6B7B"/>
-                </a:solidFill>
-                <a:latin typeface="Calibri"/>
-              </a:rPr>
-              <a:t>8</a:t>
-            </a:r>
-          </a:p>
-        </p:txBody>
-      </p:sp>
-    </p:spTree>
-  </p:cSld>
-  <p:clrMapOvr>
-    <a:masterClrMapping/>
-  </p:clrMapOvr>
-</p:sld>
-</file>
-
-<file path=ppt/slides/slide9.xml><?xml version="1.0" encoding="utf-8"?>
-<p:sld xmlns:a="http://schemas.openxmlformats.org/drawingml/2006/main" xmlns:p="http://schemas.openxmlformats.org/presentationml/2006/main" xmlns:r="http://schemas.openxmlformats.org/officeDocument/2006/relationships">
-  <p:cSld>
-    <p:spTree>
-      <p:nvGrpSpPr>
-        <p:cNvPr id="1" name=""/>
-        <p:cNvGrpSpPr/>
-        <p:nvPr/>
-      </p:nvGrpSpPr>
-      <p:grpSpPr/>
-      <p:sp>
-        <p:nvSpPr>
-          <p:cNvPr id="2" name="Rectangle 1"/>
-          <p:cNvSpPr/>
-          <p:nvPr/>
-        </p:nvSpPr>
-        <p:spPr>
-          <a:xfrm>
-            <a:off x="0" y="0"/>
-            <a:ext cx="12191695" cy="6858000"/>
-          </a:xfrm>
-          <a:prstGeom prst="rect">
-            <a:avLst/>
-          </a:prstGeom>
-          <a:solidFill>
-            <a:srgbClr val="FFFFFF"/>
-          </a:solidFill>
-          <a:ln>
-            <a:noFill/>
-          </a:ln>
-          <a:effectLst/>
-        </p:spPr>
-        <p:style>
-          <a:lnRef idx="1">
-            <a:schemeClr val="accent1"/>
-          </a:lnRef>
-          <a:fillRef idx="3">
-            <a:schemeClr val="accent1"/>
-          </a:fillRef>
-          <a:effectRef idx="2">
-            <a:schemeClr val="accent1"/>
-          </a:effectRef>
-          <a:fontRef idx="minor">
-            <a:schemeClr val="lt1"/>
-          </a:fontRef>
-        </p:style>
-        <p:txBody>
-          <a:bodyPr rtlCol="0" anchor="ctr"/>
-          <a:lstStyle/>
-          <a:p>
-            <a:pPr algn="ctr"/>
-          </a:p>
-        </p:txBody>
-      </p:sp>
-      <p:sp>
-        <p:nvSpPr>
-          <p:cNvPr id="3" name="Rectangle 2"/>
-          <p:cNvSpPr/>
-          <p:nvPr/>
-        </p:nvSpPr>
-        <p:spPr>
-          <a:xfrm>
-            <a:off x="685800" y="566928"/>
-            <a:ext cx="310896" cy="310896"/>
-          </a:xfrm>
-          <a:prstGeom prst="rect">
-            <a:avLst/>
-          </a:prstGeom>
-          <a:solidFill>
-            <a:srgbClr val="F58A23"/>
-          </a:solidFill>
-          <a:ln>
-            <a:noFill/>
-          </a:ln>
-          <a:effectLst/>
-        </p:spPr>
-        <p:style>
-          <a:lnRef idx="1">
-            <a:schemeClr val="accent1"/>
-          </a:lnRef>
-          <a:fillRef idx="3">
-            <a:schemeClr val="accent1"/>
-          </a:fillRef>
-          <a:effectRef idx="2">
-            <a:schemeClr val="accent1"/>
-          </a:effectRef>
-          <a:fontRef idx="minor">
-            <a:schemeClr val="lt1"/>
-          </a:fontRef>
-        </p:style>
-        <p:txBody>
-          <a:bodyPr rtlCol="0" anchor="ctr"/>
-          <a:lstStyle/>
-          <a:p>
-            <a:pPr algn="ctr"/>
-          </a:p>
-        </p:txBody>
-      </p:sp>
-      <p:sp>
-        <p:nvSpPr>
-          <p:cNvPr id="4" name="TextBox 3"/>
-          <p:cNvSpPr txBox="1"/>
-          <p:nvPr/>
-        </p:nvSpPr>
-        <p:spPr>
-          <a:xfrm>
-            <a:off x="1143000" y="548640"/>
-            <a:ext cx="10362895" cy="274320"/>
-          </a:xfrm>
-          <a:prstGeom prst="rect">
-            <a:avLst/>
-          </a:prstGeom>
-          <a:noFill/>
-        </p:spPr>
-        <p:txBody>
-          <a:bodyPr wrap="square" anchor="t" lIns="0" rIns="0" tIns="0" bIns="0">
-            <a:spAutoFit/>
-          </a:bodyPr>
-          <a:lstStyle/>
-          <a:p>
-            <a:pPr algn="l"/>
-            <a:r>
-              <a:rPr sz="1200" b="1">
-                <a:solidFill>
-                  <a:srgbClr val="F58A23"/>
-                </a:solidFill>
-                <a:latin typeface="Calibri"/>
-              </a:rPr>
-              <a:t>DAY 2  ·  TUESDAY</a:t>
-            </a:r>
-          </a:p>
-        </p:txBody>
-      </p:sp>
-      <p:sp>
-        <p:nvSpPr>
-          <p:cNvPr id="5" name="TextBox 4"/>
-          <p:cNvSpPr txBox="1"/>
-          <p:nvPr/>
-        </p:nvSpPr>
-        <p:spPr>
-          <a:xfrm>
-            <a:off x="1143000" y="841248"/>
-            <a:ext cx="10362895" cy="640080"/>
-          </a:xfrm>
-          <a:prstGeom prst="rect">
-            <a:avLst/>
-          </a:prstGeom>
-          <a:noFill/>
-        </p:spPr>
-        <p:txBody>
-          <a:bodyPr wrap="square" anchor="t" lIns="0" rIns="0" tIns="0" bIns="0">
-            <a:spAutoFit/>
-          </a:bodyPr>
-          <a:lstStyle/>
-          <a:p>
-            <a:pPr algn="l"/>
-            <a:r>
-              <a:rPr sz="2800" b="1">
-                <a:solidFill>
-                  <a:srgbClr val="14202B"/>
-                </a:solidFill>
-                <a:latin typeface="Calibri"/>
-              </a:rPr>
-              <a:t>Market &amp; Proposition</a:t>
-            </a:r>
-          </a:p>
-        </p:txBody>
-      </p:sp>
-      <p:sp>
-        <p:nvSpPr>
-          <p:cNvPr id="6" name="Rectangle 5"/>
-          <p:cNvSpPr/>
-          <p:nvPr/>
-        </p:nvSpPr>
-        <p:spPr>
-          <a:xfrm>
-            <a:off x="1143000" y="1481328"/>
-            <a:ext cx="1097280" cy="38100"/>
-          </a:xfrm>
-          <a:prstGeom prst="rect">
-            <a:avLst/>
-          </a:prstGeom>
-          <a:solidFill>
-            <a:srgbClr val="14202B"/>
-          </a:solidFill>
-          <a:ln>
-            <a:noFill/>
-          </a:ln>
-          <a:effectLst/>
-        </p:spPr>
-        <p:style>
-          <a:lnRef idx="1">
-            <a:schemeClr val="accent1"/>
-          </a:lnRef>
-          <a:fillRef idx="3">
-            <a:schemeClr val="accent1"/>
-          </a:fillRef>
-          <a:effectRef idx="2">
-            <a:schemeClr val="accent1"/>
-          </a:effectRef>
-          <a:fontRef idx="minor">
-            <a:schemeClr val="lt1"/>
-          </a:fontRef>
-        </p:style>
-        <p:txBody>
-          <a:bodyPr rtlCol="0" anchor="ctr"/>
-          <a:lstStyle/>
-          <a:p>
-            <a:pPr algn="ctr"/>
-          </a:p>
-        </p:txBody>
-      </p:sp>
-      <p:sp>
-        <p:nvSpPr>
-          <p:cNvPr id="7" name="TextBox 6"/>
-          <p:cNvSpPr txBox="1"/>
-          <p:nvPr/>
-        </p:nvSpPr>
-        <p:spPr>
-          <a:xfrm>
-            <a:off x="1143000" y="1627632"/>
-            <a:ext cx="10362895" cy="274320"/>
-          </a:xfrm>
-          <a:prstGeom prst="rect">
-            <a:avLst/>
-          </a:prstGeom>
-          <a:noFill/>
-        </p:spPr>
-        <p:txBody>
-          <a:bodyPr wrap="square" anchor="t" lIns="0" rIns="0" tIns="0" bIns="0">
-            <a:spAutoFit/>
-          </a:bodyPr>
-          <a:lstStyle/>
-          <a:p>
-            <a:pPr algn="l"/>
-            <a:r>
-              <a:rPr sz="1250" b="1">
-                <a:solidFill>
-                  <a:srgbClr val="F58A23"/>
-                </a:solidFill>
-                <a:latin typeface="Calibri"/>
-              </a:rPr>
-              <a:t>Outcome: a market map, market sizing, a proposition and USP, a brand, and a hand-out pitch deck.</a:t>
-            </a:r>
-          </a:p>
-        </p:txBody>
-      </p:sp>
-      <p:graphicFrame>
-        <p:nvGraphicFramePr>
-          <p:cNvPr id="8" name="Table 7"/>
-          <p:cNvGraphicFramePr>
-            <a:graphicFrameLocks noGrp="1"/>
-          </p:cNvGraphicFramePr>
-          <p:nvPr/>
-        </p:nvGraphicFramePr>
-        <p:xfrm>
-          <a:off x="1143000" y="1993392"/>
-          <a:ext cx="10362895" cy="3163824"/>
-        </p:xfrm>
-        <a:graphic>
-          <a:graphicData uri="http://schemas.openxmlformats.org/drawingml/2006/table">
-            <a:tbl>
-              <a:tblPr firstRow="0" bandRow="0">
-                <a:tableStyleId>{5C22544A-7EE6-4342-B048-85BDC9FD1C3A}</a:tableStyleId>
-              </a:tblPr>
-              <a:tblGrid>
-                <a:gridCol w="2788920"/>
-                <a:gridCol w="7573975"/>
-              </a:tblGrid>
-              <a:tr h="365760">
-                <a:tc>
-                  <a:txBody>
-                    <a:bodyPr wrap="square"/>
-                    <a:lstStyle/>
-                    <a:p>
-                      <a:pPr algn="l"/>
-                      <a:r>
-                        <a:rPr sz="1200" b="1">
-                          <a:solidFill>
-                            <a:srgbClr val="FFFFFF"/>
-                          </a:solidFill>
-                          <a:latin typeface="Calibri"/>
-                        </a:rPr>
-                        <a:t>Skill</a:t>
-                      </a:r>
-                    </a:p>
-                  </a:txBody>
-                  <a:tcPr marL="88900" marR="88900" marT="38100" marB="38100" anchor="ctr">
-                    <a:solidFill>
-                      <a:srgbClr val="14202B"/>
-                    </a:solidFill>
-                  </a:tcPr>
-                </a:tc>
-                <a:tc>
-                  <a:txBody>
-                    <a:bodyPr wrap="square"/>
-                    <a:lstStyle/>
-                    <a:p>
-                      <a:pPr algn="l"/>
-                      <a:r>
-                        <a:rPr sz="1200" b="1">
-                          <a:solidFill>
-                            <a:srgbClr val="FFFFFF"/>
-                          </a:solidFill>
-                          <a:latin typeface="Calibri"/>
-                        </a:rPr>
-                        <a:t>What it does</a:t>
-                      </a:r>
-                    </a:p>
-                  </a:txBody>
-                  <a:tcPr marL="88900" marR="88900" marT="38100" marB="38100" anchor="ctr">
-                    <a:solidFill>
-                      <a:srgbClr val="14202B"/>
-                    </a:solidFill>
-                  </a:tcPr>
-                </a:tc>
-              </a:tr>
-              <a:tr h="310896">
-                <a:tc>
-                  <a:txBody>
-                    <a:bodyPr wrap="square"/>
-                    <a:lstStyle/>
-                    <a:p>
-                      <a:pPr algn="l"/>
-                      <a:r>
-                        <a:rPr sz="1150" b="1">
-                          <a:solidFill>
-                            <a:srgbClr val="14202B"/>
-                          </a:solidFill>
-                          <a:latin typeface="Consolas"/>
-                        </a:rPr>
-                        <a:t>d2-market-map</a:t>
-                      </a:r>
-                    </a:p>
-                  </a:txBody>
-                  <a:tcPr marL="88900" marR="88900" marT="38100" marB="38100" anchor="ctr">
-                    <a:solidFill>
-                      <a:srgbClr val="F7F9FB"/>
-                    </a:solidFill>
-                  </a:tcPr>
-                </a:tc>
-                <a:tc>
-                  <a:txBody>
-                    <a:bodyPr wrap="square"/>
-                    <a:lstStyle/>
-                    <a:p>
-                      <a:pPr algn="l"/>
-                      <a:r>
-                        <a:rPr sz="1150" b="0">
-                          <a:solidFill>
-                            <a:srgbClr val="14202B"/>
-                          </a:solidFill>
-                          <a:latin typeface="Calibri"/>
-                        </a:rPr>
-                        <a:t>Name the players, the value chain and the substitutes</a:t>
-                      </a:r>
-                    </a:p>
-                  </a:txBody>
-                  <a:tcPr marL="88900" marR="88900" marT="38100" marB="38100" anchor="ctr">
-                    <a:solidFill>
-                      <a:srgbClr val="F7F9FB"/>
-                    </a:solidFill>
-                  </a:tcPr>
-                </a:tc>
-              </a:tr>
-              <a:tr h="310896">
-                <a:tc>
-                  <a:txBody>
-                    <a:bodyPr wrap="square"/>
-                    <a:lstStyle/>
-                    <a:p>
-                      <a:pPr algn="l"/>
-                      <a:r>
-                        <a:rPr sz="1150" b="1">
-                          <a:solidFill>
-                            <a:srgbClr val="14202B"/>
-                          </a:solidFill>
-                          <a:latin typeface="Consolas"/>
-                        </a:rPr>
-                        <a:t>d2-market-sizing</a:t>
-                      </a:r>
-                    </a:p>
-                  </a:txBody>
-                  <a:tcPr marL="88900" marR="88900" marT="38100" marB="38100" anchor="ctr">
-                    <a:solidFill>
-                      <a:srgbClr val="FFFFFF"/>
-                    </a:solidFill>
-                  </a:tcPr>
-                </a:tc>
-                <a:tc>
-                  <a:txBody>
-                    <a:bodyPr wrap="square"/>
-                    <a:lstStyle/>
-                    <a:p>
-                      <a:pPr algn="l"/>
-                      <a:r>
-                        <a:rPr sz="1150" b="0">
-                          <a:solidFill>
-                            <a:srgbClr val="14202B"/>
-                          </a:solidFill>
-                          <a:latin typeface="Calibri"/>
-                        </a:rPr>
-                        <a:t>Size TAM, SAM and SOM two ways and triangulate</a:t>
-                      </a:r>
-                    </a:p>
-                  </a:txBody>
-                  <a:tcPr marL="88900" marR="88900" marT="38100" marB="38100" anchor="ctr">
-                    <a:solidFill>
-                      <a:srgbClr val="FFFFFF"/>
-                    </a:solidFill>
-                  </a:tcPr>
-                </a:tc>
-              </a:tr>
-              <a:tr h="310896">
-                <a:tc>
-                  <a:txBody>
-                    <a:bodyPr wrap="square"/>
-                    <a:lstStyle/>
-                    <a:p>
-                      <a:pPr algn="l"/>
-                      <a:r>
-                        <a:rPr sz="1150" b="1">
-                          <a:solidFill>
-                            <a:srgbClr val="14202B"/>
-                          </a:solidFill>
-                          <a:latin typeface="Consolas"/>
-                        </a:rPr>
-                        <a:t>d2-competitor-scan</a:t>
-                      </a:r>
-                    </a:p>
-                  </a:txBody>
-                  <a:tcPr marL="88900" marR="88900" marT="38100" marB="38100" anchor="ctr">
-                    <a:solidFill>
-                      <a:srgbClr val="F7F9FB"/>
-                    </a:solidFill>
-                  </a:tcPr>
-                </a:tc>
-                <a:tc>
-                  <a:txBody>
-                    <a:bodyPr wrap="square"/>
-                    <a:lstStyle/>
-                    <a:p>
-                      <a:pPr algn="l"/>
-                      <a:r>
-                        <a:rPr sz="1150" b="0">
-                          <a:solidFill>
-                            <a:srgbClr val="14202B"/>
-                          </a:solidFill>
-                          <a:latin typeface="Calibri"/>
-                        </a:rPr>
-                        <a:t>Lay the rivals side by side and name the gap</a:t>
-                      </a:r>
-                    </a:p>
-                  </a:txBody>
-                  <a:tcPr marL="88900" marR="88900" marT="38100" marB="38100" anchor="ctr">
-                    <a:solidFill>
-                      <a:srgbClr val="F7F9FB"/>
-                    </a:solidFill>
-                  </a:tcPr>
-                </a:tc>
-              </a:tr>
-              <a:tr h="310896">
-                <a:tc>
-                  <a:txBody>
-                    <a:bodyPr wrap="square"/>
-                    <a:lstStyle/>
-                    <a:p>
-                      <a:pPr algn="l"/>
-                      <a:r>
-                        <a:rPr sz="1150" b="1">
-                          <a:solidFill>
-                            <a:srgbClr val="14202B"/>
-                          </a:solidFill>
-                          <a:latin typeface="Consolas"/>
-                        </a:rPr>
-                        <a:t>d2-positioning</a:t>
-                      </a:r>
-                    </a:p>
-                  </a:txBody>
-                  <a:tcPr marL="88900" marR="88900" marT="38100" marB="38100" anchor="ctr">
-                    <a:solidFill>
-                      <a:srgbClr val="FFFFFF"/>
-                    </a:solidFill>
-                  </a:tcPr>
-                </a:tc>
-                <a:tc>
-                  <a:txBody>
-                    <a:bodyPr wrap="square"/>
-                    <a:lstStyle/>
-                    <a:p>
-                      <a:pPr algn="l"/>
-                      <a:r>
-                        <a:rPr sz="1150" b="0">
-                          <a:solidFill>
-                            <a:srgbClr val="14202B"/>
-                          </a:solidFill>
-                          <a:latin typeface="Calibri"/>
-                        </a:rPr>
-                        <a:t>Fix where you win and state the one USP</a:t>
-                      </a:r>
-                    </a:p>
-                  </a:txBody>
-                  <a:tcPr marL="88900" marR="88900" marT="38100" marB="38100" anchor="ctr">
-                    <a:solidFill>
-                      <a:srgbClr val="FFFFFF"/>
-                    </a:solidFill>
-                  </a:tcPr>
-                </a:tc>
-              </a:tr>
-              <a:tr h="310896">
-                <a:tc>
-                  <a:txBody>
-                    <a:bodyPr wrap="square"/>
-                    <a:lstStyle/>
-                    <a:p>
-                      <a:pPr algn="l"/>
-                      <a:r>
-                        <a:rPr sz="1150" b="1">
-                          <a:solidFill>
-                            <a:srgbClr val="14202B"/>
-                          </a:solidFill>
-                          <a:latin typeface="Consolas"/>
-                        </a:rPr>
-                        <a:t>d2-proposition</a:t>
-                      </a:r>
-                    </a:p>
-                  </a:txBody>
-                  <a:tcPr marL="88900" marR="88900" marT="38100" marB="38100" anchor="ctr">
-                    <a:solidFill>
-                      <a:srgbClr val="F7F9FB"/>
-                    </a:solidFill>
-                  </a:tcPr>
-                </a:tc>
-                <a:tc>
-                  <a:txBody>
-                    <a:bodyPr wrap="square"/>
-                    <a:lstStyle/>
-                    <a:p>
-                      <a:pPr algn="l"/>
-                      <a:r>
-                        <a:rPr sz="1150" b="0">
-                          <a:solidFill>
-                            <a:srgbClr val="14202B"/>
-                          </a:solidFill>
-                          <a:latin typeface="Calibri"/>
-                        </a:rPr>
-                        <a:t>Turn jobs, pains and gains into one proposition, with a number</a:t>
-                      </a:r>
-                    </a:p>
-                  </a:txBody>
-                  <a:tcPr marL="88900" marR="88900" marT="38100" marB="38100" anchor="ctr">
-                    <a:solidFill>
-                      <a:srgbClr val="F7F9FB"/>
-                    </a:solidFill>
-                  </a:tcPr>
-                </a:tc>
-              </a:tr>
-              <a:tr h="310896">
-                <a:tc>
-                  <a:txBody>
-                    <a:bodyPr wrap="square"/>
-                    <a:lstStyle/>
-                    <a:p>
-                      <a:pPr algn="l"/>
-                      <a:r>
-                        <a:rPr sz="1150" b="1">
-                          <a:solidFill>
-                            <a:srgbClr val="14202B"/>
-                          </a:solidFill>
-                          <a:latin typeface="Consolas"/>
-                        </a:rPr>
-                        <a:t>d2-messaging</a:t>
-                      </a:r>
-                    </a:p>
-                  </a:txBody>
-                  <a:tcPr marL="88900" marR="88900" marT="38100" marB="38100" anchor="ctr">
-                    <a:solidFill>
-                      <a:srgbClr val="FFFFFF"/>
-                    </a:solidFill>
-                  </a:tcPr>
-                </a:tc>
-                <a:tc>
-                  <a:txBody>
-                    <a:bodyPr wrap="square"/>
-                    <a:lstStyle/>
-                    <a:p>
-                      <a:pPr algn="l"/>
-                      <a:r>
-                        <a:rPr sz="1150" b="0">
-                          <a:solidFill>
-                            <a:srgbClr val="14202B"/>
-                          </a:solidFill>
-                          <a:latin typeface="Calibri"/>
-                        </a:rPr>
-                        <a:t>A one-liner, three key messages and a 30-second pitch</a:t>
-                      </a:r>
-                    </a:p>
-                  </a:txBody>
-                  <a:tcPr marL="88900" marR="88900" marT="38100" marB="38100" anchor="ctr">
-                    <a:solidFill>
-                      <a:srgbClr val="FFFFFF"/>
-                    </a:solidFill>
-                  </a:tcPr>
-                </a:tc>
-              </a:tr>
-              <a:tr h="310896">
-                <a:tc>
-                  <a:txBody>
-                    <a:bodyPr wrap="square"/>
-                    <a:lstStyle/>
-                    <a:p>
-                      <a:pPr algn="l"/>
-                      <a:r>
-                        <a:rPr sz="1150" b="1">
-                          <a:solidFill>
-                            <a:srgbClr val="14202B"/>
-                          </a:solidFill>
-                          <a:latin typeface="Consolas"/>
-                        </a:rPr>
-                        <a:t>d2-brand-foundations</a:t>
-                      </a:r>
-                    </a:p>
-                  </a:txBody>
-                  <a:tcPr marL="88900" marR="88900" marT="38100" marB="38100" anchor="ctr">
-                    <a:solidFill>
-                      <a:srgbClr val="F7F9FB"/>
-                    </a:solidFill>
-                  </a:tcPr>
-                </a:tc>
-                <a:tc>
-                  <a:txBody>
-                    <a:bodyPr wrap="square"/>
-                    <a:lstStyle/>
-                    <a:p>
-                      <a:pPr algn="l"/>
-                      <a:r>
-                        <a:rPr sz="1150" b="0">
-                          <a:solidFill>
-                            <a:srgbClr val="14202B"/>
-                          </a:solidFill>
-                          <a:latin typeface="Calibri"/>
-                        </a:rPr>
-                        <a:t>Values, personality, naming and tone of voice</a:t>
-                      </a:r>
-                    </a:p>
-                  </a:txBody>
-                  <a:tcPr marL="88900" marR="88900" marT="38100" marB="38100" anchor="ctr">
-                    <a:solidFill>
-                      <a:srgbClr val="F7F9FB"/>
-                    </a:solidFill>
-                  </a:tcPr>
-                </a:tc>
-              </a:tr>
-              <a:tr h="310896">
-                <a:tc>
-                  <a:txBody>
-                    <a:bodyPr wrap="square"/>
-                    <a:lstStyle/>
-                    <a:p>
-                      <a:pPr algn="l"/>
-                      <a:r>
-                        <a:rPr sz="1150" b="1">
-                          <a:solidFill>
-                            <a:srgbClr val="14202B"/>
-                          </a:solidFill>
-                          <a:latin typeface="Consolas"/>
-                        </a:rPr>
-                        <a:t>d2-visual-identity</a:t>
-                      </a:r>
-                    </a:p>
-                  </a:txBody>
-                  <a:tcPr marL="88900" marR="88900" marT="38100" marB="38100" anchor="ctr">
-                    <a:solidFill>
-                      <a:srgbClr val="FFFFFF"/>
-                    </a:solidFill>
-                  </a:tcPr>
-                </a:tc>
-                <a:tc>
-                  <a:txBody>
-                    <a:bodyPr wrap="square"/>
-                    <a:lstStyle/>
-                    <a:p>
-                      <a:pPr algn="l"/>
-                      <a:r>
-                        <a:rPr sz="1150" b="0">
-                          <a:solidFill>
-                            <a:srgbClr val="14202B"/>
-                          </a:solidFill>
-                          <a:latin typeface="Calibri"/>
-                        </a:rPr>
-                        <a:t>A palette that passes contrast, two fonts and a simple logo</a:t>
-                      </a:r>
-                    </a:p>
-                  </a:txBody>
-                  <a:tcPr marL="88900" marR="88900" marT="38100" marB="38100" anchor="ctr">
-                    <a:solidFill>
-                      <a:srgbClr val="FFFFFF"/>
-                    </a:solidFill>
-                  </a:tcPr>
-                </a:tc>
-              </a:tr>
-              <a:tr h="310896">
-                <a:tc>
-                  <a:txBody>
-                    <a:bodyPr wrap="square"/>
-                    <a:lstStyle/>
-                    <a:p>
-                      <a:pPr algn="l"/>
-                      <a:r>
-                        <a:rPr sz="1150" b="1">
-                          <a:solidFill>
-                            <a:srgbClr val="14202B"/>
-                          </a:solidFill>
-                          <a:latin typeface="Consolas"/>
-                        </a:rPr>
-                        <a:t>d2-pitch-deck</a:t>
-                      </a:r>
-                    </a:p>
-                  </a:txBody>
-                  <a:tcPr marL="88900" marR="88900" marT="38100" marB="38100" anchor="ctr">
-                    <a:solidFill>
-                      <a:srgbClr val="F7F9FB"/>
-                    </a:solidFill>
-                  </a:tcPr>
-                </a:tc>
-                <a:tc>
-                  <a:txBody>
-                    <a:bodyPr wrap="square"/>
-                    <a:lstStyle/>
-                    <a:p>
-                      <a:pPr algn="l"/>
-                      <a:r>
-                        <a:rPr sz="1150" b="0">
-                          <a:solidFill>
-                            <a:srgbClr val="14202B"/>
-                          </a:solidFill>
-                          <a:latin typeface="Calibri"/>
-                        </a:rPr>
-                        <a:t>Assemble the day into a branded, evidence-traced pitch deck</a:t>
-                      </a:r>
-                    </a:p>
-                  </a:txBody>
-                  <a:tcPr marL="88900" marR="88900" marT="38100" marB="38100" anchor="ctr">
-                    <a:solidFill>
-                      <a:srgbClr val="F7F9FB"/>
                     </a:solidFill>
                   </a:tcPr>
                 </a:tc>

--- a/docs/spark-bootcamp-overview.pptx
+++ b/docs/spark-bootcamp-overview.pptx
@@ -3321,7 +3321,7 @@
                 </a:solidFill>
                 <a:latin typeface="Calibri"/>
               </a:rPr>
-              <a:t>A Claude Code plugin. 62 skills, a pre-work phase and one guided week.</a:t>
+              <a:t>A Claude Code plugin. 63 skills, a pre-work phase and one guided week.</a:t>
             </a:r>
           </a:p>
           <a:p>
@@ -3600,7 +3600,7 @@
                 </a:solidFill>
                 <a:latin typeface="Calibri"/>
               </a:rPr>
-              <a:t>Outcome: a market map, market sizing, a proposition and USP, a brand, and a hand-out pitch deck.</a:t>
+              <a:t>Outcome: a market map, sizing, a proposition and USP, a chosen brand with its book, and a pitch deck.</a:t>
             </a:r>
           </a:p>
         </p:txBody>
@@ -3615,7 +3615,7 @@
         </p:nvGraphicFramePr>
         <p:xfrm>
           <a:off x="1143000" y="1993392"/>
-          <a:ext cx="10362895" cy="3163824"/>
+          <a:ext cx="10362895" cy="3474720"/>
         </p:xfrm>
         <a:graphic>
           <a:graphicData uri="http://schemas.openxmlformats.org/drawingml/2006/table">
@@ -3683,7 +3683,7 @@
                     <a:p>
                       <a:pPr algn="l"/>
                       <a:r>
-                        <a:rPr sz="1150" b="1">
+                        <a:rPr sz="1100" b="1">
                           <a:solidFill>
                             <a:srgbClr val="14202B"/>
                           </a:solidFill>
@@ -3706,7 +3706,7 @@
                     <a:p>
                       <a:pPr algn="l"/>
                       <a:r>
-                        <a:rPr sz="1150" b="0">
+                        <a:rPr sz="1100" b="0">
                           <a:solidFill>
                             <a:srgbClr val="14202B"/>
                           </a:solidFill>
@@ -3731,7 +3731,7 @@
                     <a:p>
                       <a:pPr algn="l"/>
                       <a:r>
-                        <a:rPr sz="1150" b="1">
+                        <a:rPr sz="1100" b="1">
                           <a:solidFill>
                             <a:srgbClr val="14202B"/>
                           </a:solidFill>
@@ -3754,7 +3754,7 @@
                     <a:p>
                       <a:pPr algn="l"/>
                       <a:r>
-                        <a:rPr sz="1150" b="0">
+                        <a:rPr sz="1100" b="0">
                           <a:solidFill>
                             <a:srgbClr val="14202B"/>
                           </a:solidFill>
@@ -3779,7 +3779,7 @@
                     <a:p>
                       <a:pPr algn="l"/>
                       <a:r>
-                        <a:rPr sz="1150" b="1">
+                        <a:rPr sz="1100" b="1">
                           <a:solidFill>
                             <a:srgbClr val="14202B"/>
                           </a:solidFill>
@@ -3802,7 +3802,7 @@
                     <a:p>
                       <a:pPr algn="l"/>
                       <a:r>
-                        <a:rPr sz="1150" b="0">
+                        <a:rPr sz="1100" b="0">
                           <a:solidFill>
                             <a:srgbClr val="14202B"/>
                           </a:solidFill>
@@ -3827,7 +3827,7 @@
                     <a:p>
                       <a:pPr algn="l"/>
                       <a:r>
-                        <a:rPr sz="1150" b="1">
+                        <a:rPr sz="1100" b="1">
                           <a:solidFill>
                             <a:srgbClr val="14202B"/>
                           </a:solidFill>
@@ -3850,7 +3850,7 @@
                     <a:p>
                       <a:pPr algn="l"/>
                       <a:r>
-                        <a:rPr sz="1150" b="0">
+                        <a:rPr sz="1100" b="0">
                           <a:solidFill>
                             <a:srgbClr val="14202B"/>
                           </a:solidFill>
@@ -3875,7 +3875,7 @@
                     <a:p>
                       <a:pPr algn="l"/>
                       <a:r>
-                        <a:rPr sz="1150" b="1">
+                        <a:rPr sz="1100" b="1">
                           <a:solidFill>
                             <a:srgbClr val="14202B"/>
                           </a:solidFill>
@@ -3898,7 +3898,7 @@
                     <a:p>
                       <a:pPr algn="l"/>
                       <a:r>
-                        <a:rPr sz="1150" b="0">
+                        <a:rPr sz="1100" b="0">
                           <a:solidFill>
                             <a:srgbClr val="14202B"/>
                           </a:solidFill>
@@ -3923,7 +3923,7 @@
                     <a:p>
                       <a:pPr algn="l"/>
                       <a:r>
-                        <a:rPr sz="1150" b="1">
+                        <a:rPr sz="1100" b="1">
                           <a:solidFill>
                             <a:srgbClr val="14202B"/>
                           </a:solidFill>
@@ -3946,7 +3946,7 @@
                     <a:p>
                       <a:pPr algn="l"/>
                       <a:r>
-                        <a:rPr sz="1150" b="0">
+                        <a:rPr sz="1100" b="0">
                           <a:solidFill>
                             <a:srgbClr val="14202B"/>
                           </a:solidFill>
@@ -3971,7 +3971,7 @@
                     <a:p>
                       <a:pPr algn="l"/>
                       <a:r>
-                        <a:rPr sz="1150" b="1">
+                        <a:rPr sz="1100" b="1">
                           <a:solidFill>
                             <a:srgbClr val="14202B"/>
                           </a:solidFill>
@@ -3994,7 +3994,7 @@
                     <a:p>
                       <a:pPr algn="l"/>
                       <a:r>
-                        <a:rPr sz="1150" b="0">
+                        <a:rPr sz="1100" b="0">
                           <a:solidFill>
                             <a:srgbClr val="14202B"/>
                           </a:solidFill>
@@ -4019,7 +4019,7 @@
                     <a:p>
                       <a:pPr algn="l"/>
                       <a:r>
-                        <a:rPr sz="1150" b="1">
+                        <a:rPr sz="1100" b="1">
                           <a:solidFill>
                             <a:srgbClr val="14202B"/>
                           </a:solidFill>
@@ -4042,13 +4042,13 @@
                     <a:p>
                       <a:pPr algn="l"/>
                       <a:r>
-                        <a:rPr sz="1150" b="0">
+                        <a:rPr sz="1100" b="0">
                           <a:solidFill>
                             <a:srgbClr val="14202B"/>
                           </a:solidFill>
                           <a:latin typeface="Calibri"/>
                         </a:rPr>
-                        <a:t>A palette that passes contrast, two fonts and a simple logo</a:t>
+                        <a:t>Choose the logo from 3 concepts, the fonts and an AA-safe palette</a:t>
                       </a:r>
                     </a:p>
                   </a:txBody>
@@ -4067,13 +4067,13 @@
                     <a:p>
                       <a:pPr algn="l"/>
                       <a:r>
-                        <a:rPr sz="1150" b="1">
+                        <a:rPr sz="1100" b="1">
                           <a:solidFill>
                             <a:srgbClr val="14202B"/>
                           </a:solidFill>
                           <a:latin typeface="Consolas"/>
                         </a:rPr>
-                        <a:t>d2-pitch-deck</a:t>
+                        <a:t>d2-brand-book</a:t>
                       </a:r>
                     </a:p>
                   </a:txBody>
@@ -4090,7 +4090,55 @@
                     <a:p>
                       <a:pPr algn="l"/>
                       <a:r>
-                        <a:rPr sz="1150" b="0">
+                        <a:rPr sz="1100" b="0">
+                          <a:solidFill>
+                            <a:srgbClr val="14202B"/>
+                          </a:solidFill>
+                          <a:latin typeface="Calibri"/>
+                        </a:rPr>
+                        <a:t>The full logo kit and an 8-section brand book, HTML and PDF</a:t>
+                      </a:r>
+                    </a:p>
+                  </a:txBody>
+                  <a:tcPr marL="88900" marR="88900" marT="38100" marB="38100" anchor="ctr">
+                    <a:solidFill>
+                      <a:srgbClr val="F7F9FB"/>
+                    </a:solidFill>
+                  </a:tcPr>
+                </a:tc>
+              </a:tr>
+              <a:tr h="310896">
+                <a:tc>
+                  <a:txBody>
+                    <a:bodyPr wrap="square"/>
+                    <a:lstStyle/>
+                    <a:p>
+                      <a:pPr algn="l"/>
+                      <a:r>
+                        <a:rPr sz="1100" b="1">
+                          <a:solidFill>
+                            <a:srgbClr val="14202B"/>
+                          </a:solidFill>
+                          <a:latin typeface="Consolas"/>
+                        </a:rPr>
+                        <a:t>d2-pitch-deck</a:t>
+                      </a:r>
+                    </a:p>
+                  </a:txBody>
+                  <a:tcPr marL="88900" marR="88900" marT="38100" marB="38100" anchor="ctr">
+                    <a:solidFill>
+                      <a:srgbClr val="FFFFFF"/>
+                    </a:solidFill>
+                  </a:tcPr>
+                </a:tc>
+                <a:tc>
+                  <a:txBody>
+                    <a:bodyPr wrap="square"/>
+                    <a:lstStyle/>
+                    <a:p>
+                      <a:pPr algn="l"/>
+                      <a:r>
+                        <a:rPr sz="1100" b="0">
                           <a:solidFill>
                             <a:srgbClr val="14202B"/>
                           </a:solidFill>
@@ -4102,7 +4150,7 @@
                   </a:txBody>
                   <a:tcPr marL="88900" marR="88900" marT="38100" marB="38100" anchor="ctr">
                     <a:solidFill>
-                      <a:srgbClr val="F7F9FB"/>
+                      <a:srgbClr val="FFFFFF"/>
                     </a:solidFill>
                   </a:tcPr>
                 </a:tc>
@@ -9424,7 +9472,7 @@
                 </a:solidFill>
                 <a:latin typeface="Calibri"/>
               </a:rPr>
-              <a:t>62</a:t>
+              <a:t>63</a:t>
             </a:r>
           </a:p>
           <a:p>
@@ -12471,7 +12519,7 @@
                 </a:solidFill>
                 <a:latin typeface="Calibri"/>
               </a:rPr>
-              <a:t>46 skills that do the phase work, each producing one concrete artefact</a:t>
+              <a:t>47 skills that do the phase work, each producing one concrete artefact</a:t>
             </a:r>
           </a:p>
         </p:txBody>

--- a/docs/spark-bootcamp-overview.pptx
+++ b/docs/spark-bootcamp-overview.pptx
@@ -5421,7 +5421,7 @@
         </p:nvGraphicFramePr>
         <p:xfrm>
           <a:off x="1143000" y="1993392"/>
-          <a:ext cx="10362895" cy="3163824"/>
+          <a:ext cx="10362895" cy="3474720"/>
         </p:xfrm>
         <a:graphic>
           <a:graphicData uri="http://schemas.openxmlformats.org/drawingml/2006/table">
@@ -5639,7 +5639,7 @@
                           </a:solidFill>
                           <a:latin typeface="Consolas"/>
                         </a:rPr>
-                        <a:t>d4-sales-deck</a:t>
+                        <a:t>d4-pricing-model</a:t>
                       </a:r>
                     </a:p>
                   </a:txBody>
@@ -5662,7 +5662,7 @@
                           </a:solidFill>
                           <a:latin typeface="Calibri"/>
                         </a:rPr>
-                        <a:t>The deck that closes one named prospect</a:t>
+                        <a:t>Commit to one pricing model and a GBP 2,000 floor, before the deck carries a price</a:t>
                       </a:r>
                     </a:p>
                   </a:txBody>
@@ -5687,7 +5687,7 @@
                           </a:solidFill>
                           <a:latin typeface="Consolas"/>
                         </a:rPr>
-                        <a:t>d4-intake-process</a:t>
+                        <a:t>d4-sales-deck</a:t>
                       </a:r>
                     </a:p>
                   </a:txBody>
@@ -5710,7 +5710,7 @@
                           </a:solidFill>
                           <a:latin typeface="Calibri"/>
                         </a:rPr>
-                        <a:t>Proposal to delivery, with a signable template per stage</a:t>
+                        <a:t>The deck that closes one named prospect</a:t>
                       </a:r>
                     </a:p>
                   </a:txBody>
@@ -5735,7 +5735,7 @@
                           </a:solidFill>
                           <a:latin typeface="Consolas"/>
                         </a:rPr>
-                        <a:t>d4-onboarding-pack</a:t>
+                        <a:t>d4-intake-process</a:t>
                       </a:r>
                     </a:p>
                   </a:txBody>
@@ -5758,7 +5758,7 @@
                           </a:solidFill>
                           <a:latin typeface="Calibri"/>
                         </a:rPr>
-                        <a:t>Make a new client's first week feel handled</a:t>
+                        <a:t>Proposal to delivery, with a signable template per stage</a:t>
                       </a:r>
                     </a:p>
                   </a:txBody>
@@ -5783,7 +5783,7 @@
                           </a:solidFill>
                           <a:latin typeface="Consolas"/>
                         </a:rPr>
-                        <a:t>d4-marketing-funnel</a:t>
+                        <a:t>d4-onboarding-pack</a:t>
                       </a:r>
                     </a:p>
                   </a:txBody>
@@ -5806,7 +5806,7 @@
                           </a:solidFill>
                           <a:latin typeface="Calibri"/>
                         </a:rPr>
-                        <a:t>Awareness to purchase, with named channels</a:t>
+                        <a:t>Make a new client's first week feel handled</a:t>
                       </a:r>
                     </a:p>
                   </a:txBody>
@@ -5831,7 +5831,7 @@
                           </a:solidFill>
                           <a:latin typeface="Consolas"/>
                         </a:rPr>
-                        <a:t>d4-gtm-plan</a:t>
+                        <a:t>d4-marketing-funnel</a:t>
                       </a:r>
                     </a:p>
                   </a:txBody>
@@ -5854,7 +5854,7 @@
                           </a:solidFill>
                           <a:latin typeface="Calibri"/>
                         </a:rPr>
-                        <a:t>Name the first 10 customers, ranked by warmth</a:t>
+                        <a:t>Awareness to purchase, with named channels</a:t>
                       </a:r>
                     </a:p>
                   </a:txBody>
@@ -5879,7 +5879,7 @@
                           </a:solidFill>
                           <a:latin typeface="Consolas"/>
                         </a:rPr>
-                        <a:t>d4-book-sale</a:t>
+                        <a:t>d4-gtm-plan</a:t>
                       </a:r>
                     </a:p>
                   </a:txBody>
@@ -5902,13 +5902,61 @@
                           </a:solidFill>
                           <a:latin typeface="Calibri"/>
                         </a:rPr>
+                        <a:t>Name the first 10 customers, ranked by warmth</a:t>
+                      </a:r>
+                    </a:p>
+                  </a:txBody>
+                  <a:tcPr marL="88900" marR="88900" marT="38100" marB="38100" anchor="ctr">
+                    <a:solidFill>
+                      <a:srgbClr val="F7F9FB"/>
+                    </a:solidFill>
+                  </a:tcPr>
+                </a:tc>
+              </a:tr>
+              <a:tr h="310896">
+                <a:tc>
+                  <a:txBody>
+                    <a:bodyPr wrap="square"/>
+                    <a:lstStyle/>
+                    <a:p>
+                      <a:pPr algn="l"/>
+                      <a:r>
+                        <a:rPr sz="1150" b="1">
+                          <a:solidFill>
+                            <a:srgbClr val="14202B"/>
+                          </a:solidFill>
+                          <a:latin typeface="Consolas"/>
+                        </a:rPr>
+                        <a:t>d4-book-sale</a:t>
+                      </a:r>
+                    </a:p>
+                  </a:txBody>
+                  <a:tcPr marL="88900" marR="88900" marT="38100" marB="38100" anchor="ctr">
+                    <a:solidFill>
+                      <a:srgbClr val="FFFFFF"/>
+                    </a:solidFill>
+                  </a:tcPr>
+                </a:tc>
+                <a:tc>
+                  <a:txBody>
+                    <a:bodyPr wrap="square"/>
+                    <a:lstStyle/>
+                    <a:p>
+                      <a:pPr algn="l"/>
+                      <a:r>
+                        <a:rPr sz="1150" b="0">
+                          <a:solidFill>
+                            <a:srgbClr val="14202B"/>
+                          </a:solidFill>
+                          <a:latin typeface="Calibri"/>
+                        </a:rPr>
                         <a:t>Get the warmest prospect into a confirmed Friday slot</a:t>
                       </a:r>
                     </a:p>
                   </a:txBody>
                   <a:tcPr marL="88900" marR="88900" marT="38100" marB="38100" anchor="ctr">
                     <a:solidFill>
-                      <a:srgbClr val="F7F9FB"/>
+                      <a:srgbClr val="FFFFFF"/>
                     </a:solidFill>
                   </a:tcPr>
                 </a:tc>
@@ -6252,7 +6300,7 @@
         </p:nvGraphicFramePr>
         <p:xfrm>
           <a:off x="1143000" y="1993392"/>
-          <a:ext cx="10362895" cy="3163824"/>
+          <a:ext cx="10362895" cy="2852928"/>
         </p:xfrm>
         <a:graphic>
           <a:graphicData uri="http://schemas.openxmlformats.org/drawingml/2006/table">
@@ -6422,7 +6470,7 @@
                           </a:solidFill>
                           <a:latin typeface="Consolas"/>
                         </a:rPr>
-                        <a:t>d5-pricing-model</a:t>
+                        <a:t>d5-price-number</a:t>
                       </a:r>
                     </a:p>
                   </a:txBody>
@@ -6445,7 +6493,7 @@
                           </a:solidFill>
                           <a:latin typeface="Calibri"/>
                         </a:rPr>
-                        <a:t>Commit to one pricing model, with the reason written down</a:t>
+                        <a:t>Three packages priced on the Day 4 model, one recommended, floor £2,000</a:t>
                       </a:r>
                     </a:p>
                   </a:txBody>
@@ -6470,7 +6518,7 @@
                           </a:solidFill>
                           <a:latin typeface="Consolas"/>
                         </a:rPr>
-                        <a:t>d5-price-number</a:t>
+                        <a:t>d5-proposal</a:t>
                       </a:r>
                     </a:p>
                   </a:txBody>
@@ -6493,7 +6541,7 @@
                           </a:solidFill>
                           <a:latin typeface="Calibri"/>
                         </a:rPr>
-                        <a:t>Three packages, one recommended, floor £2,000</a:t>
+                        <a:t>A one-page offer: problem, target, price, next step</a:t>
                       </a:r>
                     </a:p>
                   </a:txBody>
@@ -6518,7 +6566,7 @@
                           </a:solidFill>
                           <a:latin typeface="Consolas"/>
                         </a:rPr>
-                        <a:t>d5-proposal</a:t>
+                        <a:t>d5-paperwork</a:t>
                       </a:r>
                     </a:p>
                   </a:txBody>
@@ -6541,7 +6589,7 @@
                           </a:solidFill>
                           <a:latin typeface="Calibri"/>
                         </a:rPr>
-                        <a:t>A one-page offer: problem, target, price, next step</a:t>
+                        <a:t>Draft engagement letter, terms, invoice and a way to get paid</a:t>
                       </a:r>
                     </a:p>
                   </a:txBody>
@@ -6566,7 +6614,7 @@
                           </a:solidFill>
                           <a:latin typeface="Consolas"/>
                         </a:rPr>
-                        <a:t>d5-paperwork</a:t>
+                        <a:t>d5-rehearse</a:t>
                       </a:r>
                     </a:p>
                   </a:txBody>
@@ -6589,7 +6637,7 @@
                           </a:solidFill>
                           <a:latin typeface="Calibri"/>
                         </a:rPr>
-                        <a:t>Draft engagement letter, terms, invoice and a way to get paid</a:t>
+                        <a:t>Role-play the sale until the ask feels natural</a:t>
                       </a:r>
                     </a:p>
                   </a:txBody>
@@ -6614,7 +6662,7 @@
                           </a:solidFill>
                           <a:latin typeface="Consolas"/>
                         </a:rPr>
-                        <a:t>d5-rehearse</a:t>
+                        <a:t>d5-close</a:t>
                       </a:r>
                     </a:p>
                   </a:txBody>
@@ -6637,7 +6685,7 @@
                           </a:solidFill>
                           <a:latin typeface="Calibri"/>
                         </a:rPr>
-                        <a:t>Role-play the sale until the ask feels natural</a:t>
+                        <a:t>Turn the yes into a signature, recorded with a tier and amount</a:t>
                       </a:r>
                     </a:p>
                   </a:txBody>
@@ -6662,7 +6710,7 @@
                           </a:solidFill>
                           <a:latin typeface="Consolas"/>
                         </a:rPr>
-                        <a:t>d5-close</a:t>
+                        <a:t>d5-review</a:t>
                       </a:r>
                     </a:p>
                   </a:txBody>
@@ -6685,61 +6733,13 @@
                           </a:solidFill>
                           <a:latin typeface="Calibri"/>
                         </a:rPr>
-                        <a:t>Turn the yes into a signature, recorded with a tier and amount</a:t>
+                        <a:t>Package the week and score it against your target</a:t>
                       </a:r>
                     </a:p>
                   </a:txBody>
                   <a:tcPr marL="88900" marR="88900" marT="38100" marB="38100" anchor="ctr">
                     <a:solidFill>
                       <a:srgbClr val="FFFFFF"/>
-                    </a:solidFill>
-                  </a:tcPr>
-                </a:tc>
-              </a:tr>
-              <a:tr h="310896">
-                <a:tc>
-                  <a:txBody>
-                    <a:bodyPr wrap="square"/>
-                    <a:lstStyle/>
-                    <a:p>
-                      <a:pPr algn="l"/>
-                      <a:r>
-                        <a:rPr sz="1150" b="1">
-                          <a:solidFill>
-                            <a:srgbClr val="14202B"/>
-                          </a:solidFill>
-                          <a:latin typeface="Consolas"/>
-                        </a:rPr>
-                        <a:t>d5-review</a:t>
-                      </a:r>
-                    </a:p>
-                  </a:txBody>
-                  <a:tcPr marL="88900" marR="88900" marT="38100" marB="38100" anchor="ctr">
-                    <a:solidFill>
-                      <a:srgbClr val="F7F9FB"/>
-                    </a:solidFill>
-                  </a:tcPr>
-                </a:tc>
-                <a:tc>
-                  <a:txBody>
-                    <a:bodyPr wrap="square"/>
-                    <a:lstStyle/>
-                    <a:p>
-                      <a:pPr algn="l"/>
-                      <a:r>
-                        <a:rPr sz="1150" b="0">
-                          <a:solidFill>
-                            <a:srgbClr val="14202B"/>
-                          </a:solidFill>
-                          <a:latin typeface="Calibri"/>
-                        </a:rPr>
-                        <a:t>Package the week and score it against your target</a:t>
-                      </a:r>
-                    </a:p>
-                  </a:txBody>
-                  <a:tcPr marL="88900" marR="88900" marT="38100" marB="38100" anchor="ctr">
-                    <a:solidFill>
-                      <a:srgbClr val="F7F9FB"/>
                     </a:solidFill>
                   </a:tcPr>
                 </a:tc>
